--- a/スキルチェック_1000名フィルタリング条件.pptx
+++ b/スキルチェック_1000名フィルタリング条件.pptx
@@ -1253,7 +1253,7 @@
                 <a:ea typeface="Meiryo" pitchFamily="34" charset="-122"/>
                 <a:cs typeface="Meiryo" pitchFamily="34" charset="-120"/>
               </a:rPr>
-              <a:t>■ 2026年度目標＝全従業員の約30%・1,000名を「デジタル活用人材」に育成。スキルチェックに3段フィルタ（基礎の土台→専門着手→専門の幅）を適用すると中核1,121名（33.0%）に着地し、目標を達成見込み</a:t>
+              <a:t>■ 2026年度目標＝全従業員の約30%・1,000名を「デジタル活用人材」に育成。スキル個数（基礎→専門）に重点4ロール適合を重ねた4段フィルタで中核1,084名（31.9%）に着地し、目標を達成見込み</a:t>
             </a:r>
             <a:endParaRPr lang="en-US" sz="1250" dirty="0"/>
           </a:p>
@@ -1326,8 +1326,8 @@
         </p:nvSpPr>
         <p:spPr>
           <a:xfrm>
-            <a:off x="457200" y="2487168"/>
-            <a:ext cx="4206240" cy="658368"/>
+            <a:off x="457200" y="2377440"/>
+            <a:ext cx="4206240" cy="530352"/>
           </a:xfrm>
           <a:prstGeom prst="rect">
             <a:avLst/>
@@ -1346,8 +1346,8 @@
         </p:nvSpPr>
         <p:spPr>
           <a:xfrm>
-            <a:off x="585216" y="2532888"/>
-            <a:ext cx="3950208" cy="365760"/>
+            <a:off x="585216" y="2404872"/>
+            <a:ext cx="3950208" cy="301752"/>
           </a:xfrm>
           <a:prstGeom prst="rect">
             <a:avLst/>
@@ -1363,7 +1363,7 @@
               <a:buNone/>
             </a:pPr>
             <a:r>
-              <a:rPr lang="en-US" sz="1100" b="1" dirty="0">
+              <a:rPr lang="en-US" sz="1050" b="1" dirty="0">
                 <a:solidFill>
                   <a:srgbClr val="333333"/>
                 </a:solidFill>
@@ -1373,7 +1373,7 @@
               </a:rPr>
               <a:t>① 全回答者</a:t>
             </a:r>
-            <a:endParaRPr lang="en-US" sz="1100" dirty="0"/>
+            <a:endParaRPr lang="en-US" sz="1050" dirty="0"/>
           </a:p>
         </p:txBody>
       </p:sp>
@@ -1385,8 +1385,8 @@
         </p:nvSpPr>
         <p:spPr>
           <a:xfrm>
-            <a:off x="585216" y="2871216"/>
-            <a:ext cx="3950208" cy="256032"/>
+            <a:off x="585216" y="2679192"/>
+            <a:ext cx="3950208" cy="219456"/>
           </a:xfrm>
           <a:prstGeom prst="rect">
             <a:avLst/>
@@ -1402,7 +1402,7 @@
               <a:buNone/>
             </a:pPr>
             <a:r>
-              <a:rPr lang="en-US" sz="900" dirty="0">
+              <a:rPr lang="en-US" sz="850" dirty="0">
                 <a:solidFill>
                   <a:srgbClr val="333333"/>
                 </a:solidFill>
@@ -1412,7 +1412,7 @@
               </a:rPr>
               <a:t>スキルチェック回答者全員</a:t>
             </a:r>
-            <a:endParaRPr lang="en-US" sz="900" dirty="0"/>
+            <a:endParaRPr lang="en-US" sz="850" dirty="0"/>
           </a:p>
         </p:txBody>
       </p:sp>
@@ -1424,8 +1424,8 @@
         </p:nvSpPr>
         <p:spPr>
           <a:xfrm>
-            <a:off x="5074920" y="2487168"/>
-            <a:ext cx="1828800" cy="658368"/>
+            <a:off x="5074920" y="2377440"/>
+            <a:ext cx="1828800" cy="530352"/>
           </a:xfrm>
           <a:prstGeom prst="rect">
             <a:avLst/>
@@ -1439,12 +1439,12 @@
           <a:p>
             <a:pPr algn="l" indent="0" marL="0">
               <a:lnSpc>
-                <a:spcPct val="95000"/>
+                <a:spcPct val="90000"/>
               </a:lnSpc>
               <a:buNone/>
             </a:pPr>
             <a:r>
-              <a:rPr lang="en-US" sz="1500" b="1" dirty="0">
+              <a:rPr lang="en-US" sz="1400" b="1" dirty="0">
                 <a:solidFill>
                   <a:srgbClr val="276B3C"/>
                 </a:solidFill>
@@ -1456,12 +1456,12 @@
             </a:r>
             <a:pPr algn="l" indent="0" marL="0">
               <a:lnSpc>
-                <a:spcPct val="95000"/>
+                <a:spcPct val="90000"/>
               </a:lnSpc>
               <a:buNone/>
             </a:pPr>
             <a:r>
-              <a:rPr lang="en-US" sz="1100" dirty="0">
+              <a:rPr lang="en-US" sz="1050" dirty="0">
                 <a:solidFill>
                   <a:srgbClr val="276B3C"/>
                 </a:solidFill>
@@ -1471,7 +1471,7 @@
               </a:rPr>
               <a:t>  100%</a:t>
             </a:r>
-            <a:endParaRPr lang="en-US" sz="1500" dirty="0"/>
+            <a:endParaRPr lang="en-US" sz="1400" dirty="0"/>
           </a:p>
         </p:txBody>
       </p:sp>
@@ -1483,14 +1483,14 @@
         </p:nvSpPr>
         <p:spPr>
           <a:xfrm>
-            <a:off x="457200" y="3300984"/>
-            <a:ext cx="3547799" cy="658368"/>
-          </a:xfrm>
-          <a:prstGeom prst="rect">
-            <a:avLst/>
-          </a:prstGeom>
-          <a:solidFill>
-            <a:srgbClr val="8CCFA6"/>
+            <a:off x="457200" y="3008376"/>
+            <a:ext cx="3591695" cy="530352"/>
+          </a:xfrm>
+          <a:prstGeom prst="rect">
+            <a:avLst/>
+          </a:prstGeom>
+          <a:solidFill>
+            <a:srgbClr val="9FD7B6"/>
           </a:solidFill>
           <a:ln/>
         </p:spPr>
@@ -1503,8 +1503,8 @@
         </p:nvSpPr>
         <p:spPr>
           <a:xfrm>
-            <a:off x="585216" y="3346704"/>
-            <a:ext cx="3291767" cy="365760"/>
+            <a:off x="585216" y="3035808"/>
+            <a:ext cx="3335663" cy="301752"/>
           </a:xfrm>
           <a:prstGeom prst="rect">
             <a:avLst/>
@@ -1520,7 +1520,7 @@
               <a:buNone/>
             </a:pPr>
             <a:r>
-              <a:rPr lang="en-US" sz="1100" b="1" dirty="0">
+              <a:rPr lang="en-US" sz="1050" b="1" dirty="0">
                 <a:solidFill>
                   <a:srgbClr val="333333"/>
                 </a:solidFill>
@@ -1530,7 +1530,7 @@
               </a:rPr>
               <a:t>② 土台：基礎スキル P2以上 ×8個以上</a:t>
             </a:r>
-            <a:endParaRPr lang="en-US" sz="1100" dirty="0"/>
+            <a:endParaRPr lang="en-US" sz="1050" dirty="0"/>
           </a:p>
         </p:txBody>
       </p:sp>
@@ -1542,8 +1542,8 @@
         </p:nvSpPr>
         <p:spPr>
           <a:xfrm>
-            <a:off x="585216" y="3685032"/>
-            <a:ext cx="3291767" cy="256032"/>
+            <a:off x="585216" y="3310128"/>
+            <a:ext cx="3335663" cy="219456"/>
           </a:xfrm>
           <a:prstGeom prst="rect">
             <a:avLst/>
@@ -1559,7 +1559,7 @@
               <a:buNone/>
             </a:pPr>
             <a:r>
-              <a:rPr lang="en-US" sz="900" dirty="0">
+              <a:rPr lang="en-US" sz="850" dirty="0">
                 <a:solidFill>
                   <a:srgbClr val="333333"/>
                 </a:solidFill>
@@ -1569,7 +1569,7 @@
               </a:rPr>
               <a:t>デジタル活用の基礎が自走レベル</a:t>
             </a:r>
-            <a:endParaRPr lang="en-US" sz="900" dirty="0"/>
+            <a:endParaRPr lang="en-US" sz="850" dirty="0"/>
           </a:p>
         </p:txBody>
       </p:sp>
@@ -1581,8 +1581,8 @@
         </p:nvSpPr>
         <p:spPr>
           <a:xfrm>
-            <a:off x="5074920" y="3300984"/>
-            <a:ext cx="1828800" cy="658368"/>
+            <a:off x="5074920" y="3008376"/>
+            <a:ext cx="1828800" cy="530352"/>
           </a:xfrm>
           <a:prstGeom prst="rect">
             <a:avLst/>
@@ -1596,12 +1596,12 @@
           <a:p>
             <a:pPr algn="l" indent="0" marL="0">
               <a:lnSpc>
-                <a:spcPct val="95000"/>
+                <a:spcPct val="90000"/>
               </a:lnSpc>
               <a:buNone/>
             </a:pPr>
             <a:r>
-              <a:rPr lang="en-US" sz="1500" b="1" dirty="0">
+              <a:rPr lang="en-US" sz="1400" b="1" dirty="0">
                 <a:solidFill>
                   <a:srgbClr val="276B3C"/>
                 </a:solidFill>
@@ -1613,12 +1613,12 @@
             </a:r>
             <a:pPr algn="l" indent="0" marL="0">
               <a:lnSpc>
-                <a:spcPct val="95000"/>
+                <a:spcPct val="90000"/>
               </a:lnSpc>
               <a:buNone/>
             </a:pPr>
             <a:r>
-              <a:rPr lang="en-US" sz="1100" dirty="0">
+              <a:rPr lang="en-US" sz="1050" dirty="0">
                 <a:solidFill>
                   <a:srgbClr val="276B3C"/>
                 </a:solidFill>
@@ -1628,7 +1628,7 @@
               </a:rPr>
               <a:t>  65.2%</a:t>
             </a:r>
-            <a:endParaRPr lang="en-US" sz="1500" dirty="0"/>
+            <a:endParaRPr lang="en-US" sz="1400" dirty="0"/>
           </a:p>
         </p:txBody>
       </p:sp>
@@ -1640,14 +1640,14 @@
         </p:nvSpPr>
         <p:spPr>
           <a:xfrm>
-            <a:off x="457200" y="4114800"/>
-            <a:ext cx="3255097" cy="658368"/>
-          </a:xfrm>
-          <a:prstGeom prst="rect">
-            <a:avLst/>
-          </a:prstGeom>
-          <a:solidFill>
-            <a:srgbClr val="5BB97E"/>
+            <a:off x="457200" y="3639312"/>
+            <a:ext cx="3318507" cy="530352"/>
+          </a:xfrm>
+          <a:prstGeom prst="rect">
+            <a:avLst/>
+          </a:prstGeom>
+          <a:solidFill>
+            <a:srgbClr val="6FC48F"/>
           </a:solidFill>
           <a:ln/>
         </p:spPr>
@@ -1660,8 +1660,8 @@
         </p:nvSpPr>
         <p:spPr>
           <a:xfrm>
-            <a:off x="585216" y="4160520"/>
-            <a:ext cx="2999065" cy="365760"/>
+            <a:off x="585216" y="3666744"/>
+            <a:ext cx="3062475" cy="301752"/>
           </a:xfrm>
           <a:prstGeom prst="rect">
             <a:avLst/>
@@ -1677,7 +1677,7 @@
               <a:buNone/>
             </a:pPr>
             <a:r>
-              <a:rPr lang="en-US" sz="1100" b="1" dirty="0">
+              <a:rPr lang="en-US" sz="1050" b="1" dirty="0">
                 <a:solidFill>
                   <a:srgbClr val="FFFFFF"/>
                 </a:solidFill>
@@ -1687,7 +1687,7 @@
               </a:rPr>
               <a:t>③ 専門着手：専門スキル P2以上 ×1個以上</a:t>
             </a:r>
-            <a:endParaRPr lang="en-US" sz="1100" dirty="0"/>
+            <a:endParaRPr lang="en-US" sz="1050" dirty="0"/>
           </a:p>
         </p:txBody>
       </p:sp>
@@ -1699,8 +1699,8 @@
         </p:nvSpPr>
         <p:spPr>
           <a:xfrm>
-            <a:off x="585216" y="4498848"/>
-            <a:ext cx="2999065" cy="256032"/>
+            <a:off x="585216" y="3941064"/>
+            <a:ext cx="3062475" cy="219456"/>
           </a:xfrm>
           <a:prstGeom prst="rect">
             <a:avLst/>
@@ -1716,7 +1716,7 @@
               <a:buNone/>
             </a:pPr>
             <a:r>
-              <a:rPr lang="en-US" sz="900" dirty="0">
+              <a:rPr lang="en-US" sz="850" dirty="0">
                 <a:solidFill>
                   <a:srgbClr val="FFFFFF"/>
                 </a:solidFill>
@@ -1726,7 +1726,7 @@
               </a:rPr>
               <a:t>いずれかの専門領域に実践経験あり</a:t>
             </a:r>
-            <a:endParaRPr lang="en-US" sz="900" dirty="0"/>
+            <a:endParaRPr lang="en-US" sz="850" dirty="0"/>
           </a:p>
         </p:txBody>
       </p:sp>
@@ -1738,8 +1738,8 @@
         </p:nvSpPr>
         <p:spPr>
           <a:xfrm>
-            <a:off x="5074920" y="4114800"/>
-            <a:ext cx="1828800" cy="658368"/>
+            <a:off x="5074920" y="3639312"/>
+            <a:ext cx="1828800" cy="530352"/>
           </a:xfrm>
           <a:prstGeom prst="rect">
             <a:avLst/>
@@ -1753,12 +1753,12 @@
           <a:p>
             <a:pPr algn="l" indent="0" marL="0">
               <a:lnSpc>
-                <a:spcPct val="95000"/>
+                <a:spcPct val="90000"/>
               </a:lnSpc>
               <a:buNone/>
             </a:pPr>
             <a:r>
-              <a:rPr lang="en-US" sz="1500" b="1" dirty="0">
+              <a:rPr lang="en-US" sz="1400" b="1" dirty="0">
                 <a:solidFill>
                   <a:srgbClr val="276B3C"/>
                 </a:solidFill>
@@ -1770,12 +1770,12 @@
             </a:r>
             <a:pPr algn="l" indent="0" marL="0">
               <a:lnSpc>
-                <a:spcPct val="95000"/>
+                <a:spcPct val="90000"/>
               </a:lnSpc>
               <a:buNone/>
             </a:pPr>
             <a:r>
-              <a:rPr lang="en-US" sz="1100" dirty="0">
+              <a:rPr lang="en-US" sz="1050" dirty="0">
                 <a:solidFill>
                   <a:srgbClr val="276B3C"/>
                 </a:solidFill>
@@ -1785,7 +1785,7 @@
               </a:rPr>
               <a:t>  49.7%</a:t>
             </a:r>
-            <a:endParaRPr lang="en-US" sz="1500" dirty="0"/>
+            <a:endParaRPr lang="en-US" sz="1400" dirty="0"/>
           </a:p>
         </p:txBody>
       </p:sp>
@@ -1797,14 +1797,14 @@
         </p:nvSpPr>
         <p:spPr>
           <a:xfrm>
-            <a:off x="457200" y="4928616"/>
-            <a:ext cx="2938421" cy="658368"/>
-          </a:xfrm>
-          <a:prstGeom prst="rect">
-            <a:avLst/>
-          </a:prstGeom>
-          <a:solidFill>
-            <a:srgbClr val="369E51"/>
+            <a:off x="457200" y="4270248"/>
+            <a:ext cx="3022942" cy="530352"/>
+          </a:xfrm>
+          <a:prstGeom prst="rect">
+            <a:avLst/>
+          </a:prstGeom>
+          <a:solidFill>
+            <a:srgbClr val="4EB06F"/>
           </a:solidFill>
           <a:ln/>
         </p:spPr>
@@ -1817,8 +1817,8 @@
         </p:nvSpPr>
         <p:spPr>
           <a:xfrm>
-            <a:off x="585216" y="4974336"/>
-            <a:ext cx="2682389" cy="365760"/>
+            <a:off x="585216" y="4297680"/>
+            <a:ext cx="2766910" cy="301752"/>
           </a:xfrm>
           <a:prstGeom prst="rect">
             <a:avLst/>
@@ -1834,7 +1834,7 @@
               <a:buNone/>
             </a:pPr>
             <a:r>
-              <a:rPr lang="en-US" sz="1100" b="1" dirty="0">
+              <a:rPr lang="en-US" sz="1050" b="1" dirty="0">
                 <a:solidFill>
                   <a:srgbClr val="FFFFFF"/>
                 </a:solidFill>
@@ -1842,9 +1842,9 @@
                 <a:ea typeface="Meiryo" pitchFamily="34" charset="-122"/>
                 <a:cs typeface="Meiryo" pitchFamily="34" charset="-120"/>
               </a:rPr>
-              <a:t>④ 中核：専門スキル P2以上 ×4個以上</a:t>
-            </a:r>
-            <a:endParaRPr lang="en-US" sz="1100" dirty="0"/>
+              <a:t>④ 専門の幅：専門スキル P2以上 ×4個以上</a:t>
+            </a:r>
+            <a:endParaRPr lang="en-US" sz="1050" dirty="0"/>
           </a:p>
         </p:txBody>
       </p:sp>
@@ -1856,8 +1856,8 @@
         </p:nvSpPr>
         <p:spPr>
           <a:xfrm>
-            <a:off x="585216" y="5312664"/>
-            <a:ext cx="2682389" cy="256032"/>
+            <a:off x="585216" y="4572000"/>
+            <a:ext cx="2766910" cy="219456"/>
           </a:xfrm>
           <a:prstGeom prst="rect">
             <a:avLst/>
@@ -1873,7 +1873,7 @@
               <a:buNone/>
             </a:pPr>
             <a:r>
-              <a:rPr lang="en-US" sz="900" dirty="0">
+              <a:rPr lang="en-US" sz="850" dirty="0">
                 <a:solidFill>
                   <a:srgbClr val="FFFFFF"/>
                 </a:solidFill>
@@ -1881,9 +1881,9 @@
                 <a:ea typeface="Meiryo" pitchFamily="34" charset="-122"/>
                 <a:cs typeface="Meiryo" pitchFamily="34" charset="-120"/>
               </a:rPr>
-              <a:t>デジタル活用人材＝育成の中核母集団</a:t>
-            </a:r>
-            <a:endParaRPr lang="en-US" sz="900" dirty="0"/>
+              <a:t>幅のある実践経験を保有</a:t>
+            </a:r>
+            <a:endParaRPr lang="en-US" sz="850" dirty="0"/>
           </a:p>
         </p:txBody>
       </p:sp>
@@ -1895,8 +1895,8 @@
         </p:nvSpPr>
         <p:spPr>
           <a:xfrm>
-            <a:off x="5074920" y="4928616"/>
-            <a:ext cx="1828800" cy="658368"/>
+            <a:off x="5074920" y="4270248"/>
+            <a:ext cx="1828800" cy="530352"/>
           </a:xfrm>
           <a:prstGeom prst="rect">
             <a:avLst/>
@@ -1910,12 +1910,12 @@
           <a:p>
             <a:pPr algn="l" indent="0" marL="0">
               <a:lnSpc>
-                <a:spcPct val="95000"/>
+                <a:spcPct val="90000"/>
               </a:lnSpc>
               <a:buNone/>
             </a:pPr>
             <a:r>
-              <a:rPr lang="en-US" sz="1500" b="1" dirty="0">
+              <a:rPr lang="en-US" sz="1400" b="1" dirty="0">
                 <a:solidFill>
                   <a:srgbClr val="276B3C"/>
                 </a:solidFill>
@@ -1927,12 +1927,12 @@
             </a:r>
             <a:pPr algn="l" indent="0" marL="0">
               <a:lnSpc>
-                <a:spcPct val="95000"/>
+                <a:spcPct val="90000"/>
               </a:lnSpc>
               <a:buNone/>
             </a:pPr>
             <a:r>
-              <a:rPr lang="en-US" sz="1100" dirty="0">
+              <a:rPr lang="en-US" sz="1050" dirty="0">
                 <a:solidFill>
                   <a:srgbClr val="276B3C"/>
                 </a:solidFill>
@@ -1942,23 +1942,154 @@
               </a:rPr>
               <a:t>  33.0%</a:t>
             </a:r>
+            <a:endParaRPr lang="en-US" sz="1400" dirty="0"/>
+          </a:p>
+        </p:txBody>
+      </p:sp>
+      <p:sp>
+        <p:nvSpPr>
+          <p:cNvPr id="29" name="Shape 27"/>
+          <p:cNvSpPr/>
+          <p:nvPr/>
+        </p:nvSpPr>
+        <p:spPr>
+          <a:xfrm>
+            <a:off x="457200" y="4901184"/>
+            <a:ext cx="3003689" cy="530352"/>
+          </a:xfrm>
+          <a:prstGeom prst="rect">
+            <a:avLst/>
+          </a:prstGeom>
+          <a:solidFill>
+            <a:srgbClr val="369E51"/>
+          </a:solidFill>
+          <a:ln/>
+        </p:spPr>
+      </p:sp>
+      <p:sp>
+        <p:nvSpPr>
+          <p:cNvPr id="30" name="Text 28"/>
+          <p:cNvSpPr txBox="1"/>
+          <p:nvPr/>
+        </p:nvSpPr>
+        <p:spPr>
+          <a:xfrm>
+            <a:off x="585216" y="4928616"/>
+            <a:ext cx="2747657" cy="301752"/>
+          </a:xfrm>
+          <a:prstGeom prst="rect">
+            <a:avLst/>
+          </a:prstGeom>
+          <a:noFill/>
+          <a:ln/>
+        </p:spPr>
+        <p:txBody>
+          <a:bodyPr wrap="square" lIns="0" tIns="0" rIns="0" bIns="0" rtlCol="0" anchor="ctr"/>
+          <a:lstStyle/>
+          <a:p>
+            <a:pPr indent="0" marL="0">
+              <a:buNone/>
+            </a:pPr>
+            <a:r>
+              <a:rPr lang="en-US" sz="1050" b="1" dirty="0">
+                <a:solidFill>
+                  <a:srgbClr val="FFFFFF"/>
+                </a:solidFill>
+                <a:latin typeface="Meiryo" pitchFamily="34" charset="0"/>
+                <a:ea typeface="Meiryo" pitchFamily="34" charset="-122"/>
+                <a:cs typeface="Meiryo" pitchFamily="34" charset="-120"/>
+              </a:rPr>
+              <a:t>⑤ 中核：重点4ロールのいずれかに適合</a:t>
+            </a:r>
+            <a:endParaRPr lang="en-US" sz="1050" dirty="0"/>
+          </a:p>
+        </p:txBody>
+      </p:sp>
+      <p:sp>
+        <p:nvSpPr>
+          <p:cNvPr id="31" name="Text 29"/>
+          <p:cNvSpPr txBox="1"/>
+          <p:nvPr/>
+        </p:nvSpPr>
+        <p:spPr>
+          <a:xfrm>
+            <a:off x="585216" y="5202936"/>
+            <a:ext cx="2747657" cy="219456"/>
+          </a:xfrm>
+          <a:prstGeom prst="rect">
+            <a:avLst/>
+          </a:prstGeom>
+          <a:noFill/>
+          <a:ln/>
+        </p:spPr>
+        <p:txBody>
+          <a:bodyPr wrap="square" lIns="0" tIns="0" rIns="0" bIns="0" rtlCol="0" anchor="ctr"/>
+          <a:lstStyle/>
+          <a:p>
+            <a:pPr indent="0" marL="0">
+              <a:buNone/>
+            </a:pPr>
+            <a:r>
+              <a:rPr lang="en-US" sz="850" dirty="0">
+                <a:solidFill>
+                  <a:srgbClr val="FFFFFF"/>
+                </a:solidFill>
+                <a:latin typeface="Meiryo" pitchFamily="34" charset="0"/>
+                <a:ea typeface="Meiryo" pitchFamily="34" charset="-122"/>
+                <a:cs typeface="Meiryo" pitchFamily="34" charset="-120"/>
+              </a:rPr>
+              <a:t>デジタル活用人材＝育成の中核母集団</a:t>
+            </a:r>
+            <a:endParaRPr lang="en-US" sz="850" dirty="0"/>
+          </a:p>
+        </p:txBody>
+      </p:sp>
+      <p:sp>
+        <p:nvSpPr>
+          <p:cNvPr id="32" name="Text 30"/>
+          <p:cNvSpPr txBox="1"/>
+          <p:nvPr/>
+        </p:nvSpPr>
+        <p:spPr>
+          <a:xfrm>
+            <a:off x="5074920" y="4901184"/>
+            <a:ext cx="1828800" cy="530352"/>
+          </a:xfrm>
+          <a:prstGeom prst="rect">
+            <a:avLst/>
+          </a:prstGeom>
+          <a:noFill/>
+          <a:ln/>
+        </p:spPr>
+        <p:txBody>
+          <a:bodyPr wrap="square" lIns="0" tIns="0" rIns="0" bIns="0" rtlCol="0" anchor="ctr"/>
+          <a:lstStyle/>
+          <a:p>
             <a:pPr algn="l" indent="0" marL="0">
               <a:lnSpc>
-                <a:spcPct val="95000"/>
+                <a:spcPct val="90000"/>
               </a:lnSpc>
               <a:buNone/>
             </a:pPr>
-            <a:endParaRPr lang="en-US" sz="1500" dirty="0"/>
-          </a:p>
-          <a:p>
+            <a:r>
+              <a:rPr lang="en-US" sz="1400" b="1" dirty="0">
+                <a:solidFill>
+                  <a:srgbClr val="276B3C"/>
+                </a:solidFill>
+                <a:latin typeface="Meiryo" pitchFamily="34" charset="0"/>
+                <a:ea typeface="Meiryo" pitchFamily="34" charset="-122"/>
+                <a:cs typeface="Meiryo" pitchFamily="34" charset="-120"/>
+              </a:rPr>
+              <a:t>1,084名</a:t>
+            </a:r>
             <a:pPr algn="l" indent="0" marL="0">
               <a:lnSpc>
-                <a:spcPct val="95000"/>
+                <a:spcPct val="90000"/>
               </a:lnSpc>
               <a:buNone/>
             </a:pPr>
             <a:r>
-              <a:rPr lang="en-US" sz="1000" b="1" i="1" dirty="0">
+              <a:rPr lang="en-US" sz="1050" dirty="0">
                 <a:solidFill>
                   <a:srgbClr val="276B3C"/>
                 </a:solidFill>
@@ -1966,15 +2097,41 @@
                 <a:ea typeface="Meiryo" pitchFamily="34" charset="-122"/>
                 <a:cs typeface="Meiryo" pitchFamily="34" charset="-120"/>
               </a:rPr>
+              <a:t>  31.9%</a:t>
+            </a:r>
+            <a:pPr algn="l" indent="0" marL="0">
+              <a:lnSpc>
+                <a:spcPct val="90000"/>
+              </a:lnSpc>
+              <a:buNone/>
+            </a:pPr>
+            <a:endParaRPr lang="en-US" sz="1400" dirty="0"/>
+          </a:p>
+          <a:p>
+            <a:pPr algn="l" indent="0" marL="0">
+              <a:lnSpc>
+                <a:spcPct val="90000"/>
+              </a:lnSpc>
+              <a:buNone/>
+            </a:pPr>
+            <a:r>
+              <a:rPr lang="en-US" sz="950" b="1" i="1" dirty="0">
+                <a:solidFill>
+                  <a:srgbClr val="276B3C"/>
+                </a:solidFill>
+                <a:latin typeface="Meiryo" pitchFamily="34" charset="0"/>
+                <a:ea typeface="Meiryo" pitchFamily="34" charset="-122"/>
+                <a:cs typeface="Meiryo" pitchFamily="34" charset="-120"/>
+              </a:rPr>
               <a:t>≧ 目標30%を達成</a:t>
             </a:r>
-            <a:endParaRPr lang="en-US" sz="1500" dirty="0"/>
-          </a:p>
-        </p:txBody>
-      </p:sp>
-      <p:sp>
-        <p:nvSpPr>
-          <p:cNvPr id="29" name="Shape 27"/>
+            <a:endParaRPr lang="en-US" sz="1400" dirty="0"/>
+          </a:p>
+        </p:txBody>
+      </p:sp>
+      <p:sp>
+        <p:nvSpPr>
+          <p:cNvPr id="33" name="Shape 31"/>
           <p:cNvSpPr/>
           <p:nvPr/>
         </p:nvSpPr>
@@ -1994,7 +2151,7 @@
       </p:sp>
       <p:sp>
         <p:nvSpPr>
-          <p:cNvPr id="30" name="Text 28"/>
+          <p:cNvPr id="34" name="Text 32"/>
           <p:cNvSpPr txBox="1"/>
           <p:nvPr/>
         </p:nvSpPr>
@@ -2025,7 +2182,7 @@
                 <a:ea typeface="Meiryo" pitchFamily="34" charset="-122"/>
                 <a:cs typeface="Meiryo" pitchFamily="34" charset="-120"/>
               </a:rPr>
-              <a:t>フィルタ定義（3条件のAND）</a:t>
+              <a:t>フィルタ定義（4条件のAND）</a:t>
             </a:r>
             <a:endParaRPr lang="en-US" sz="1250" dirty="0"/>
           </a:p>
@@ -2033,14 +2190,14 @@
       </p:sp>
       <p:sp>
         <p:nvSpPr>
-          <p:cNvPr id="31" name="Shape 29"/>
+          <p:cNvPr id="35" name="Shape 33"/>
           <p:cNvSpPr/>
           <p:nvPr/>
         </p:nvSpPr>
         <p:spPr>
           <a:xfrm>
             <a:off x="7269480" y="2377440"/>
-            <a:ext cx="4645152" cy="1783080"/>
+            <a:ext cx="4645152" cy="1901952"/>
           </a:xfrm>
           <a:prstGeom prst="rect">
             <a:avLst/>
@@ -2058,7 +2215,7 @@
       </p:sp>
       <p:sp>
         <p:nvSpPr>
-          <p:cNvPr id="32" name="Shape 30"/>
+          <p:cNvPr id="36" name="Shape 34"/>
           <p:cNvSpPr/>
           <p:nvPr/>
         </p:nvSpPr>
@@ -2080,7 +2237,7 @@
       </p:sp>
       <p:sp>
         <p:nvSpPr>
-          <p:cNvPr id="33" name="Text 31"/>
+          <p:cNvPr id="37" name="Text 35"/>
           <p:cNvSpPr txBox="1"/>
           <p:nvPr/>
         </p:nvSpPr>
@@ -2119,14 +2276,14 @@
       </p:sp>
       <p:sp>
         <p:nvSpPr>
-          <p:cNvPr id="34" name="Text 32"/>
-          <p:cNvSpPr txBox="1"/>
-          <p:nvPr/>
-        </p:nvSpPr>
-        <p:spPr>
-          <a:xfrm>
-            <a:off x="8339328" y="2450592"/>
-            <a:ext cx="3456432" cy="548640"/>
+          <p:cNvPr id="38" name="Text 36"/>
+          <p:cNvSpPr txBox="1"/>
+          <p:nvPr/>
+        </p:nvSpPr>
+        <p:spPr>
+          <a:xfrm>
+            <a:off x="8339328" y="2459736"/>
+            <a:ext cx="3456432" cy="402336"/>
           </a:xfrm>
           <a:prstGeom prst="rect">
             <a:avLst/>
@@ -2140,12 +2297,12 @@
           <a:p>
             <a:pPr indent="0" marL="0">
               <a:lnSpc>
-                <a:spcPct val="98000"/>
+                <a:spcPct val="95000"/>
               </a:lnSpc>
               <a:buNone/>
             </a:pPr>
             <a:r>
-              <a:rPr lang="en-US" sz="1050" dirty="0">
+              <a:rPr lang="en-US" sz="980" dirty="0">
                 <a:solidFill>
                   <a:srgbClr val="333333"/>
                 </a:solidFill>
@@ -2153,21 +2310,21 @@
                 <a:ea typeface="Meiryo" pitchFamily="34" charset="-122"/>
                 <a:cs typeface="Meiryo" pitchFamily="34" charset="-120"/>
               </a:rPr>
-              <a:t>15スキル中、P2（基本的な実践経験あり）以上を 8個以上</a:t>
-            </a:r>
-            <a:endParaRPr lang="en-US" sz="1050" dirty="0"/>
-          </a:p>
-        </p:txBody>
-      </p:sp>
-      <p:sp>
-        <p:nvSpPr>
-          <p:cNvPr id="35" name="Shape 33"/>
+              <a:t>基礎15スキル中、P2（基本的な実践経験あり）以上を 8個以上</a:t>
+            </a:r>
+            <a:endParaRPr lang="en-US" sz="980" dirty="0"/>
+          </a:p>
+        </p:txBody>
+      </p:sp>
+      <p:sp>
+        <p:nvSpPr>
+          <p:cNvPr id="39" name="Shape 37"/>
           <p:cNvSpPr/>
           <p:nvPr/>
         </p:nvSpPr>
         <p:spPr>
           <a:xfrm>
-            <a:off x="7424928" y="3054096"/>
+            <a:off x="7424928" y="2926080"/>
             <a:ext cx="822960" cy="310896"/>
           </a:xfrm>
           <a:prstGeom prst="roundRect">
@@ -2183,13 +2340,13 @@
       </p:sp>
       <p:sp>
         <p:nvSpPr>
-          <p:cNvPr id="36" name="Text 34"/>
-          <p:cNvSpPr txBox="1"/>
-          <p:nvPr/>
-        </p:nvSpPr>
-        <p:spPr>
-          <a:xfrm>
-            <a:off x="7424928" y="3054096"/>
+          <p:cNvPr id="40" name="Text 38"/>
+          <p:cNvSpPr txBox="1"/>
+          <p:nvPr/>
+        </p:nvSpPr>
+        <p:spPr>
+          <a:xfrm>
+            <a:off x="7424928" y="2926080"/>
             <a:ext cx="822960" cy="310896"/>
           </a:xfrm>
           <a:prstGeom prst="rect">
@@ -2222,14 +2379,14 @@
       </p:sp>
       <p:sp>
         <p:nvSpPr>
-          <p:cNvPr id="37" name="Text 35"/>
-          <p:cNvSpPr txBox="1"/>
-          <p:nvPr/>
-        </p:nvSpPr>
-        <p:spPr>
-          <a:xfrm>
-            <a:off x="8339328" y="3017520"/>
-            <a:ext cx="3456432" cy="548640"/>
+          <p:cNvPr id="41" name="Text 39"/>
+          <p:cNvSpPr txBox="1"/>
+          <p:nvPr/>
+        </p:nvSpPr>
+        <p:spPr>
+          <a:xfrm>
+            <a:off x="8339328" y="2898648"/>
+            <a:ext cx="3456432" cy="402336"/>
           </a:xfrm>
           <a:prstGeom prst="rect">
             <a:avLst/>
@@ -2243,12 +2400,12 @@
           <a:p>
             <a:pPr indent="0" marL="0">
               <a:lnSpc>
-                <a:spcPct val="98000"/>
+                <a:spcPct val="95000"/>
               </a:lnSpc>
               <a:buNone/>
             </a:pPr>
             <a:r>
-              <a:rPr lang="en-US" sz="1050" dirty="0">
+              <a:rPr lang="en-US" sz="980" dirty="0">
                 <a:solidFill>
                   <a:srgbClr val="333333"/>
                 </a:solidFill>
@@ -2256,21 +2413,21 @@
                 <a:ea typeface="Meiryo" pitchFamily="34" charset="-122"/>
                 <a:cs typeface="Meiryo" pitchFamily="34" charset="-120"/>
               </a:rPr>
-              <a:t>42スキル中、P2以上を 1個以上（専門に着手）</a:t>
-            </a:r>
-            <a:endParaRPr lang="en-US" sz="1050" dirty="0"/>
-          </a:p>
-        </p:txBody>
-      </p:sp>
-      <p:sp>
-        <p:nvSpPr>
-          <p:cNvPr id="38" name="Shape 36"/>
+              <a:t>専門42スキル中、P2以上を 1個以上（専門に着手）</a:t>
+            </a:r>
+            <a:endParaRPr lang="en-US" sz="980" dirty="0"/>
+          </a:p>
+        </p:txBody>
+      </p:sp>
+      <p:sp>
+        <p:nvSpPr>
+          <p:cNvPr id="42" name="Shape 40"/>
           <p:cNvSpPr/>
           <p:nvPr/>
         </p:nvSpPr>
         <p:spPr>
           <a:xfrm>
-            <a:off x="7424928" y="3621024"/>
+            <a:off x="7424928" y="3364992"/>
             <a:ext cx="822960" cy="310896"/>
           </a:xfrm>
           <a:prstGeom prst="roundRect">
@@ -2286,13 +2443,13 @@
       </p:sp>
       <p:sp>
         <p:nvSpPr>
-          <p:cNvPr id="39" name="Text 37"/>
-          <p:cNvSpPr txBox="1"/>
-          <p:nvPr/>
-        </p:nvSpPr>
-        <p:spPr>
-          <a:xfrm>
-            <a:off x="7424928" y="3621024"/>
+          <p:cNvPr id="43" name="Text 41"/>
+          <p:cNvSpPr txBox="1"/>
+          <p:nvPr/>
+        </p:nvSpPr>
+        <p:spPr>
+          <a:xfrm>
+            <a:off x="7424928" y="3364992"/>
             <a:ext cx="822960" cy="310896"/>
           </a:xfrm>
           <a:prstGeom prst="rect">
@@ -2317,7 +2474,7 @@
                 <a:ea typeface="Meiryo" pitchFamily="34" charset="-122"/>
                 <a:cs typeface="Meiryo" pitchFamily="34" charset="-120"/>
               </a:rPr>
-              <a:t>③ 中核</a:t>
+              <a:t>③ 幅</a:t>
             </a:r>
             <a:endParaRPr lang="en-US" sz="1050" dirty="0"/>
           </a:p>
@@ -2325,14 +2482,14 @@
       </p:sp>
       <p:sp>
         <p:nvSpPr>
-          <p:cNvPr id="40" name="Text 38"/>
-          <p:cNvSpPr txBox="1"/>
-          <p:nvPr/>
-        </p:nvSpPr>
-        <p:spPr>
-          <a:xfrm>
-            <a:off x="8339328" y="3584448"/>
-            <a:ext cx="3456432" cy="548640"/>
+          <p:cNvPr id="44" name="Text 42"/>
+          <p:cNvSpPr txBox="1"/>
+          <p:nvPr/>
+        </p:nvSpPr>
+        <p:spPr>
+          <a:xfrm>
+            <a:off x="8339328" y="3337560"/>
+            <a:ext cx="3456432" cy="402336"/>
           </a:xfrm>
           <a:prstGeom prst="rect">
             <a:avLst/>
@@ -2346,12 +2503,12 @@
           <a:p>
             <a:pPr indent="0" marL="0">
               <a:lnSpc>
-                <a:spcPct val="98000"/>
+                <a:spcPct val="95000"/>
               </a:lnSpc>
               <a:buNone/>
             </a:pPr>
             <a:r>
-              <a:rPr lang="en-US" sz="1050" dirty="0">
+              <a:rPr lang="en-US" sz="980" dirty="0">
                 <a:solidFill>
                   <a:srgbClr val="333333"/>
                 </a:solidFill>
@@ -2359,7 +2516,68 @@
                 <a:ea typeface="Meiryo" pitchFamily="34" charset="-122"/>
                 <a:cs typeface="Meiryo" pitchFamily="34" charset="-120"/>
               </a:rPr>
-              <a:t>42スキル中、P2以上を 4個以上（推奨・約30%）</a:t>
+              <a:t>専門42スキル中、P2以上を 4個以上（約30%ライン）</a:t>
+            </a:r>
+            <a:endParaRPr lang="en-US" sz="980" dirty="0"/>
+          </a:p>
+        </p:txBody>
+      </p:sp>
+      <p:sp>
+        <p:nvSpPr>
+          <p:cNvPr id="45" name="Shape 43"/>
+          <p:cNvSpPr/>
+          <p:nvPr/>
+        </p:nvSpPr>
+        <p:spPr>
+          <a:xfrm>
+            <a:off x="7424928" y="3803904"/>
+            <a:ext cx="822960" cy="310896"/>
+          </a:xfrm>
+          <a:prstGeom prst="roundRect">
+            <a:avLst>
+              <a:gd name="adj" fmla="val 11765"/>
+            </a:avLst>
+          </a:prstGeom>
+          <a:solidFill>
+            <a:srgbClr val="369E51"/>
+          </a:solidFill>
+          <a:ln/>
+        </p:spPr>
+      </p:sp>
+      <p:sp>
+        <p:nvSpPr>
+          <p:cNvPr id="46" name="Text 44"/>
+          <p:cNvSpPr txBox="1"/>
+          <p:nvPr/>
+        </p:nvSpPr>
+        <p:spPr>
+          <a:xfrm>
+            <a:off x="7424928" y="3803904"/>
+            <a:ext cx="822960" cy="310896"/>
+          </a:xfrm>
+          <a:prstGeom prst="rect">
+            <a:avLst/>
+          </a:prstGeom>
+          <a:noFill/>
+          <a:ln/>
+        </p:spPr>
+        <p:txBody>
+          <a:bodyPr wrap="square" lIns="0" tIns="0" rIns="0" bIns="0" rtlCol="0" anchor="ctr"/>
+          <a:lstStyle/>
+          <a:p>
+            <a:pPr algn="ctr" indent="0" marL="0">
+              <a:buNone/>
+            </a:pPr>
+            <a:r>
+              <a:rPr lang="en-US" sz="1050" b="1" dirty="0">
+                <a:solidFill>
+                  <a:srgbClr val="FFFFFF"/>
+                </a:solidFill>
+                <a:latin typeface="Meiryo" pitchFamily="34" charset="0"/>
+                <a:ea typeface="Meiryo" pitchFamily="34" charset="-122"/>
+                <a:cs typeface="Meiryo" pitchFamily="34" charset="-120"/>
+              </a:rPr>
+              <a:t>④ 役割</a:t>
             </a:r>
             <a:endParaRPr lang="en-US" sz="1050" dirty="0"/>
           </a:p>
@@ -2367,13 +2585,55 @@
       </p:sp>
       <p:sp>
         <p:nvSpPr>
-          <p:cNvPr id="41" name="Shape 39"/>
+          <p:cNvPr id="47" name="Text 45"/>
+          <p:cNvSpPr txBox="1"/>
+          <p:nvPr/>
+        </p:nvSpPr>
+        <p:spPr>
+          <a:xfrm>
+            <a:off x="8339328" y="3776472"/>
+            <a:ext cx="3456432" cy="402336"/>
+          </a:xfrm>
+          <a:prstGeom prst="rect">
+            <a:avLst/>
+          </a:prstGeom>
+          <a:noFill/>
+          <a:ln/>
+        </p:spPr>
+        <p:txBody>
+          <a:bodyPr wrap="square" lIns="0" tIns="0" rIns="0" bIns="0" rtlCol="0" anchor="ctr"/>
+          <a:lstStyle/>
+          <a:p>
+            <a:pPr indent="0" marL="0">
+              <a:lnSpc>
+                <a:spcPct val="95000"/>
+              </a:lnSpc>
+              <a:buNone/>
+            </a:pPr>
+            <a:r>
+              <a:rPr lang="en-US" sz="980" dirty="0">
+                <a:solidFill>
+                  <a:srgbClr val="333333"/>
+                </a:solidFill>
+                <a:latin typeface="Meiryo" pitchFamily="34" charset="0"/>
+                <a:ea typeface="Meiryo" pitchFamily="34" charset="-122"/>
+                <a:cs typeface="Meiryo" pitchFamily="34" charset="-120"/>
+              </a:rPr>
+              <a:t>重点4ロールのいずれかに適合（シグネチャ 2個以上）</a:t>
+            </a:r>
+            <a:endParaRPr lang="en-US" sz="980" dirty="0"/>
+          </a:p>
+        </p:txBody>
+      </p:sp>
+      <p:sp>
+        <p:nvSpPr>
+          <p:cNvPr id="48" name="Shape 46"/>
           <p:cNvSpPr/>
           <p:nvPr/>
         </p:nvSpPr>
         <p:spPr>
           <a:xfrm>
-            <a:off x="7269480" y="4297680"/>
+            <a:off x="7269480" y="4407408"/>
             <a:ext cx="4645152" cy="365760"/>
           </a:xfrm>
           <a:prstGeom prst="rect">
@@ -2387,13 +2647,13 @@
       </p:sp>
       <p:sp>
         <p:nvSpPr>
-          <p:cNvPr id="42" name="Text 40"/>
-          <p:cNvSpPr txBox="1"/>
-          <p:nvPr/>
-        </p:nvSpPr>
-        <p:spPr>
-          <a:xfrm>
-            <a:off x="7360920" y="4297680"/>
+          <p:cNvPr id="49" name="Text 47"/>
+          <p:cNvSpPr txBox="1"/>
+          <p:nvPr/>
+        </p:nvSpPr>
+        <p:spPr>
+          <a:xfrm>
+            <a:off x="7360920" y="4407408"/>
             <a:ext cx="4462272" cy="365760"/>
           </a:xfrm>
           <a:prstGeom prst="rect">
@@ -2418,7 +2678,7 @@
                 <a:ea typeface="Meiryo" pitchFamily="34" charset="-122"/>
                 <a:cs typeface="Meiryo" pitchFamily="34" charset="-120"/>
               </a:rPr>
-              <a:t>着地の感度（1,000〜1,500名の運用幅）</a:t>
+              <a:t>着地の感度（ロール条件ONのまま③を可変）</a:t>
             </a:r>
             <a:endParaRPr lang="en-US" sz="1250" dirty="0"/>
           </a:p>
@@ -2426,14 +2686,14 @@
       </p:sp>
       <p:sp>
         <p:nvSpPr>
-          <p:cNvPr id="43" name="Shape 41"/>
+          <p:cNvPr id="50" name="Shape 48"/>
           <p:cNvSpPr/>
           <p:nvPr/>
         </p:nvSpPr>
         <p:spPr>
           <a:xfrm>
-            <a:off x="7269480" y="4663440"/>
-            <a:ext cx="4645152" cy="1737360"/>
+            <a:off x="7269480" y="4773168"/>
+            <a:ext cx="4645152" cy="1627632"/>
           </a:xfrm>
           <a:prstGeom prst="rect">
             <a:avLst/>
@@ -2451,14 +2711,14 @@
       </p:sp>
       <p:sp>
         <p:nvSpPr>
-          <p:cNvPr id="44" name="Text 42"/>
-          <p:cNvSpPr txBox="1"/>
-          <p:nvPr/>
-        </p:nvSpPr>
-        <p:spPr>
-          <a:xfrm>
-            <a:off x="7424928" y="4773168"/>
-            <a:ext cx="2651760" cy="274320"/>
+          <p:cNvPr id="51" name="Text 49"/>
+          <p:cNvSpPr txBox="1"/>
+          <p:nvPr/>
+        </p:nvSpPr>
+        <p:spPr>
+          <a:xfrm>
+            <a:off x="7424928" y="4864608"/>
+            <a:ext cx="2651760" cy="265176"/>
           </a:xfrm>
           <a:prstGeom prst="rect">
             <a:avLst/>
@@ -2490,14 +2750,14 @@
       </p:sp>
       <p:sp>
         <p:nvSpPr>
-          <p:cNvPr id="45" name="Text 43"/>
-          <p:cNvSpPr txBox="1"/>
-          <p:nvPr/>
-        </p:nvSpPr>
-        <p:spPr>
-          <a:xfrm>
-            <a:off x="10058400" y="4773168"/>
-            <a:ext cx="1005840" cy="274320"/>
+          <p:cNvPr id="52" name="Text 50"/>
+          <p:cNvSpPr txBox="1"/>
+          <p:nvPr/>
+        </p:nvSpPr>
+        <p:spPr>
+          <a:xfrm>
+            <a:off x="10058400" y="4864608"/>
+            <a:ext cx="1005840" cy="265176"/>
           </a:xfrm>
           <a:prstGeom prst="rect">
             <a:avLst/>
@@ -2529,14 +2789,14 @@
       </p:sp>
       <p:sp>
         <p:nvSpPr>
-          <p:cNvPr id="46" name="Text 44"/>
-          <p:cNvSpPr txBox="1"/>
-          <p:nvPr/>
-        </p:nvSpPr>
-        <p:spPr>
-          <a:xfrm>
-            <a:off x="11064240" y="4773168"/>
-            <a:ext cx="731520" cy="274320"/>
+          <p:cNvPr id="53" name="Text 51"/>
+          <p:cNvSpPr txBox="1"/>
+          <p:nvPr/>
+        </p:nvSpPr>
+        <p:spPr>
+          <a:xfrm>
+            <a:off x="11064240" y="4864608"/>
+            <a:ext cx="731520" cy="265176"/>
           </a:xfrm>
           <a:prstGeom prst="rect">
             <a:avLst/>
@@ -2568,14 +2828,14 @@
       </p:sp>
       <p:sp>
         <p:nvSpPr>
-          <p:cNvPr id="47" name="Text 45"/>
-          <p:cNvSpPr txBox="1"/>
-          <p:nvPr/>
-        </p:nvSpPr>
-        <p:spPr>
-          <a:xfrm>
-            <a:off x="7424928" y="5084064"/>
-            <a:ext cx="2651760" cy="274320"/>
+          <p:cNvPr id="54" name="Text 52"/>
+          <p:cNvSpPr txBox="1"/>
+          <p:nvPr/>
+        </p:nvSpPr>
+        <p:spPr>
+          <a:xfrm>
+            <a:off x="7424928" y="5166360"/>
+            <a:ext cx="2651760" cy="265176"/>
           </a:xfrm>
           <a:prstGeom prst="rect">
             <a:avLst/>
@@ -2599,7 +2859,7 @@
                 <a:ea typeface="Meiryo" pitchFamily="34" charset="-122"/>
                 <a:cs typeface="Meiryo" pitchFamily="34" charset="-120"/>
               </a:rPr>
-              <a:t>×3個以上（やや緩め）</a:t>
+              <a:t>×2個以上（緩め）</a:t>
             </a:r>
             <a:endParaRPr lang="en-US" sz="950" dirty="0"/>
           </a:p>
@@ -2607,14 +2867,14 @@
       </p:sp>
       <p:sp>
         <p:nvSpPr>
-          <p:cNvPr id="48" name="Text 46"/>
-          <p:cNvSpPr txBox="1"/>
-          <p:nvPr/>
-        </p:nvSpPr>
-        <p:spPr>
-          <a:xfrm>
-            <a:off x="10058400" y="5084064"/>
-            <a:ext cx="1005840" cy="274320"/>
+          <p:cNvPr id="55" name="Text 53"/>
+          <p:cNvSpPr txBox="1"/>
+          <p:nvPr/>
+        </p:nvSpPr>
+        <p:spPr>
+          <a:xfrm>
+            <a:off x="10058400" y="5166360"/>
+            <a:ext cx="1005840" cy="265176"/>
           </a:xfrm>
           <a:prstGeom prst="rect">
             <a:avLst/>
@@ -2638,7 +2898,7 @@
                 <a:ea typeface="Meiryo" pitchFamily="34" charset="-122"/>
                 <a:cs typeface="Meiryo" pitchFamily="34" charset="-120"/>
               </a:rPr>
-              <a:t>1,281名</a:t>
+              <a:t>1,257名</a:t>
             </a:r>
             <a:endParaRPr lang="en-US" sz="950" dirty="0"/>
           </a:p>
@@ -2646,14 +2906,14 @@
       </p:sp>
       <p:sp>
         <p:nvSpPr>
-          <p:cNvPr id="49" name="Text 47"/>
-          <p:cNvSpPr txBox="1"/>
-          <p:nvPr/>
-        </p:nvSpPr>
-        <p:spPr>
-          <a:xfrm>
-            <a:off x="11064240" y="5084064"/>
-            <a:ext cx="731520" cy="274320"/>
+          <p:cNvPr id="56" name="Text 54"/>
+          <p:cNvSpPr txBox="1"/>
+          <p:nvPr/>
+        </p:nvSpPr>
+        <p:spPr>
+          <a:xfrm>
+            <a:off x="11064240" y="5166360"/>
+            <a:ext cx="731520" cy="265176"/>
           </a:xfrm>
           <a:prstGeom prst="rect">
             <a:avLst/>
@@ -2677,7 +2937,7 @@
                 <a:ea typeface="Meiryo" pitchFamily="34" charset="-122"/>
                 <a:cs typeface="Meiryo" pitchFamily="34" charset="-120"/>
               </a:rPr>
-              <a:t>37.7%</a:t>
+              <a:t>37.0%</a:t>
             </a:r>
             <a:endParaRPr lang="en-US" sz="950" dirty="0"/>
           </a:p>
@@ -2685,14 +2945,131 @@
       </p:sp>
       <p:sp>
         <p:nvSpPr>
-          <p:cNvPr id="50" name="Shape 48"/>
+          <p:cNvPr id="57" name="Text 55"/>
+          <p:cNvSpPr txBox="1"/>
+          <p:nvPr/>
+        </p:nvSpPr>
+        <p:spPr>
+          <a:xfrm>
+            <a:off x="7424928" y="5468112"/>
+            <a:ext cx="2651760" cy="265176"/>
+          </a:xfrm>
+          <a:prstGeom prst="rect">
+            <a:avLst/>
+          </a:prstGeom>
+          <a:noFill/>
+          <a:ln/>
+        </p:spPr>
+        <p:txBody>
+          <a:bodyPr wrap="square" lIns="0" tIns="0" rIns="0" bIns="0" rtlCol="0" anchor="ctr"/>
+          <a:lstStyle/>
+          <a:p>
+            <a:pPr indent="0" marL="0">
+              <a:buNone/>
+            </a:pPr>
+            <a:r>
+              <a:rPr lang="en-US" sz="950" dirty="0">
+                <a:solidFill>
+                  <a:srgbClr val="333333"/>
+                </a:solidFill>
+                <a:latin typeface="Meiryo" pitchFamily="34" charset="0"/>
+                <a:ea typeface="Meiryo" pitchFamily="34" charset="-122"/>
+                <a:cs typeface="Meiryo" pitchFamily="34" charset="-120"/>
+              </a:rPr>
+              <a:t>×3個以上</a:t>
+            </a:r>
+            <a:endParaRPr lang="en-US" sz="950" dirty="0"/>
+          </a:p>
+        </p:txBody>
+      </p:sp>
+      <p:sp>
+        <p:nvSpPr>
+          <p:cNvPr id="58" name="Text 56"/>
+          <p:cNvSpPr txBox="1"/>
+          <p:nvPr/>
+        </p:nvSpPr>
+        <p:spPr>
+          <a:xfrm>
+            <a:off x="10058400" y="5468112"/>
+            <a:ext cx="1005840" cy="265176"/>
+          </a:xfrm>
+          <a:prstGeom prst="rect">
+            <a:avLst/>
+          </a:prstGeom>
+          <a:noFill/>
+          <a:ln/>
+        </p:spPr>
+        <p:txBody>
+          <a:bodyPr wrap="square" lIns="0" tIns="0" rIns="0" bIns="0" rtlCol="0" anchor="ctr"/>
+          <a:lstStyle/>
+          <a:p>
+            <a:pPr algn="r" indent="0" marL="0">
+              <a:buNone/>
+            </a:pPr>
+            <a:r>
+              <a:rPr lang="en-US" sz="950" dirty="0">
+                <a:solidFill>
+                  <a:srgbClr val="333333"/>
+                </a:solidFill>
+                <a:latin typeface="Meiryo" pitchFamily="34" charset="0"/>
+                <a:ea typeface="Meiryo" pitchFamily="34" charset="-122"/>
+                <a:cs typeface="Meiryo" pitchFamily="34" charset="-120"/>
+              </a:rPr>
+              <a:t>1,190名</a:t>
+            </a:r>
+            <a:endParaRPr lang="en-US" sz="950" dirty="0"/>
+          </a:p>
+        </p:txBody>
+      </p:sp>
+      <p:sp>
+        <p:nvSpPr>
+          <p:cNvPr id="59" name="Text 57"/>
+          <p:cNvSpPr txBox="1"/>
+          <p:nvPr/>
+        </p:nvSpPr>
+        <p:spPr>
+          <a:xfrm>
+            <a:off x="11064240" y="5468112"/>
+            <a:ext cx="731520" cy="265176"/>
+          </a:xfrm>
+          <a:prstGeom prst="rect">
+            <a:avLst/>
+          </a:prstGeom>
+          <a:noFill/>
+          <a:ln/>
+        </p:spPr>
+        <p:txBody>
+          <a:bodyPr wrap="square" lIns="0" tIns="0" rIns="0" bIns="0" rtlCol="0" anchor="ctr"/>
+          <a:lstStyle/>
+          <a:p>
+            <a:pPr algn="r" indent="0" marL="0">
+              <a:buNone/>
+            </a:pPr>
+            <a:r>
+              <a:rPr lang="en-US" sz="950" dirty="0">
+                <a:solidFill>
+                  <a:srgbClr val="333333"/>
+                </a:solidFill>
+                <a:latin typeface="Meiryo" pitchFamily="34" charset="0"/>
+                <a:ea typeface="Meiryo" pitchFamily="34" charset="-122"/>
+                <a:cs typeface="Meiryo" pitchFamily="34" charset="-120"/>
+              </a:rPr>
+              <a:t>35.1%</a:t>
+            </a:r>
+            <a:endParaRPr lang="en-US" sz="950" dirty="0"/>
+          </a:p>
+        </p:txBody>
+      </p:sp>
+      <p:sp>
+        <p:nvSpPr>
+          <p:cNvPr id="60" name="Shape 58"/>
           <p:cNvSpPr/>
           <p:nvPr/>
         </p:nvSpPr>
         <p:spPr>
           <a:xfrm>
-            <a:off x="7360920" y="5376672"/>
-            <a:ext cx="4462272" cy="274320"/>
+            <a:off x="7360920" y="5751576"/>
+            <a:ext cx="4462272" cy="265176"/>
           </a:xfrm>
           <a:prstGeom prst="rect">
             <a:avLst/>
@@ -2705,14 +3082,14 @@
       </p:sp>
       <p:sp>
         <p:nvSpPr>
-          <p:cNvPr id="51" name="Text 49"/>
-          <p:cNvSpPr txBox="1"/>
-          <p:nvPr/>
-        </p:nvSpPr>
-        <p:spPr>
-          <a:xfrm>
-            <a:off x="7424928" y="5394960"/>
-            <a:ext cx="2651760" cy="274320"/>
+          <p:cNvPr id="61" name="Text 59"/>
+          <p:cNvSpPr txBox="1"/>
+          <p:nvPr/>
+        </p:nvSpPr>
+        <p:spPr>
+          <a:xfrm>
+            <a:off x="7424928" y="5769864"/>
+            <a:ext cx="2651760" cy="265176"/>
           </a:xfrm>
           <a:prstGeom prst="rect">
             <a:avLst/>
@@ -2744,14 +3121,14 @@
       </p:sp>
       <p:sp>
         <p:nvSpPr>
-          <p:cNvPr id="52" name="Text 50"/>
-          <p:cNvSpPr txBox="1"/>
-          <p:nvPr/>
-        </p:nvSpPr>
-        <p:spPr>
-          <a:xfrm>
-            <a:off x="10058400" y="5394960"/>
-            <a:ext cx="1005840" cy="274320"/>
+          <p:cNvPr id="62" name="Text 60"/>
+          <p:cNvSpPr txBox="1"/>
+          <p:nvPr/>
+        </p:nvSpPr>
+        <p:spPr>
+          <a:xfrm>
+            <a:off x="10058400" y="5769864"/>
+            <a:ext cx="1005840" cy="265176"/>
           </a:xfrm>
           <a:prstGeom prst="rect">
             <a:avLst/>
@@ -2775,7 +3152,7 @@
                 <a:ea typeface="Meiryo" pitchFamily="34" charset="-122"/>
                 <a:cs typeface="Meiryo" pitchFamily="34" charset="-120"/>
               </a:rPr>
-              <a:t>1,121名</a:t>
+              <a:t>1,084名</a:t>
             </a:r>
             <a:endParaRPr lang="en-US" sz="950" dirty="0"/>
           </a:p>
@@ -2783,14 +3160,14 @@
       </p:sp>
       <p:sp>
         <p:nvSpPr>
-          <p:cNvPr id="53" name="Text 51"/>
-          <p:cNvSpPr txBox="1"/>
-          <p:nvPr/>
-        </p:nvSpPr>
-        <p:spPr>
-          <a:xfrm>
-            <a:off x="11064240" y="5394960"/>
-            <a:ext cx="731520" cy="274320"/>
+          <p:cNvPr id="63" name="Text 61"/>
+          <p:cNvSpPr txBox="1"/>
+          <p:nvPr/>
+        </p:nvSpPr>
+        <p:spPr>
+          <a:xfrm>
+            <a:off x="11064240" y="5769864"/>
+            <a:ext cx="731520" cy="265176"/>
           </a:xfrm>
           <a:prstGeom prst="rect">
             <a:avLst/>
@@ -2814,7 +3191,7 @@
                 <a:ea typeface="Meiryo" pitchFamily="34" charset="-122"/>
                 <a:cs typeface="Meiryo" pitchFamily="34" charset="-120"/>
               </a:rPr>
-              <a:t>33.0%</a:t>
+              <a:t>31.9%</a:t>
             </a:r>
             <a:endParaRPr lang="en-US" sz="950" dirty="0"/>
           </a:p>
@@ -2822,14 +3199,14 @@
       </p:sp>
       <p:sp>
         <p:nvSpPr>
-          <p:cNvPr id="54" name="Text 52"/>
-          <p:cNvSpPr txBox="1"/>
-          <p:nvPr/>
-        </p:nvSpPr>
-        <p:spPr>
-          <a:xfrm>
-            <a:off x="7424928" y="5705856"/>
-            <a:ext cx="2651760" cy="274320"/>
+          <p:cNvPr id="64" name="Text 62"/>
+          <p:cNvSpPr txBox="1"/>
+          <p:nvPr/>
+        </p:nvSpPr>
+        <p:spPr>
+          <a:xfrm>
+            <a:off x="7424928" y="6053328"/>
+            <a:ext cx="4389120" cy="310896"/>
           </a:xfrm>
           <a:prstGeom prst="rect">
             <a:avLst/>
@@ -2842,127 +3219,13 @@
           <a:lstStyle/>
           <a:p>
             <a:pPr indent="0" marL="0">
-              <a:buNone/>
-            </a:pPr>
-            <a:r>
-              <a:rPr lang="en-US" sz="950" dirty="0">
-                <a:solidFill>
-                  <a:srgbClr val="333333"/>
-                </a:solidFill>
-                <a:latin typeface="Meiryo" pitchFamily="34" charset="0"/>
-                <a:ea typeface="Meiryo" pitchFamily="34" charset="-122"/>
-                <a:cs typeface="Meiryo" pitchFamily="34" charset="-120"/>
-              </a:rPr>
-              <a:t>×5個以上（厳しめ）</a:t>
-            </a:r>
-            <a:endParaRPr lang="en-US" sz="950" dirty="0"/>
-          </a:p>
-        </p:txBody>
-      </p:sp>
-      <p:sp>
-        <p:nvSpPr>
-          <p:cNvPr id="55" name="Text 53"/>
-          <p:cNvSpPr txBox="1"/>
-          <p:nvPr/>
-        </p:nvSpPr>
-        <p:spPr>
-          <a:xfrm>
-            <a:off x="10058400" y="5705856"/>
-            <a:ext cx="1005840" cy="274320"/>
-          </a:xfrm>
-          <a:prstGeom prst="rect">
-            <a:avLst/>
-          </a:prstGeom>
-          <a:noFill/>
-          <a:ln/>
-        </p:spPr>
-        <p:txBody>
-          <a:bodyPr wrap="square" lIns="0" tIns="0" rIns="0" bIns="0" rtlCol="0" anchor="ctr"/>
-          <a:lstStyle/>
-          <a:p>
-            <a:pPr algn="r" indent="0" marL="0">
-              <a:buNone/>
-            </a:pPr>
-            <a:r>
-              <a:rPr lang="en-US" sz="950" dirty="0">
-                <a:solidFill>
-                  <a:srgbClr val="333333"/>
-                </a:solidFill>
-                <a:latin typeface="Meiryo" pitchFamily="34" charset="0"/>
-                <a:ea typeface="Meiryo" pitchFamily="34" charset="-122"/>
-                <a:cs typeface="Meiryo" pitchFamily="34" charset="-120"/>
-              </a:rPr>
-              <a:t>1,001名</a:t>
-            </a:r>
-            <a:endParaRPr lang="en-US" sz="950" dirty="0"/>
-          </a:p>
-        </p:txBody>
-      </p:sp>
-      <p:sp>
-        <p:nvSpPr>
-          <p:cNvPr id="56" name="Text 54"/>
-          <p:cNvSpPr txBox="1"/>
-          <p:nvPr/>
-        </p:nvSpPr>
-        <p:spPr>
-          <a:xfrm>
-            <a:off x="11064240" y="5705856"/>
-            <a:ext cx="731520" cy="274320"/>
-          </a:xfrm>
-          <a:prstGeom prst="rect">
-            <a:avLst/>
-          </a:prstGeom>
-          <a:noFill/>
-          <a:ln/>
-        </p:spPr>
-        <p:txBody>
-          <a:bodyPr wrap="square" lIns="0" tIns="0" rIns="0" bIns="0" rtlCol="0" anchor="ctr"/>
-          <a:lstStyle/>
-          <a:p>
-            <a:pPr algn="r" indent="0" marL="0">
-              <a:buNone/>
-            </a:pPr>
-            <a:r>
-              <a:rPr lang="en-US" sz="950" dirty="0">
-                <a:solidFill>
-                  <a:srgbClr val="333333"/>
-                </a:solidFill>
-                <a:latin typeface="Meiryo" pitchFamily="34" charset="0"/>
-                <a:ea typeface="Meiryo" pitchFamily="34" charset="-122"/>
-                <a:cs typeface="Meiryo" pitchFamily="34" charset="-120"/>
-              </a:rPr>
-              <a:t>29.5%</a:t>
-            </a:r>
-            <a:endParaRPr lang="en-US" sz="950" dirty="0"/>
-          </a:p>
-        </p:txBody>
-      </p:sp>
-      <p:sp>
-        <p:nvSpPr>
-          <p:cNvPr id="57" name="Text 55"/>
-          <p:cNvSpPr txBox="1"/>
-          <p:nvPr/>
-        </p:nvSpPr>
-        <p:spPr>
-          <a:xfrm>
-            <a:off x="7424928" y="6053328"/>
-            <a:ext cx="4389120" cy="274320"/>
-          </a:xfrm>
-          <a:prstGeom prst="rect">
-            <a:avLst/>
-          </a:prstGeom>
-          <a:noFill/>
-          <a:ln/>
-        </p:spPr>
-        <p:txBody>
-          <a:bodyPr wrap="square" lIns="0" tIns="0" rIns="0" bIns="0" rtlCol="0" anchor="ctr"/>
-          <a:lstStyle/>
-          <a:p>
-            <a:pPr indent="0" marL="0">
-              <a:buNone/>
-            </a:pPr>
-            <a:r>
-              <a:rPr lang="en-US" sz="880" i="1" dirty="0">
+              <a:lnSpc>
+                <a:spcPct val="95000"/>
+              </a:lnSpc>
+              <a:buNone/>
+            </a:pPr>
+            <a:r>
+              <a:rPr lang="en-US" sz="860" i="1" dirty="0">
                 <a:solidFill>
                   <a:srgbClr val="7A7F7C"/>
                 </a:solidFill>
@@ -2970,15 +3233,15 @@
                 <a:ea typeface="Meiryo" pitchFamily="34" charset="-122"/>
                 <a:cs typeface="Meiryo" pitchFamily="34" charset="-120"/>
               </a:rPr>
-              <a:t>いずれも2026年度目標（1,000名・約30%）を達成。幅1,000〜1,500名で運用可能</a:t>
-            </a:r>
-            <a:endParaRPr lang="en-US" sz="880" dirty="0"/>
-          </a:p>
-        </p:txBody>
-      </p:sp>
-      <p:sp>
-        <p:nvSpPr>
-          <p:cNvPr id="58" name="Shape 56"/>
+              <a:t>いずれも目標1,000名を達成（×5個以上は985名で未達）。推奨③×4個で1,000〜1,500名の幅に収まる</a:t>
+            </a:r>
+            <a:endParaRPr lang="en-US" sz="860" dirty="0"/>
+          </a:p>
+        </p:txBody>
+      </p:sp>
+      <p:sp>
+        <p:nvSpPr>
+          <p:cNvPr id="65" name="Shape 63"/>
           <p:cNvSpPr/>
           <p:nvPr/>
         </p:nvSpPr>
@@ -3003,7 +3266,7 @@
       </p:sp>
       <p:sp>
         <p:nvSpPr>
-          <p:cNvPr id="59" name="Shape 57"/>
+          <p:cNvPr id="66" name="Shape 64"/>
           <p:cNvSpPr/>
           <p:nvPr/>
         </p:nvSpPr>
@@ -3025,7 +3288,7 @@
       </p:sp>
       <p:sp>
         <p:nvSpPr>
-          <p:cNvPr id="60" name="Text 58"/>
+          <p:cNvPr id="67" name="Text 65"/>
           <p:cNvSpPr txBox="1"/>
           <p:nvPr/>
         </p:nvSpPr>
@@ -3064,7 +3327,7 @@
       </p:sp>
       <p:sp>
         <p:nvSpPr>
-          <p:cNvPr id="61" name="Text 59"/>
+          <p:cNvPr id="68" name="Text 66"/>
           <p:cNvSpPr txBox="1"/>
           <p:nvPr/>
         </p:nvSpPr>
@@ -3106,7 +3369,7 @@
       </p:sp>
       <p:sp>
         <p:nvSpPr>
-          <p:cNvPr id="62" name="Text 60"/>
+          <p:cNvPr id="69" name="Text 67"/>
           <p:cNvSpPr txBox="1"/>
           <p:nvPr/>
         </p:nvSpPr>
@@ -3299,7 +3562,7 @@
                 <a:ea typeface="Meiryo" pitchFamily="34" charset="-122"/>
                 <a:cs typeface="Meiryo" pitchFamily="34" charset="-120"/>
               </a:rPr>
-              <a:t>中核1,121名の層別と育成アクションへの接続</a:t>
+              <a:t>中核1,084名の層別と育成アクションへの接続</a:t>
             </a:r>
             <a:endParaRPr lang="en-US" sz="2100" dirty="0"/>
           </a:p>
@@ -3464,7 +3727,7 @@
                 <a:ea typeface="Meiryo" pitchFamily="34" charset="-122"/>
                 <a:cs typeface="Meiryo" pitchFamily="34" charset="-120"/>
               </a:rPr>
-              <a:t>■ 中核1,121名を習熟度の深さで3層に分解。重点4ロールのキースキル保有者が1,033名含まれ、最上位の「輩出候補」593名が27年度『輩出数KPI』の母集団となる</a:t>
+              <a:t>■ 重点4ロール適合を含む中核1,084名を習熟度の深さで3層に分解。キースキル保有者が1,008名含まれ、最上位の「輩出候補」587名が27年度『輩出数KPI』の母集団となる</a:t>
             </a:r>
             <a:endParaRPr lang="en-US" sz="1250" dirty="0"/>
           </a:p>
@@ -3523,7 +3786,7 @@
                 <a:ea typeface="Meiryo" pitchFamily="34" charset="-122"/>
                 <a:cs typeface="Meiryo" pitchFamily="34" charset="-120"/>
               </a:rPr>
-              <a:t>中核母集団の層別（相互排他・合計1,121名）</a:t>
+              <a:t>中核母集団の層別（相互排他・合計1,084名）</a:t>
             </a:r>
             <a:endParaRPr lang="en-US" sz="1250" dirty="0"/>
           </a:p>
@@ -3646,7 +3909,7 @@
                 <a:ea typeface="Meiryo" pitchFamily="34" charset="-122"/>
                 <a:cs typeface="Meiryo" pitchFamily="34" charset="-120"/>
               </a:rPr>
-              <a:t>593名</a:t>
+              <a:t>587名</a:t>
             </a:r>
             <a:endParaRPr lang="en-US" sz="2600" dirty="0"/>
           </a:p>
@@ -3951,7 +4214,7 @@
                 <a:ea typeface="Meiryo" pitchFamily="34" charset="-122"/>
                 <a:cs typeface="Meiryo" pitchFamily="34" charset="-120"/>
               </a:rPr>
-              <a:t>155名</a:t>
+              <a:t>145名</a:t>
             </a:r>
             <a:endParaRPr lang="en-US" sz="2600" dirty="0"/>
           </a:p>
@@ -4256,7 +4519,7 @@
                 <a:ea typeface="Meiryo" pitchFamily="34" charset="-122"/>
                 <a:cs typeface="Meiryo" pitchFamily="34" charset="-120"/>
               </a:rPr>
-              <a:t>373名</a:t>
+              <a:t>352名</a:t>
             </a:r>
             <a:endParaRPr lang="en-US" sz="2600" dirty="0"/>
           </a:p>
@@ -4596,7 +4859,7 @@
         <p:spPr>
           <a:xfrm>
             <a:off x="8183880" y="2633472"/>
-            <a:ext cx="2139990" cy="219456"/>
+            <a:ext cx="2173598" cy="219456"/>
           </a:xfrm>
           <a:prstGeom prst="rect">
             <a:avLst/>
@@ -4640,7 +4903,7 @@
                 <a:ea typeface="Meiryo" pitchFamily="34" charset="-122"/>
                 <a:cs typeface="Meiryo" pitchFamily="34" charset="-120"/>
               </a:rPr>
-              <a:t>954名</a:t>
+              <a:t>937名</a:t>
             </a:r>
             <a:endParaRPr lang="en-US" sz="1100" dirty="0"/>
           </a:p>
@@ -4714,7 +4977,7 @@
         <p:spPr>
           <a:xfrm>
             <a:off x="8183880" y="3090672"/>
-            <a:ext cx="1536575" cy="219456"/>
+            <a:ext cx="1575105" cy="219456"/>
           </a:xfrm>
           <a:prstGeom prst="rect">
             <a:avLst/>
@@ -4758,7 +5021,7 @@
                 <a:ea typeface="Meiryo" pitchFamily="34" charset="-122"/>
                 <a:cs typeface="Meiryo" pitchFamily="34" charset="-120"/>
               </a:rPr>
-              <a:t>685名</a:t>
+              <a:t>679名</a:t>
             </a:r>
             <a:endParaRPr lang="en-US" sz="1100" dirty="0"/>
           </a:p>
@@ -4832,7 +5095,7 @@
         <p:spPr>
           <a:xfrm>
             <a:off x="8183880" y="3547872"/>
-            <a:ext cx="964566" cy="219456"/>
+            <a:ext cx="992849" cy="219456"/>
           </a:xfrm>
           <a:prstGeom prst="rect">
             <a:avLst/>
@@ -4876,7 +5139,7 @@
                 <a:ea typeface="Meiryo" pitchFamily="34" charset="-122"/>
                 <a:cs typeface="Meiryo" pitchFamily="34" charset="-120"/>
               </a:rPr>
-              <a:t>430名</a:t>
+              <a:t>428名</a:t>
             </a:r>
             <a:endParaRPr lang="en-US" sz="1100" dirty="0"/>
           </a:p>
@@ -4950,7 +5213,7 @@
         <p:spPr>
           <a:xfrm>
             <a:off x="8183880" y="4005072"/>
-            <a:ext cx="2317201" cy="219456"/>
+            <a:ext cx="2338300" cy="219456"/>
           </a:xfrm>
           <a:prstGeom prst="rect">
             <a:avLst/>
@@ -4994,7 +5257,7 @@
                 <a:ea typeface="Meiryo" pitchFamily="34" charset="-122"/>
                 <a:cs typeface="Meiryo" pitchFamily="34" charset="-120"/>
               </a:rPr>
-              <a:t>1,033名</a:t>
+              <a:t>1,008名</a:t>
             </a:r>
             <a:endParaRPr lang="en-US" sz="1100" dirty="0"/>
           </a:p>

--- a/スキルチェック_1000名フィルタリング条件.pptx
+++ b/スキルチェック_1000名フィルタリング条件.pptx
@@ -7,9 +7,10 @@
   <p:sldIdLst>
     <p:sldId id="256" r:id="rId2"/>
     <p:sldId id="257" r:id="rId3"/>
+    <p:sldId id="258" r:id="rId4"/>
   </p:sldIdLst>
   <p:notesMasterIdLst>
-    <p:notesMasterId r:id="rId4"/>
+    <p:notesMasterId r:id="rId5"/>
   </p:notesMasterIdLst>
   <p:sldSz cx="12191695" cy="6858000"/>
   <p:notesSz cx="6858000" cy="12191695"/>
@@ -633,6 +634,94 @@
 </p:notes>
 </file>
 
+<file path=ppt/notesSlides/notesSlide3.xml><?xml version="1.0" encoding="utf-8"?>
+<p:notes xmlns:a="http://schemas.openxmlformats.org/drawingml/2006/main" xmlns:r="http://schemas.openxmlformats.org/officeDocument/2006/relationships" xmlns:p="http://schemas.openxmlformats.org/presentationml/2006/main">
+  <p:cSld>
+    <p:spTree>
+      <p:nvGrpSpPr>
+        <p:cNvPr id="1" name=""/>
+        <p:cNvGrpSpPr/>
+        <p:nvPr/>
+      </p:nvGrpSpPr>
+      <p:grpSpPr>
+        <a:xfrm>
+          <a:off x="0" y="0"/>
+          <a:ext cx="0" cy="0"/>
+          <a:chOff x="0" y="0"/>
+          <a:chExt cx="0" cy="0"/>
+        </a:xfrm>
+      </p:grpSpPr>
+      <p:sp>
+        <p:nvSpPr>
+          <p:cNvPr id="2" name="Slide Image Placeholder 1"/>
+          <p:cNvSpPr>
+            <a:spLocks noGrp="1" noRot="1" noChangeAspect="1"/>
+          </p:cNvSpPr>
+          <p:nvPr>
+            <p:ph type="sldImg"/>
+          </p:nvPr>
+        </p:nvSpPr>
+        <p:spPr/>
+      </p:sp>
+      <p:sp>
+        <p:nvSpPr>
+          <p:cNvPr id="3" name="Notes Placeholder 2"/>
+          <p:cNvSpPr>
+            <a:spLocks noGrp="1"/>
+          </p:cNvSpPr>
+          <p:nvPr>
+            <p:ph type="body" idx="1"/>
+          </p:nvPr>
+        </p:nvSpPr>
+        <p:spPr/>
+        <p:txBody>
+          <a:bodyPr/>
+          <a:lstStyle/>
+          <a:p>
+            <a:r>
+              <a:rPr lang="en-US" dirty="0"/>
+              <a:t/>
+            </a:r>
+            <a:endParaRPr lang="en-US" dirty="0"/>
+          </a:p>
+        </p:txBody>
+      </p:sp>
+      <p:sp>
+        <p:nvSpPr>
+          <p:cNvPr id="4" name="Slide Number Placeholder 3"/>
+          <p:cNvSpPr>
+            <a:spLocks noGrp="1"/>
+          </p:cNvSpPr>
+          <p:nvPr>
+            <p:ph type="sldNum" sz="quarter" idx="10"/>
+          </p:nvPr>
+        </p:nvSpPr>
+        <p:spPr/>
+        <p:txBody>
+          <a:bodyPr/>
+          <a:lstStyle/>
+          <a:p>
+            <a:fld id="{F7021451-1387-4CA6-816F-3879F97B5CBC}" type="slidenum">
+              <a:rPr lang="en-US"/>
+              <a:t>3</a:t>
+            </a:fld>
+            <a:endParaRPr lang="en-US"/>
+          </a:p>
+        </p:txBody>
+      </p:sp>
+    </p:spTree>
+    <p:extLst>
+      <p:ext uri="{BB962C8B-B14F-4D97-AF65-F5344CB8AC3E}">
+        <p14:creationId xmlns:p14="http://schemas.microsoft.com/office/powerpoint/2010/main" val="1024086991"/>
+      </p:ext>
+    </p:extLst>
+  </p:cSld>
+  <p:clrMapOvr>
+    <a:masterClrMapping/>
+  </p:clrMapOvr>
+</p:notes>
+</file>
+
 <file path=ppt/slideLayouts/slideLayout1.xml><?xml version="1.0" encoding="utf-8"?>
 <p:sldLayout xmlns:a="http://schemas.openxmlformats.org/drawingml/2006/main" xmlns:r="http://schemas.openxmlformats.org/officeDocument/2006/relationships" xmlns:p="http://schemas.openxmlformats.org/presentationml/2006/main" preserve="1">
   <p:cSld name="DEFAULT">
@@ -1253,7 +1342,7 @@
                 <a:ea typeface="Meiryo" pitchFamily="34" charset="-122"/>
                 <a:cs typeface="Meiryo" pitchFamily="34" charset="-120"/>
               </a:rPr>
-              <a:t>■ 2026年度目標＝全従業員の約30%・1,000名を「デジタル活用人材」に育成。スキル個数（基礎→専門）に重点4ロール適合を重ねた4段フィルタで中核1,084名（31.9%）に着地し、目標を達成見込み</a:t>
+              <a:t>■ 2026年度目標＝全従業員の約30%・1,000名を「デジタル活用人材」に育成。スキル個数（基礎→専門）に重点4ロール適合を重ねた4段フィルタで中核1,190名（35.1%）に着地し、計画1,000名を約19%上回って達成</a:t>
             </a:r>
             <a:endParaRPr lang="en-US" sz="1250" dirty="0"/>
           </a:p>
@@ -1798,7 +1887,7 @@
         <p:spPr>
           <a:xfrm>
             <a:off x="457200" y="4270248"/>
-            <a:ext cx="3022942" cy="530352"/>
+            <a:ext cx="3106200" cy="530352"/>
           </a:xfrm>
           <a:prstGeom prst="rect">
             <a:avLst/>
@@ -1818,7 +1907,7 @@
         <p:spPr>
           <a:xfrm>
             <a:off x="585216" y="4297680"/>
-            <a:ext cx="2766910" cy="301752"/>
+            <a:ext cx="2850168" cy="301752"/>
           </a:xfrm>
           <a:prstGeom prst="rect">
             <a:avLst/>
@@ -1842,7 +1931,7 @@
                 <a:ea typeface="Meiryo" pitchFamily="34" charset="-122"/>
                 <a:cs typeface="Meiryo" pitchFamily="34" charset="-120"/>
               </a:rPr>
-              <a:t>④ 専門の幅：専門スキル P2以上 ×4個以上</a:t>
+              <a:t>④ 専門の幅：専門スキル P2以上 ×3個以上</a:t>
             </a:r>
             <a:endParaRPr lang="en-US" sz="1050" dirty="0"/>
           </a:p>
@@ -1857,7 +1946,7 @@
         <p:spPr>
           <a:xfrm>
             <a:off x="585216" y="4572000"/>
-            <a:ext cx="2766910" cy="219456"/>
+            <a:ext cx="2850168" cy="219456"/>
           </a:xfrm>
           <a:prstGeom prst="rect">
             <a:avLst/>
@@ -1923,7 +2012,7 @@
                 <a:ea typeface="Meiryo" pitchFamily="34" charset="-122"/>
                 <a:cs typeface="Meiryo" pitchFamily="34" charset="-120"/>
               </a:rPr>
-              <a:t>1,121名</a:t>
+              <a:t>1,281名</a:t>
             </a:r>
             <a:pPr algn="l" indent="0" marL="0">
               <a:lnSpc>
@@ -1940,7 +2029,7 @@
                 <a:ea typeface="Meiryo" pitchFamily="34" charset="-122"/>
                 <a:cs typeface="Meiryo" pitchFamily="34" charset="-120"/>
               </a:rPr>
-              <a:t>  33.0%</a:t>
+              <a:t>  37.7%</a:t>
             </a:r>
             <a:endParaRPr lang="en-US" sz="1400" dirty="0"/>
           </a:p>
@@ -1955,7 +2044,7 @@
         <p:spPr>
           <a:xfrm>
             <a:off x="457200" y="4901184"/>
-            <a:ext cx="3003689" cy="530352"/>
+            <a:ext cx="3058847" cy="530352"/>
           </a:xfrm>
           <a:prstGeom prst="rect">
             <a:avLst/>
@@ -1975,7 +2064,7 @@
         <p:spPr>
           <a:xfrm>
             <a:off x="585216" y="4928616"/>
-            <a:ext cx="2747657" cy="301752"/>
+            <a:ext cx="2802815" cy="301752"/>
           </a:xfrm>
           <a:prstGeom prst="rect">
             <a:avLst/>
@@ -2014,7 +2103,7 @@
         <p:spPr>
           <a:xfrm>
             <a:off x="585216" y="5202936"/>
-            <a:ext cx="2747657" cy="219456"/>
+            <a:ext cx="2802815" cy="219456"/>
           </a:xfrm>
           <a:prstGeom prst="rect">
             <a:avLst/>
@@ -2080,7 +2169,7 @@
                 <a:ea typeface="Meiryo" pitchFamily="34" charset="-122"/>
                 <a:cs typeface="Meiryo" pitchFamily="34" charset="-120"/>
               </a:rPr>
-              <a:t>1,084名</a:t>
+              <a:t>1,190名</a:t>
             </a:r>
             <a:pPr algn="l" indent="0" marL="0">
               <a:lnSpc>
@@ -2097,7 +2186,7 @@
                 <a:ea typeface="Meiryo" pitchFamily="34" charset="-122"/>
                 <a:cs typeface="Meiryo" pitchFamily="34" charset="-120"/>
               </a:rPr>
-              <a:t>  31.9%</a:t>
+              <a:t>  35.1%</a:t>
             </a:r>
             <a:pPr algn="l" indent="0" marL="0">
               <a:lnSpc>
@@ -2115,7 +2204,7 @@
               <a:buNone/>
             </a:pPr>
             <a:r>
-              <a:rPr lang="en-US" sz="950" b="1" i="1" dirty="0">
+              <a:rPr lang="en-US" sz="900" b="1" i="1" dirty="0">
                 <a:solidFill>
                   <a:srgbClr val="276B3C"/>
                 </a:solidFill>
@@ -2123,7 +2212,7 @@
                 <a:ea typeface="Meiryo" pitchFamily="34" charset="-122"/>
                 <a:cs typeface="Meiryo" pitchFamily="34" charset="-120"/>
               </a:rPr>
-              <a:t>≧ 目標30%を達成</a:t>
+              <a:t>計画1,000名を上回る</a:t>
             </a:r>
             <a:endParaRPr lang="en-US" sz="1400" dirty="0"/>
           </a:p>
@@ -2516,7 +2605,7 @@
                 <a:ea typeface="Meiryo" pitchFamily="34" charset="-122"/>
                 <a:cs typeface="Meiryo" pitchFamily="34" charset="-120"/>
               </a:rPr>
-              <a:t>専門42スキル中、P2以上を 4個以上（約30%ライン）</a:t>
+              <a:t>専門42スキル中、P2以上を 3個以上（複数領域で実践）</a:t>
             </a:r>
             <a:endParaRPr lang="en-US" sz="980" dirty="0"/>
           </a:p>
@@ -2945,7 +3034,27 @@
       </p:sp>
       <p:sp>
         <p:nvSpPr>
-          <p:cNvPr id="57" name="Text 55"/>
+          <p:cNvPr id="57" name="Shape 55"/>
+          <p:cNvSpPr/>
+          <p:nvPr/>
+        </p:nvSpPr>
+        <p:spPr>
+          <a:xfrm>
+            <a:off x="7360920" y="5449824"/>
+            <a:ext cx="4462272" cy="265176"/>
+          </a:xfrm>
+          <a:prstGeom prst="rect">
+            <a:avLst/>
+          </a:prstGeom>
+          <a:solidFill>
+            <a:srgbClr val="EAF6EE"/>
+          </a:solidFill>
+          <a:ln/>
+        </p:spPr>
+      </p:sp>
+      <p:sp>
+        <p:nvSpPr>
+          <p:cNvPr id="58" name="Text 56"/>
           <p:cNvSpPr txBox="1"/>
           <p:nvPr/>
         </p:nvSpPr>
@@ -2968,15 +3077,15 @@
               <a:buNone/>
             </a:pPr>
             <a:r>
-              <a:rPr lang="en-US" sz="950" dirty="0">
-                <a:solidFill>
-                  <a:srgbClr val="333333"/>
-                </a:solidFill>
-                <a:latin typeface="Meiryo" pitchFamily="34" charset="0"/>
-                <a:ea typeface="Meiryo" pitchFamily="34" charset="-122"/>
-                <a:cs typeface="Meiryo" pitchFamily="34" charset="-120"/>
-              </a:rPr>
-              <a:t>×3個以上</a:t>
+              <a:rPr lang="en-US" sz="950" b="1" dirty="0">
+                <a:solidFill>
+                  <a:srgbClr val="276B3C"/>
+                </a:solidFill>
+                <a:latin typeface="Meiryo" pitchFamily="34" charset="0"/>
+                <a:ea typeface="Meiryo" pitchFamily="34" charset="-122"/>
+                <a:cs typeface="Meiryo" pitchFamily="34" charset="-120"/>
+              </a:rPr>
+              <a:t>×3個以上（推奨）</a:t>
             </a:r>
             <a:endParaRPr lang="en-US" sz="950" dirty="0"/>
           </a:p>
@@ -2984,7 +3093,7 @@
       </p:sp>
       <p:sp>
         <p:nvSpPr>
-          <p:cNvPr id="58" name="Text 56"/>
+          <p:cNvPr id="59" name="Text 57"/>
           <p:cNvSpPr txBox="1"/>
           <p:nvPr/>
         </p:nvSpPr>
@@ -3007,9 +3116,9 @@
               <a:buNone/>
             </a:pPr>
             <a:r>
-              <a:rPr lang="en-US" sz="950" dirty="0">
-                <a:solidFill>
-                  <a:srgbClr val="333333"/>
+              <a:rPr lang="en-US" sz="950" b="1" dirty="0">
+                <a:solidFill>
+                  <a:srgbClr val="276B3C"/>
                 </a:solidFill>
                 <a:latin typeface="Meiryo" pitchFamily="34" charset="0"/>
                 <a:ea typeface="Meiryo" pitchFamily="34" charset="-122"/>
@@ -3023,7 +3132,7 @@
       </p:sp>
       <p:sp>
         <p:nvSpPr>
-          <p:cNvPr id="59" name="Text 57"/>
+          <p:cNvPr id="60" name="Text 58"/>
           <p:cNvSpPr txBox="1"/>
           <p:nvPr/>
         </p:nvSpPr>
@@ -3046,9 +3155,9 @@
               <a:buNone/>
             </a:pPr>
             <a:r>
-              <a:rPr lang="en-US" sz="950" dirty="0">
-                <a:solidFill>
-                  <a:srgbClr val="333333"/>
+              <a:rPr lang="en-US" sz="950" b="1" dirty="0">
+                <a:solidFill>
+                  <a:srgbClr val="276B3C"/>
                 </a:solidFill>
                 <a:latin typeface="Meiryo" pitchFamily="34" charset="0"/>
                 <a:ea typeface="Meiryo" pitchFamily="34" charset="-122"/>
@@ -3059,26 +3168,6 @@
             <a:endParaRPr lang="en-US" sz="950" dirty="0"/>
           </a:p>
         </p:txBody>
-      </p:sp>
-      <p:sp>
-        <p:nvSpPr>
-          <p:cNvPr id="60" name="Shape 58"/>
-          <p:cNvSpPr/>
-          <p:nvPr/>
-        </p:nvSpPr>
-        <p:spPr>
-          <a:xfrm>
-            <a:off x="7360920" y="5751576"/>
-            <a:ext cx="4462272" cy="265176"/>
-          </a:xfrm>
-          <a:prstGeom prst="rect">
-            <a:avLst/>
-          </a:prstGeom>
-          <a:solidFill>
-            <a:srgbClr val="EAF6EE"/>
-          </a:solidFill>
-          <a:ln/>
-        </p:spPr>
       </p:sp>
       <p:sp>
         <p:nvSpPr>
@@ -3105,15 +3194,15 @@
               <a:buNone/>
             </a:pPr>
             <a:r>
-              <a:rPr lang="en-US" sz="950" b="1" dirty="0">
-                <a:solidFill>
-                  <a:srgbClr val="276B3C"/>
-                </a:solidFill>
-                <a:latin typeface="Meiryo" pitchFamily="34" charset="0"/>
-                <a:ea typeface="Meiryo" pitchFamily="34" charset="-122"/>
-                <a:cs typeface="Meiryo" pitchFamily="34" charset="-120"/>
-              </a:rPr>
-              <a:t>×4個以上（推奨）</a:t>
+              <a:rPr lang="en-US" sz="950" dirty="0">
+                <a:solidFill>
+                  <a:srgbClr val="333333"/>
+                </a:solidFill>
+                <a:latin typeface="Meiryo" pitchFamily="34" charset="0"/>
+                <a:ea typeface="Meiryo" pitchFamily="34" charset="-122"/>
+                <a:cs typeface="Meiryo" pitchFamily="34" charset="-120"/>
+              </a:rPr>
+              <a:t>×4個以上（厳しめ）</a:t>
             </a:r>
             <a:endParaRPr lang="en-US" sz="950" dirty="0"/>
           </a:p>
@@ -3144,9 +3233,9 @@
               <a:buNone/>
             </a:pPr>
             <a:r>
-              <a:rPr lang="en-US" sz="950" b="1" dirty="0">
-                <a:solidFill>
-                  <a:srgbClr val="276B3C"/>
+              <a:rPr lang="en-US" sz="950" dirty="0">
+                <a:solidFill>
+                  <a:srgbClr val="333333"/>
                 </a:solidFill>
                 <a:latin typeface="Meiryo" pitchFamily="34" charset="0"/>
                 <a:ea typeface="Meiryo" pitchFamily="34" charset="-122"/>
@@ -3183,9 +3272,9 @@
               <a:buNone/>
             </a:pPr>
             <a:r>
-              <a:rPr lang="en-US" sz="950" b="1" dirty="0">
-                <a:solidFill>
-                  <a:srgbClr val="276B3C"/>
+              <a:rPr lang="en-US" sz="950" dirty="0">
+                <a:solidFill>
+                  <a:srgbClr val="333333"/>
                 </a:solidFill>
                 <a:latin typeface="Meiryo" pitchFamily="34" charset="0"/>
                 <a:ea typeface="Meiryo" pitchFamily="34" charset="-122"/>
@@ -3233,7 +3322,7 @@
                 <a:ea typeface="Meiryo" pitchFamily="34" charset="-122"/>
                 <a:cs typeface="Meiryo" pitchFamily="34" charset="-120"/>
               </a:rPr>
-              <a:t>いずれも目標1,000名を達成（×5個以上は985名で未達）。推奨③×4個で1,000〜1,500名の幅に収まる</a:t>
+              <a:t>推奨③×3個で1,190名＝計画1,000名を約19%上回り、過度に緩めず1,000〜1,500名の幅に収まる</a:t>
             </a:r>
             <a:endParaRPr lang="en-US" sz="860" dirty="0"/>
           </a:p>
@@ -3562,7 +3651,7 @@
                 <a:ea typeface="Meiryo" pitchFamily="34" charset="-122"/>
                 <a:cs typeface="Meiryo" pitchFamily="34" charset="-120"/>
               </a:rPr>
-              <a:t>中核1,084名の層別と育成アクションへの接続</a:t>
+              <a:t>中核1,190名の層別と育成アクションへの接続</a:t>
             </a:r>
             <a:endParaRPr lang="en-US" sz="2100" dirty="0"/>
           </a:p>
@@ -3727,7 +3816,7 @@
                 <a:ea typeface="Meiryo" pitchFamily="34" charset="-122"/>
                 <a:cs typeface="Meiryo" pitchFamily="34" charset="-120"/>
               </a:rPr>
-              <a:t>■ 重点4ロール適合を含む中核1,084名を習熟度の深さで3層に分解。キースキル保有者が1,008名含まれ、最上位の「輩出候補」587名が27年度『輩出数KPI』の母集団となる</a:t>
+              <a:t>■ 重点4ロール適合を含む中核1,190名を習熟度の深さで3層に分解。キースキル保有者が1,082名含まれ、最上位の「輩出候補」599名が27年度『輩出数KPI』の母集団となる</a:t>
             </a:r>
             <a:endParaRPr lang="en-US" sz="1250" dirty="0"/>
           </a:p>
@@ -3786,7 +3875,7 @@
                 <a:ea typeface="Meiryo" pitchFamily="34" charset="-122"/>
                 <a:cs typeface="Meiryo" pitchFamily="34" charset="-120"/>
               </a:rPr>
-              <a:t>中核母集団の層別（相互排他・合計1,084名）</a:t>
+              <a:t>中核母集団の層別（相互排他・合計1,190名）</a:t>
             </a:r>
             <a:endParaRPr lang="en-US" sz="1250" dirty="0"/>
           </a:p>
@@ -3909,7 +3998,7 @@
                 <a:ea typeface="Meiryo" pitchFamily="34" charset="-122"/>
                 <a:cs typeface="Meiryo" pitchFamily="34" charset="-120"/>
               </a:rPr>
-              <a:t>587名</a:t>
+              <a:t>599名</a:t>
             </a:r>
             <a:endParaRPr lang="en-US" sz="2600" dirty="0"/>
           </a:p>
@@ -4214,7 +4303,7 @@
                 <a:ea typeface="Meiryo" pitchFamily="34" charset="-122"/>
                 <a:cs typeface="Meiryo" pitchFamily="34" charset="-120"/>
               </a:rPr>
-              <a:t>145名</a:t>
+              <a:t>163名</a:t>
             </a:r>
             <a:endParaRPr lang="en-US" sz="2600" dirty="0"/>
           </a:p>
@@ -4519,7 +4608,7 @@
                 <a:ea typeface="Meiryo" pitchFamily="34" charset="-122"/>
                 <a:cs typeface="Meiryo" pitchFamily="34" charset="-120"/>
               </a:rPr>
-              <a:t>352名</a:t>
+              <a:t>428名</a:t>
             </a:r>
             <a:endParaRPr lang="en-US" sz="2600" dirty="0"/>
           </a:p>
@@ -4859,7 +4948,7 @@
         <p:spPr>
           <a:xfrm>
             <a:off x="8183880" y="2633472"/>
-            <a:ext cx="2173598" cy="219456"/>
+            <a:ext cx="2125788" cy="219456"/>
           </a:xfrm>
           <a:prstGeom prst="rect">
             <a:avLst/>
@@ -4903,7 +4992,7 @@
                 <a:ea typeface="Meiryo" pitchFamily="34" charset="-122"/>
                 <a:cs typeface="Meiryo" pitchFamily="34" charset="-120"/>
               </a:rPr>
-              <a:t>937名</a:t>
+              <a:t>1,006名</a:t>
             </a:r>
             <a:endParaRPr lang="en-US" sz="1100" dirty="0"/>
           </a:p>
@@ -4977,7 +5066,7 @@
         <p:spPr>
           <a:xfrm>
             <a:off x="8183880" y="3090672"/>
-            <a:ext cx="1575105" cy="219456"/>
+            <a:ext cx="1485516" cy="219456"/>
           </a:xfrm>
           <a:prstGeom prst="rect">
             <a:avLst/>
@@ -5021,7 +5110,7 @@
                 <a:ea typeface="Meiryo" pitchFamily="34" charset="-122"/>
                 <a:cs typeface="Meiryo" pitchFamily="34" charset="-120"/>
               </a:rPr>
-              <a:t>679名</a:t>
+              <a:t>703名</a:t>
             </a:r>
             <a:endParaRPr lang="en-US" sz="1100" dirty="0"/>
           </a:p>
@@ -5095,7 +5184,7 @@
         <p:spPr>
           <a:xfrm>
             <a:off x="8183880" y="3547872"/>
-            <a:ext cx="992849" cy="219456"/>
+            <a:ext cx="908637" cy="219456"/>
           </a:xfrm>
           <a:prstGeom prst="rect">
             <a:avLst/>
@@ -5139,7 +5228,7 @@
                 <a:ea typeface="Meiryo" pitchFamily="34" charset="-122"/>
                 <a:cs typeface="Meiryo" pitchFamily="34" charset="-120"/>
               </a:rPr>
-              <a:t>428名</a:t>
+              <a:t>430名</a:t>
             </a:r>
             <a:endParaRPr lang="en-US" sz="1100" dirty="0"/>
           </a:p>
@@ -5213,7 +5302,7 @@
         <p:spPr>
           <a:xfrm>
             <a:off x="8183880" y="4005072"/>
-            <a:ext cx="2338300" cy="219456"/>
+            <a:ext cx="2286384" cy="219456"/>
           </a:xfrm>
           <a:prstGeom prst="rect">
             <a:avLst/>
@@ -5257,7 +5346,7 @@
                 <a:ea typeface="Meiryo" pitchFamily="34" charset="-122"/>
                 <a:cs typeface="Meiryo" pitchFamily="34" charset="-120"/>
               </a:rPr>
-              <a:t>1,008名</a:t>
+              <a:t>1,082名</a:t>
             </a:r>
             <a:endParaRPr lang="en-US" sz="1100" dirty="0"/>
           </a:p>
@@ -5609,6 +5698,1310 @@
                 <a:cs typeface="Meiryo" pitchFamily="34" charset="-120"/>
               </a:rPr>
               <a:t>8</a:t>
+            </a:r>
+            <a:endParaRPr lang="en-US" sz="1100" dirty="0"/>
+          </a:p>
+        </p:txBody>
+      </p:sp>
+    </p:spTree>
+  </p:cSld>
+  <p:clrMapOvr>
+    <a:masterClrMapping/>
+  </p:clrMapOvr>
+</p:sld>
+</file>
+
+<file path=ppt/slides/slide3.xml><?xml version="1.0" encoding="utf-8"?>
+<p:sld xmlns:a="http://schemas.openxmlformats.org/drawingml/2006/main" xmlns:r="http://schemas.openxmlformats.org/officeDocument/2006/relationships" xmlns:p="http://schemas.openxmlformats.org/presentationml/2006/main">
+  <p:cSld name="Slide 3">
+    <p:spTree>
+      <p:nvGrpSpPr>
+        <p:cNvPr id="1" name=""/>
+        <p:cNvGrpSpPr/>
+        <p:nvPr/>
+      </p:nvGrpSpPr>
+      <p:grpSpPr>
+        <a:xfrm>
+          <a:off x="0" y="0"/>
+          <a:ext cx="0" cy="0"/>
+          <a:chOff x="0" y="0"/>
+          <a:chExt cx="0" cy="0"/>
+        </a:xfrm>
+      </p:grpSpPr>
+      <p:sp>
+        <p:nvSpPr>
+          <p:cNvPr id="2" name="Shape 0"/>
+          <p:cNvSpPr/>
+          <p:nvPr/>
+        </p:nvSpPr>
+        <p:spPr>
+          <a:xfrm>
+            <a:off x="274320" y="256032"/>
+            <a:ext cx="402336" cy="402336"/>
+          </a:xfrm>
+          <a:prstGeom prst="ellipse">
+            <a:avLst/>
+          </a:prstGeom>
+          <a:solidFill>
+            <a:srgbClr val="58595B"/>
+          </a:solidFill>
+          <a:ln/>
+        </p:spPr>
+      </p:sp>
+      <p:sp>
+        <p:nvSpPr>
+          <p:cNvPr id="3" name="Text 1"/>
+          <p:cNvSpPr txBox="1"/>
+          <p:nvPr/>
+        </p:nvSpPr>
+        <p:spPr>
+          <a:xfrm>
+            <a:off x="274320" y="256032"/>
+            <a:ext cx="402336" cy="402336"/>
+          </a:xfrm>
+          <a:prstGeom prst="rect">
+            <a:avLst/>
+          </a:prstGeom>
+          <a:noFill/>
+          <a:ln/>
+        </p:spPr>
+        <p:txBody>
+          <a:bodyPr wrap="square" rtlCol="0" anchor="ctr"/>
+          <a:lstStyle/>
+          <a:p>
+            <a:pPr algn="ctr" indent="0" marL="0">
+              <a:buNone/>
+            </a:pPr>
+            <a:r>
+              <a:rPr lang="en-US" sz="1800" b="1" dirty="0">
+                <a:solidFill>
+                  <a:srgbClr val="FFFFFF"/>
+                </a:solidFill>
+                <a:latin typeface="Meiryo" pitchFamily="34" charset="0"/>
+                <a:ea typeface="Meiryo" pitchFamily="34" charset="-122"/>
+                <a:cs typeface="Meiryo" pitchFamily="34" charset="-120"/>
+              </a:rPr>
+              <a:t>2</a:t>
+            </a:r>
+            <a:endParaRPr lang="en-US" sz="1800" dirty="0"/>
+          </a:p>
+        </p:txBody>
+      </p:sp>
+      <p:sp>
+        <p:nvSpPr>
+          <p:cNvPr id="4" name="Text 2"/>
+          <p:cNvSpPr txBox="1"/>
+          <p:nvPr/>
+        </p:nvSpPr>
+        <p:spPr>
+          <a:xfrm>
+            <a:off x="786384" y="182880"/>
+            <a:ext cx="8686800" cy="310896"/>
+          </a:xfrm>
+          <a:prstGeom prst="rect">
+            <a:avLst/>
+          </a:prstGeom>
+          <a:noFill/>
+          <a:ln/>
+        </p:spPr>
+        <p:txBody>
+          <a:bodyPr wrap="square" lIns="0" tIns="0" rIns="0" bIns="0" rtlCol="0" anchor="ctr"/>
+          <a:lstStyle/>
+          <a:p>
+            <a:pPr indent="0" marL="0">
+              <a:buNone/>
+            </a:pPr>
+            <a:r>
+              <a:rPr lang="en-US" sz="1300" b="1" dirty="0">
+                <a:solidFill>
+                  <a:srgbClr val="58595B"/>
+                </a:solidFill>
+                <a:latin typeface="Meiryo" pitchFamily="34" charset="0"/>
+                <a:ea typeface="Meiryo" pitchFamily="34" charset="-122"/>
+                <a:cs typeface="Meiryo" pitchFamily="34" charset="-120"/>
+              </a:rPr>
+              <a:t>4－9月の成果と課題｜補足</a:t>
+            </a:r>
+            <a:endParaRPr lang="en-US" sz="1300" dirty="0"/>
+          </a:p>
+        </p:txBody>
+      </p:sp>
+      <p:sp>
+        <p:nvSpPr>
+          <p:cNvPr id="5" name="Text 3"/>
+          <p:cNvSpPr txBox="1"/>
+          <p:nvPr/>
+        </p:nvSpPr>
+        <p:spPr>
+          <a:xfrm>
+            <a:off x="786384" y="457200"/>
+            <a:ext cx="10058400" cy="457200"/>
+          </a:xfrm>
+          <a:prstGeom prst="rect">
+            <a:avLst/>
+          </a:prstGeom>
+          <a:noFill/>
+          <a:ln/>
+        </p:spPr>
+        <p:txBody>
+          <a:bodyPr wrap="square" lIns="0" tIns="0" rIns="0" bIns="0" rtlCol="0" anchor="ctr"/>
+          <a:lstStyle/>
+          <a:p>
+            <a:pPr indent="0" marL="0">
+              <a:buNone/>
+            </a:pPr>
+            <a:r>
+              <a:rPr lang="en-US" sz="2100" b="1" dirty="0">
+                <a:solidFill>
+                  <a:srgbClr val="333333"/>
+                </a:solidFill>
+                <a:latin typeface="Meiryo" pitchFamily="34" charset="0"/>
+                <a:ea typeface="Meiryo" pitchFamily="34" charset="-122"/>
+                <a:cs typeface="Meiryo" pitchFamily="34" charset="-120"/>
+              </a:rPr>
+              <a:t>目標と達成の合理性（株主・IR説明の論点）</a:t>
+            </a:r>
+            <a:endParaRPr lang="en-US" sz="2100" dirty="0"/>
+          </a:p>
+        </p:txBody>
+      </p:sp>
+      <p:sp>
+        <p:nvSpPr>
+          <p:cNvPr id="6" name="Text 4"/>
+          <p:cNvSpPr txBox="1"/>
+          <p:nvPr/>
+        </p:nvSpPr>
+        <p:spPr>
+          <a:xfrm>
+            <a:off x="9966960" y="274320"/>
+            <a:ext cx="1947672" cy="365760"/>
+          </a:xfrm>
+          <a:prstGeom prst="rect">
+            <a:avLst/>
+          </a:prstGeom>
+          <a:noFill/>
+          <a:ln/>
+        </p:spPr>
+        <p:txBody>
+          <a:bodyPr wrap="square" lIns="0" tIns="0" rIns="0" bIns="0" rtlCol="0" anchor="ctr"/>
+          <a:lstStyle/>
+          <a:p>
+            <a:pPr algn="r" indent="0" marL="0">
+              <a:buNone/>
+            </a:pPr>
+            <a:r>
+              <a:rPr lang="en-US" sz="1100" b="1" dirty="0">
+                <a:solidFill>
+                  <a:srgbClr val="369E51"/>
+                </a:solidFill>
+                <a:latin typeface="Meiryo" pitchFamily="34" charset="0"/>
+                <a:ea typeface="Meiryo" pitchFamily="34" charset="-122"/>
+                <a:cs typeface="Meiryo" pitchFamily="34" charset="-120"/>
+              </a:rPr>
+              <a:t>IT・デジタル人材育成</a:t>
+            </a:r>
+            <a:endParaRPr lang="en-US" sz="1100" dirty="0"/>
+          </a:p>
+        </p:txBody>
+      </p:sp>
+      <p:sp>
+        <p:nvSpPr>
+          <p:cNvPr id="7" name="Text 5"/>
+          <p:cNvSpPr txBox="1"/>
+          <p:nvPr/>
+        </p:nvSpPr>
+        <p:spPr>
+          <a:xfrm>
+            <a:off x="274320" y="6510528"/>
+            <a:ext cx="6400800" cy="274320"/>
+          </a:xfrm>
+          <a:prstGeom prst="rect">
+            <a:avLst/>
+          </a:prstGeom>
+          <a:noFill/>
+          <a:ln/>
+        </p:spPr>
+        <p:txBody>
+          <a:bodyPr wrap="square" lIns="0" tIns="0" rIns="0" bIns="0" rtlCol="0" anchor="ctr"/>
+          <a:lstStyle/>
+          <a:p>
+            <a:pPr indent="0" marL="0">
+              <a:buNone/>
+            </a:pPr>
+            <a:r>
+              <a:rPr lang="en-US" sz="900" dirty="0">
+                <a:solidFill>
+                  <a:srgbClr val="7A7F7C"/>
+                </a:solidFill>
+                <a:latin typeface="Meiryo" pitchFamily="34" charset="0"/>
+                <a:ea typeface="Meiryo" pitchFamily="34" charset="-122"/>
+                <a:cs typeface="Meiryo" pitchFamily="34" charset="-120"/>
+              </a:rPr>
+              <a:t>©LION Corporation All rights reserved</a:t>
+            </a:r>
+            <a:endParaRPr lang="en-US" sz="900" dirty="0"/>
+          </a:p>
+        </p:txBody>
+      </p:sp>
+      <p:sp>
+        <p:nvSpPr>
+          <p:cNvPr id="8" name="Shape 6"/>
+          <p:cNvSpPr/>
+          <p:nvPr/>
+        </p:nvSpPr>
+        <p:spPr>
+          <a:xfrm>
+            <a:off x="274320" y="1024128"/>
+            <a:ext cx="11640312" cy="786384"/>
+          </a:xfrm>
+          <a:prstGeom prst="rect">
+            <a:avLst/>
+          </a:prstGeom>
+          <a:solidFill>
+            <a:srgbClr val="EAF6EE"/>
+          </a:solidFill>
+          <a:ln w="9525">
+            <a:solidFill>
+              <a:srgbClr val="369E51"/>
+            </a:solidFill>
+            <a:prstDash val="solid"/>
+          </a:ln>
+        </p:spPr>
+      </p:sp>
+      <p:sp>
+        <p:nvSpPr>
+          <p:cNvPr id="9" name="Shape 7"/>
+          <p:cNvSpPr/>
+          <p:nvPr/>
+        </p:nvSpPr>
+        <p:spPr>
+          <a:xfrm>
+            <a:off x="274320" y="1024128"/>
+            <a:ext cx="109728" cy="786384"/>
+          </a:xfrm>
+          <a:prstGeom prst="rect">
+            <a:avLst/>
+          </a:prstGeom>
+          <a:solidFill>
+            <a:srgbClr val="369E51"/>
+          </a:solidFill>
+          <a:ln/>
+        </p:spPr>
+      </p:sp>
+      <p:sp>
+        <p:nvSpPr>
+          <p:cNvPr id="10" name="Text 8"/>
+          <p:cNvSpPr txBox="1"/>
+          <p:nvPr/>
+        </p:nvSpPr>
+        <p:spPr>
+          <a:xfrm>
+            <a:off x="512064" y="1042416"/>
+            <a:ext cx="11338560" cy="749808"/>
+          </a:xfrm>
+          <a:prstGeom prst="rect">
+            <a:avLst/>
+          </a:prstGeom>
+          <a:noFill/>
+          <a:ln/>
+        </p:spPr>
+        <p:txBody>
+          <a:bodyPr wrap="square" lIns="0" tIns="0" rIns="0" bIns="0" rtlCol="0" anchor="ctr"/>
+          <a:lstStyle/>
+          <a:p>
+            <a:pPr indent="0" marL="0">
+              <a:lnSpc>
+                <a:spcPct val="102000"/>
+              </a:lnSpc>
+              <a:buNone/>
+            </a:pPr>
+            <a:r>
+              <a:rPr lang="en-US" sz="1250" b="1" dirty="0">
+                <a:solidFill>
+                  <a:srgbClr val="276B3C"/>
+                </a:solidFill>
+                <a:latin typeface="Meiryo" pitchFamily="34" charset="0"/>
+                <a:ea typeface="Meiryo" pitchFamily="34" charset="-122"/>
+                <a:cs typeface="Meiryo" pitchFamily="34" charset="-120"/>
+              </a:rPr>
+              <a:t>■ 目標1,000名（全従業員の約30%）は学術通説と先進企業水準に基づく合理的設定。独自定義×自走ラインでの厳格測定で1,190名（35.1%）と計画を上回って達成。自己評価のみのため数値はむしろ保守的で、360度評価で更に精緻化する</a:t>
+            </a:r>
+            <a:endParaRPr lang="en-US" sz="1250" dirty="0"/>
+          </a:p>
+        </p:txBody>
+      </p:sp>
+      <p:sp>
+        <p:nvSpPr>
+          <p:cNvPr id="11" name="Shape 9"/>
+          <p:cNvSpPr/>
+          <p:nvPr/>
+        </p:nvSpPr>
+        <p:spPr>
+          <a:xfrm>
+            <a:off x="274320" y="2011680"/>
+            <a:ext cx="2770632" cy="3566160"/>
+          </a:xfrm>
+          <a:prstGeom prst="rect">
+            <a:avLst/>
+          </a:prstGeom>
+          <a:solidFill>
+            <a:srgbClr val="FFFFFF"/>
+          </a:solidFill>
+          <a:ln w="9525">
+            <a:solidFill>
+              <a:srgbClr val="D7DBD9"/>
+            </a:solidFill>
+            <a:prstDash val="solid"/>
+          </a:ln>
+        </p:spPr>
+      </p:sp>
+      <p:sp>
+        <p:nvSpPr>
+          <p:cNvPr id="12" name="Shape 10"/>
+          <p:cNvSpPr/>
+          <p:nvPr/>
+        </p:nvSpPr>
+        <p:spPr>
+          <a:xfrm>
+            <a:off x="274320" y="2011680"/>
+            <a:ext cx="2770632" cy="475488"/>
+          </a:xfrm>
+          <a:prstGeom prst="rect">
+            <a:avLst/>
+          </a:prstGeom>
+          <a:solidFill>
+            <a:srgbClr val="369E51"/>
+          </a:solidFill>
+          <a:ln/>
+        </p:spPr>
+      </p:sp>
+      <p:sp>
+        <p:nvSpPr>
+          <p:cNvPr id="13" name="Text 11"/>
+          <p:cNvSpPr txBox="1"/>
+          <p:nvPr/>
+        </p:nvSpPr>
+        <p:spPr>
+          <a:xfrm>
+            <a:off x="320040" y="2011680"/>
+            <a:ext cx="2679192" cy="475488"/>
+          </a:xfrm>
+          <a:prstGeom prst="rect">
+            <a:avLst/>
+          </a:prstGeom>
+          <a:noFill/>
+          <a:ln/>
+        </p:spPr>
+        <p:txBody>
+          <a:bodyPr wrap="square" lIns="0" tIns="0" rIns="0" bIns="0" rtlCol="0" anchor="ctr"/>
+          <a:lstStyle/>
+          <a:p>
+            <a:pPr algn="ctr" indent="0" marL="0">
+              <a:buNone/>
+            </a:pPr>
+            <a:r>
+              <a:rPr lang="en-US" sz="1200" b="1" dirty="0">
+                <a:solidFill>
+                  <a:srgbClr val="FFFFFF"/>
+                </a:solidFill>
+                <a:latin typeface="Meiryo" pitchFamily="34" charset="0"/>
+                <a:ea typeface="Meiryo" pitchFamily="34" charset="-122"/>
+                <a:cs typeface="Meiryo" pitchFamily="34" charset="-120"/>
+              </a:rPr>
+              <a:t>① 目標の合理性</a:t>
+            </a:r>
+            <a:endParaRPr lang="en-US" sz="1200" dirty="0"/>
+          </a:p>
+        </p:txBody>
+      </p:sp>
+      <p:sp>
+        <p:nvSpPr>
+          <p:cNvPr id="14" name="Text 12"/>
+          <p:cNvSpPr txBox="1"/>
+          <p:nvPr/>
+        </p:nvSpPr>
+        <p:spPr>
+          <a:xfrm>
+            <a:off x="420624" y="2615184"/>
+            <a:ext cx="2496312" cy="2825496"/>
+          </a:xfrm>
+          <a:prstGeom prst="rect">
+            <a:avLst/>
+          </a:prstGeom>
+          <a:noFill/>
+          <a:ln/>
+        </p:spPr>
+        <p:txBody>
+          <a:bodyPr wrap="square" lIns="0" tIns="0" rIns="0" bIns="0" rtlCol="0" anchor="t"/>
+          <a:lstStyle/>
+          <a:p>
+            <a:pPr marL="177800" indent="-177800">
+              <a:lnSpc>
+                <a:spcPct val="100000"/>
+              </a:lnSpc>
+              <a:spcAft>
+                <a:spcPts val="600"/>
+              </a:spcAft>
+              <a:buSzPct val="100000"/>
+              <a:buChar char="•"/>
+            </a:pPr>
+            <a:r>
+              <a:rPr lang="en-US" sz="930" dirty="0">
+                <a:solidFill>
+                  <a:srgbClr val="333333"/>
+                </a:solidFill>
+                <a:latin typeface="Meiryo" pitchFamily="34" charset="0"/>
+                <a:ea typeface="Meiryo" pitchFamily="34" charset="-122"/>
+                <a:cs typeface="Meiryo" pitchFamily="34" charset="-120"/>
+              </a:rPr>
+              <a:t>30%通説：DX推進人材が組織の約3割を超えると変革が自走する</a:t>
+            </a:r>
+            <a:endParaRPr lang="en-US" sz="930" dirty="0"/>
+          </a:p>
+          <a:p>
+            <a:pPr marL="177800" indent="-177800">
+              <a:lnSpc>
+                <a:spcPct val="100000"/>
+              </a:lnSpc>
+              <a:spcAft>
+                <a:spcPts val="600"/>
+              </a:spcAft>
+              <a:buSzPct val="100000"/>
+              <a:buChar char="•"/>
+            </a:pPr>
+            <a:r>
+              <a:rPr lang="en-US" sz="930" dirty="0">
+                <a:solidFill>
+                  <a:srgbClr val="333333"/>
+                </a:solidFill>
+                <a:latin typeface="Meiryo" pitchFamily="34" charset="0"/>
+                <a:ea typeface="Meiryo" pitchFamily="34" charset="-122"/>
+                <a:cs typeface="Meiryo" pitchFamily="34" charset="-120"/>
+              </a:rPr>
+              <a:t>公表計画：2026年度までに約30%＝1,000名を育成（当社公表）</a:t>
+            </a:r>
+            <a:endParaRPr lang="en-US" sz="930" dirty="0"/>
+          </a:p>
+          <a:p>
+            <a:pPr marL="177800" indent="-177800">
+              <a:lnSpc>
+                <a:spcPct val="100000"/>
+              </a:lnSpc>
+              <a:spcAft>
+                <a:spcPts val="600"/>
+              </a:spcAft>
+              <a:buSzPct val="100000"/>
+              <a:buChar char="•"/>
+            </a:pPr>
+            <a:r>
+              <a:rPr lang="en-US" sz="930" dirty="0">
+                <a:solidFill>
+                  <a:srgbClr val="333333"/>
+                </a:solidFill>
+                <a:latin typeface="Meiryo" pitchFamily="34" charset="0"/>
+                <a:ea typeface="Meiryo" pitchFamily="34" charset="-122"/>
+                <a:cs typeface="Meiryo" pitchFamily="34" charset="-120"/>
+              </a:rPr>
+              <a:t>先進企業も全社型育成を制度化（花王・キリン 等）と整合</a:t>
+            </a:r>
+            <a:endParaRPr lang="en-US" sz="930" dirty="0"/>
+          </a:p>
+        </p:txBody>
+      </p:sp>
+      <p:sp>
+        <p:nvSpPr>
+          <p:cNvPr id="15" name="Shape 13"/>
+          <p:cNvSpPr/>
+          <p:nvPr/>
+        </p:nvSpPr>
+        <p:spPr>
+          <a:xfrm>
+            <a:off x="3136392" y="2011680"/>
+            <a:ext cx="2770632" cy="3566160"/>
+          </a:xfrm>
+          <a:prstGeom prst="rect">
+            <a:avLst/>
+          </a:prstGeom>
+          <a:solidFill>
+            <a:srgbClr val="FFFFFF"/>
+          </a:solidFill>
+          <a:ln w="9525">
+            <a:solidFill>
+              <a:srgbClr val="D7DBD9"/>
+            </a:solidFill>
+            <a:prstDash val="solid"/>
+          </a:ln>
+        </p:spPr>
+      </p:sp>
+      <p:sp>
+        <p:nvSpPr>
+          <p:cNvPr id="16" name="Shape 14"/>
+          <p:cNvSpPr/>
+          <p:nvPr/>
+        </p:nvSpPr>
+        <p:spPr>
+          <a:xfrm>
+            <a:off x="3136392" y="2011680"/>
+            <a:ext cx="2770632" cy="475488"/>
+          </a:xfrm>
+          <a:prstGeom prst="rect">
+            <a:avLst/>
+          </a:prstGeom>
+          <a:solidFill>
+            <a:srgbClr val="369E51"/>
+          </a:solidFill>
+          <a:ln/>
+        </p:spPr>
+      </p:sp>
+      <p:sp>
+        <p:nvSpPr>
+          <p:cNvPr id="17" name="Text 15"/>
+          <p:cNvSpPr txBox="1"/>
+          <p:nvPr/>
+        </p:nvSpPr>
+        <p:spPr>
+          <a:xfrm>
+            <a:off x="3182112" y="2011680"/>
+            <a:ext cx="2679192" cy="475488"/>
+          </a:xfrm>
+          <a:prstGeom prst="rect">
+            <a:avLst/>
+          </a:prstGeom>
+          <a:noFill/>
+          <a:ln/>
+        </p:spPr>
+        <p:txBody>
+          <a:bodyPr wrap="square" lIns="0" tIns="0" rIns="0" bIns="0" rtlCol="0" anchor="ctr"/>
+          <a:lstStyle/>
+          <a:p>
+            <a:pPr algn="ctr" indent="0" marL="0">
+              <a:buNone/>
+            </a:pPr>
+            <a:r>
+              <a:rPr lang="en-US" sz="1200" b="1" dirty="0">
+                <a:solidFill>
+                  <a:srgbClr val="FFFFFF"/>
+                </a:solidFill>
+                <a:latin typeface="Meiryo" pitchFamily="34" charset="0"/>
+                <a:ea typeface="Meiryo" pitchFamily="34" charset="-122"/>
+                <a:cs typeface="Meiryo" pitchFamily="34" charset="-120"/>
+              </a:rPr>
+              <a:t>② 測定の厳格性</a:t>
+            </a:r>
+            <a:endParaRPr lang="en-US" sz="1200" dirty="0"/>
+          </a:p>
+        </p:txBody>
+      </p:sp>
+      <p:sp>
+        <p:nvSpPr>
+          <p:cNvPr id="18" name="Text 16"/>
+          <p:cNvSpPr txBox="1"/>
+          <p:nvPr/>
+        </p:nvSpPr>
+        <p:spPr>
+          <a:xfrm>
+            <a:off x="3282696" y="2615184"/>
+            <a:ext cx="2496312" cy="2825496"/>
+          </a:xfrm>
+          <a:prstGeom prst="rect">
+            <a:avLst/>
+          </a:prstGeom>
+          <a:noFill/>
+          <a:ln/>
+        </p:spPr>
+        <p:txBody>
+          <a:bodyPr wrap="square" lIns="0" tIns="0" rIns="0" bIns="0" rtlCol="0" anchor="t"/>
+          <a:lstStyle/>
+          <a:p>
+            <a:pPr marL="177800" indent="-177800">
+              <a:lnSpc>
+                <a:spcPct val="100000"/>
+              </a:lnSpc>
+              <a:spcAft>
+                <a:spcPts val="600"/>
+              </a:spcAft>
+              <a:buSzPct val="100000"/>
+              <a:buChar char="•"/>
+            </a:pPr>
+            <a:r>
+              <a:rPr lang="en-US" sz="930" dirty="0">
+                <a:solidFill>
+                  <a:srgbClr val="333333"/>
+                </a:solidFill>
+                <a:latin typeface="Meiryo" pitchFamily="34" charset="0"/>
+                <a:ea typeface="Meiryo" pitchFamily="34" charset="-122"/>
+                <a:cs typeface="Meiryo" pitchFamily="34" charset="-120"/>
+              </a:rPr>
+              <a:t>経産省スキル標準準拠の独自定義：5カテゴリ・19ロール・57スキル</a:t>
+            </a:r>
+            <a:endParaRPr lang="en-US" sz="930" dirty="0"/>
+          </a:p>
+          <a:p>
+            <a:pPr marL="177800" indent="-177800">
+              <a:lnSpc>
+                <a:spcPct val="100000"/>
+              </a:lnSpc>
+              <a:spcAft>
+                <a:spcPts val="600"/>
+              </a:spcAft>
+              <a:buSzPct val="100000"/>
+              <a:buChar char="•"/>
+            </a:pPr>
+            <a:r>
+              <a:rPr lang="en-US" sz="930" dirty="0">
+                <a:solidFill>
+                  <a:srgbClr val="333333"/>
+                </a:solidFill>
+                <a:latin typeface="Meiryo" pitchFamily="34" charset="0"/>
+                <a:ea typeface="Meiryo" pitchFamily="34" charset="-122"/>
+                <a:cs typeface="Meiryo" pitchFamily="34" charset="-120"/>
+              </a:rPr>
+              <a:t>判定はP2＝自走可否ライン。研修受講数でなくスキル保有で測定</a:t>
+            </a:r>
+            <a:endParaRPr lang="en-US" sz="930" dirty="0"/>
+          </a:p>
+          <a:p>
+            <a:pPr marL="177800" indent="-177800">
+              <a:lnSpc>
+                <a:spcPct val="100000"/>
+              </a:lnSpc>
+              <a:spcAft>
+                <a:spcPts val="600"/>
+              </a:spcAft>
+              <a:buSzPct val="100000"/>
+              <a:buChar char="•"/>
+            </a:pPr>
+            <a:r>
+              <a:rPr lang="en-US" sz="930" dirty="0">
+                <a:solidFill>
+                  <a:srgbClr val="333333"/>
+                </a:solidFill>
+                <a:latin typeface="Meiryo" pitchFamily="34" charset="0"/>
+                <a:ea typeface="Meiryo" pitchFamily="34" charset="-122"/>
+                <a:cs typeface="Meiryo" pitchFamily="34" charset="-120"/>
+              </a:rPr>
+              <a:t>基礎の過半数＋専門複数領域＋重点ロール適合の多重条件で判定</a:t>
+            </a:r>
+            <a:endParaRPr lang="en-US" sz="930" dirty="0"/>
+          </a:p>
+        </p:txBody>
+      </p:sp>
+      <p:sp>
+        <p:nvSpPr>
+          <p:cNvPr id="19" name="Shape 17"/>
+          <p:cNvSpPr/>
+          <p:nvPr/>
+        </p:nvSpPr>
+        <p:spPr>
+          <a:xfrm>
+            <a:off x="5998464" y="2011680"/>
+            <a:ext cx="2770632" cy="3566160"/>
+          </a:xfrm>
+          <a:prstGeom prst="rect">
+            <a:avLst/>
+          </a:prstGeom>
+          <a:solidFill>
+            <a:srgbClr val="FFFFFF"/>
+          </a:solidFill>
+          <a:ln w="9525">
+            <a:solidFill>
+              <a:srgbClr val="D7DBD9"/>
+            </a:solidFill>
+            <a:prstDash val="solid"/>
+          </a:ln>
+        </p:spPr>
+      </p:sp>
+      <p:sp>
+        <p:nvSpPr>
+          <p:cNvPr id="20" name="Shape 18"/>
+          <p:cNvSpPr/>
+          <p:nvPr/>
+        </p:nvSpPr>
+        <p:spPr>
+          <a:xfrm>
+            <a:off x="5998464" y="2011680"/>
+            <a:ext cx="2770632" cy="475488"/>
+          </a:xfrm>
+          <a:prstGeom prst="rect">
+            <a:avLst/>
+          </a:prstGeom>
+          <a:solidFill>
+            <a:srgbClr val="369E51"/>
+          </a:solidFill>
+          <a:ln/>
+        </p:spPr>
+      </p:sp>
+      <p:sp>
+        <p:nvSpPr>
+          <p:cNvPr id="21" name="Text 19"/>
+          <p:cNvSpPr txBox="1"/>
+          <p:nvPr/>
+        </p:nvSpPr>
+        <p:spPr>
+          <a:xfrm>
+            <a:off x="6044184" y="2011680"/>
+            <a:ext cx="2679192" cy="475488"/>
+          </a:xfrm>
+          <a:prstGeom prst="rect">
+            <a:avLst/>
+          </a:prstGeom>
+          <a:noFill/>
+          <a:ln/>
+        </p:spPr>
+        <p:txBody>
+          <a:bodyPr wrap="square" lIns="0" tIns="0" rIns="0" bIns="0" rtlCol="0" anchor="ctr"/>
+          <a:lstStyle/>
+          <a:p>
+            <a:pPr algn="ctr" indent="0" marL="0">
+              <a:buNone/>
+            </a:pPr>
+            <a:r>
+              <a:rPr lang="en-US" sz="1200" b="1" dirty="0">
+                <a:solidFill>
+                  <a:srgbClr val="FFFFFF"/>
+                </a:solidFill>
+                <a:latin typeface="Meiryo" pitchFamily="34" charset="0"/>
+                <a:ea typeface="Meiryo" pitchFamily="34" charset="-122"/>
+                <a:cs typeface="Meiryo" pitchFamily="34" charset="-120"/>
+              </a:rPr>
+              <a:t>③ 達成状況</a:t>
+            </a:r>
+            <a:endParaRPr lang="en-US" sz="1200" dirty="0"/>
+          </a:p>
+        </p:txBody>
+      </p:sp>
+      <p:sp>
+        <p:nvSpPr>
+          <p:cNvPr id="22" name="Shape 20"/>
+          <p:cNvSpPr/>
+          <p:nvPr/>
+        </p:nvSpPr>
+        <p:spPr>
+          <a:xfrm>
+            <a:off x="6144768" y="2615184"/>
+            <a:ext cx="2478024" cy="786384"/>
+          </a:xfrm>
+          <a:prstGeom prst="rect">
+            <a:avLst/>
+          </a:prstGeom>
+          <a:solidFill>
+            <a:srgbClr val="EAF6EE"/>
+          </a:solidFill>
+          <a:ln/>
+        </p:spPr>
+      </p:sp>
+      <p:sp>
+        <p:nvSpPr>
+          <p:cNvPr id="23" name="Text 21"/>
+          <p:cNvSpPr txBox="1"/>
+          <p:nvPr/>
+        </p:nvSpPr>
+        <p:spPr>
+          <a:xfrm>
+            <a:off x="6144768" y="2670048"/>
+            <a:ext cx="2478024" cy="457200"/>
+          </a:xfrm>
+          <a:prstGeom prst="rect">
+            <a:avLst/>
+          </a:prstGeom>
+          <a:noFill/>
+          <a:ln/>
+        </p:spPr>
+        <p:txBody>
+          <a:bodyPr wrap="square" lIns="0" tIns="0" rIns="0" bIns="0" rtlCol="0" anchor="ctr"/>
+          <a:lstStyle/>
+          <a:p>
+            <a:pPr algn="ctr" indent="0" marL="0">
+              <a:buNone/>
+            </a:pPr>
+            <a:r>
+              <a:rPr lang="en-US" sz="1700" b="1" dirty="0">
+                <a:solidFill>
+                  <a:srgbClr val="276B3C"/>
+                </a:solidFill>
+                <a:latin typeface="Meiryo" pitchFamily="34" charset="0"/>
+                <a:ea typeface="Meiryo" pitchFamily="34" charset="-122"/>
+                <a:cs typeface="Meiryo" pitchFamily="34" charset="-120"/>
+              </a:rPr>
+              <a:t>1,190名 / 35.1%</a:t>
+            </a:r>
+            <a:endParaRPr lang="en-US" sz="1700" dirty="0"/>
+          </a:p>
+        </p:txBody>
+      </p:sp>
+      <p:sp>
+        <p:nvSpPr>
+          <p:cNvPr id="24" name="Text 22"/>
+          <p:cNvSpPr txBox="1"/>
+          <p:nvPr/>
+        </p:nvSpPr>
+        <p:spPr>
+          <a:xfrm>
+            <a:off x="6144768" y="3108960"/>
+            <a:ext cx="2478024" cy="274320"/>
+          </a:xfrm>
+          <a:prstGeom prst="rect">
+            <a:avLst/>
+          </a:prstGeom>
+          <a:noFill/>
+          <a:ln/>
+        </p:spPr>
+        <p:txBody>
+          <a:bodyPr wrap="square" lIns="0" tIns="0" rIns="0" bIns="0" rtlCol="0" anchor="ctr"/>
+          <a:lstStyle/>
+          <a:p>
+            <a:pPr algn="ctr" indent="0" marL="0">
+              <a:buNone/>
+            </a:pPr>
+            <a:r>
+              <a:rPr lang="en-US" sz="1000" b="1" dirty="0">
+                <a:solidFill>
+                  <a:srgbClr val="333333"/>
+                </a:solidFill>
+                <a:latin typeface="Meiryo" pitchFamily="34" charset="0"/>
+                <a:ea typeface="Meiryo" pitchFamily="34" charset="-122"/>
+                <a:cs typeface="Meiryo" pitchFamily="34" charset="-120"/>
+              </a:rPr>
+              <a:t>計画1,000名比 ＋19%</a:t>
+            </a:r>
+            <a:endParaRPr lang="en-US" sz="1000" dirty="0"/>
+          </a:p>
+        </p:txBody>
+      </p:sp>
+      <p:sp>
+        <p:nvSpPr>
+          <p:cNvPr id="25" name="Text 23"/>
+          <p:cNvSpPr txBox="1"/>
+          <p:nvPr/>
+        </p:nvSpPr>
+        <p:spPr>
+          <a:xfrm>
+            <a:off x="6144768" y="3529584"/>
+            <a:ext cx="2496312" cy="1911096"/>
+          </a:xfrm>
+          <a:prstGeom prst="rect">
+            <a:avLst/>
+          </a:prstGeom>
+          <a:noFill/>
+          <a:ln/>
+        </p:spPr>
+        <p:txBody>
+          <a:bodyPr wrap="square" lIns="0" tIns="0" rIns="0" bIns="0" rtlCol="0" anchor="t"/>
+          <a:lstStyle/>
+          <a:p>
+            <a:pPr marL="177800" indent="-177800">
+              <a:lnSpc>
+                <a:spcPct val="100000"/>
+              </a:lnSpc>
+              <a:spcAft>
+                <a:spcPts val="600"/>
+              </a:spcAft>
+              <a:buSzPct val="100000"/>
+              <a:buChar char="•"/>
+            </a:pPr>
+            <a:r>
+              <a:rPr lang="en-US" sz="930" dirty="0">
+                <a:solidFill>
+                  <a:srgbClr val="333333"/>
+                </a:solidFill>
+                <a:latin typeface="Meiryo" pitchFamily="34" charset="0"/>
+                <a:ea typeface="Meiryo" pitchFamily="34" charset="-122"/>
+                <a:cs typeface="Meiryo" pitchFamily="34" charset="-120"/>
+              </a:rPr>
+              <a:t>悉皆測定：回答2,815名・回答率99.8%で網羅性が高い</a:t>
+            </a:r>
+            <a:endParaRPr lang="en-US" sz="930" dirty="0"/>
+          </a:p>
+          <a:p>
+            <a:pPr marL="177800" indent="-177800">
+              <a:lnSpc>
+                <a:spcPct val="100000"/>
+              </a:lnSpc>
+              <a:spcAft>
+                <a:spcPts val="600"/>
+              </a:spcAft>
+              <a:buSzPct val="100000"/>
+              <a:buChar char="•"/>
+            </a:pPr>
+            <a:r>
+              <a:rPr lang="en-US" sz="930" dirty="0">
+                <a:solidFill>
+                  <a:srgbClr val="333333"/>
+                </a:solidFill>
+                <a:latin typeface="Meiryo" pitchFamily="34" charset="0"/>
+                <a:ea typeface="Meiryo" pitchFamily="34" charset="-122"/>
+                <a:cs typeface="Meiryo" pitchFamily="34" charset="-120"/>
+              </a:rPr>
+              <a:t>1,000〜1,500名の運用幅の中で過度に緩めない中央の設定</a:t>
+            </a:r>
+            <a:endParaRPr lang="en-US" sz="930" dirty="0"/>
+          </a:p>
+          <a:p>
+            <a:pPr marL="177800" indent="-177800">
+              <a:lnSpc>
+                <a:spcPct val="100000"/>
+              </a:lnSpc>
+              <a:spcAft>
+                <a:spcPts val="600"/>
+              </a:spcAft>
+              <a:buSzPct val="100000"/>
+              <a:buChar char="•"/>
+            </a:pPr>
+            <a:r>
+              <a:rPr lang="en-US" sz="930" dirty="0">
+                <a:solidFill>
+                  <a:srgbClr val="333333"/>
+                </a:solidFill>
+                <a:latin typeface="Meiryo" pitchFamily="34" charset="0"/>
+                <a:ea typeface="Meiryo" pitchFamily="34" charset="-122"/>
+                <a:cs typeface="Meiryo" pitchFamily="34" charset="-120"/>
+              </a:rPr>
+              <a:t>次回以降も同一条件で再現測定し、増減を進捗として追う</a:t>
+            </a:r>
+            <a:endParaRPr lang="en-US" sz="930" dirty="0"/>
+          </a:p>
+        </p:txBody>
+      </p:sp>
+      <p:sp>
+        <p:nvSpPr>
+          <p:cNvPr id="26" name="Shape 24"/>
+          <p:cNvSpPr/>
+          <p:nvPr/>
+        </p:nvSpPr>
+        <p:spPr>
+          <a:xfrm>
+            <a:off x="8860536" y="2011680"/>
+            <a:ext cx="2770632" cy="3566160"/>
+          </a:xfrm>
+          <a:prstGeom prst="rect">
+            <a:avLst/>
+          </a:prstGeom>
+          <a:solidFill>
+            <a:srgbClr val="FFFFFF"/>
+          </a:solidFill>
+          <a:ln w="9525">
+            <a:solidFill>
+              <a:srgbClr val="D7DBD9"/>
+            </a:solidFill>
+            <a:prstDash val="solid"/>
+          </a:ln>
+        </p:spPr>
+      </p:sp>
+      <p:sp>
+        <p:nvSpPr>
+          <p:cNvPr id="27" name="Shape 25"/>
+          <p:cNvSpPr/>
+          <p:nvPr/>
+        </p:nvSpPr>
+        <p:spPr>
+          <a:xfrm>
+            <a:off x="8860536" y="2011680"/>
+            <a:ext cx="2770632" cy="475488"/>
+          </a:xfrm>
+          <a:prstGeom prst="rect">
+            <a:avLst/>
+          </a:prstGeom>
+          <a:solidFill>
+            <a:srgbClr val="369E51"/>
+          </a:solidFill>
+          <a:ln/>
+        </p:spPr>
+      </p:sp>
+      <p:sp>
+        <p:nvSpPr>
+          <p:cNvPr id="28" name="Text 26"/>
+          <p:cNvSpPr txBox="1"/>
+          <p:nvPr/>
+        </p:nvSpPr>
+        <p:spPr>
+          <a:xfrm>
+            <a:off x="8906256" y="2011680"/>
+            <a:ext cx="2679192" cy="475488"/>
+          </a:xfrm>
+          <a:prstGeom prst="rect">
+            <a:avLst/>
+          </a:prstGeom>
+          <a:noFill/>
+          <a:ln/>
+        </p:spPr>
+        <p:txBody>
+          <a:bodyPr wrap="square" lIns="0" tIns="0" rIns="0" bIns="0" rtlCol="0" anchor="ctr"/>
+          <a:lstStyle/>
+          <a:p>
+            <a:pPr algn="ctr" indent="0" marL="0">
+              <a:buNone/>
+            </a:pPr>
+            <a:r>
+              <a:rPr lang="en-US" sz="1200" b="1" dirty="0">
+                <a:solidFill>
+                  <a:srgbClr val="FFFFFF"/>
+                </a:solidFill>
+                <a:latin typeface="Meiryo" pitchFamily="34" charset="0"/>
+                <a:ea typeface="Meiryo" pitchFamily="34" charset="-122"/>
+                <a:cs typeface="Meiryo" pitchFamily="34" charset="-120"/>
+              </a:rPr>
+              <a:t>④ 保守性・ガバナンス</a:t>
+            </a:r>
+            <a:endParaRPr lang="en-US" sz="1200" dirty="0"/>
+          </a:p>
+        </p:txBody>
+      </p:sp>
+      <p:sp>
+        <p:nvSpPr>
+          <p:cNvPr id="29" name="Text 27"/>
+          <p:cNvSpPr txBox="1"/>
+          <p:nvPr/>
+        </p:nvSpPr>
+        <p:spPr>
+          <a:xfrm>
+            <a:off x="9006840" y="2615184"/>
+            <a:ext cx="2496312" cy="2825496"/>
+          </a:xfrm>
+          <a:prstGeom prst="rect">
+            <a:avLst/>
+          </a:prstGeom>
+          <a:noFill/>
+          <a:ln/>
+        </p:spPr>
+        <p:txBody>
+          <a:bodyPr wrap="square" lIns="0" tIns="0" rIns="0" bIns="0" rtlCol="0" anchor="t"/>
+          <a:lstStyle/>
+          <a:p>
+            <a:pPr marL="177800" indent="-177800">
+              <a:lnSpc>
+                <a:spcPct val="100000"/>
+              </a:lnSpc>
+              <a:spcAft>
+                <a:spcPts val="600"/>
+              </a:spcAft>
+              <a:buSzPct val="100000"/>
+              <a:buChar char="•"/>
+            </a:pPr>
+            <a:r>
+              <a:rPr lang="en-US" sz="930" dirty="0">
+                <a:solidFill>
+                  <a:srgbClr val="333333"/>
+                </a:solidFill>
+                <a:latin typeface="Meiryo" pitchFamily="34" charset="0"/>
+                <a:ea typeface="Meiryo" pitchFamily="34" charset="-122"/>
+                <a:cs typeface="Meiryo" pitchFamily="34" charset="-120"/>
+              </a:rPr>
+              <a:t>現状は本人評価のみ＝むしろ控えめ。360度（上長）評価を導入予定</a:t>
+            </a:r>
+            <a:endParaRPr lang="en-US" sz="930" dirty="0"/>
+          </a:p>
+          <a:p>
+            <a:pPr marL="177800" indent="-177800">
+              <a:lnSpc>
+                <a:spcPct val="100000"/>
+              </a:lnSpc>
+              <a:spcAft>
+                <a:spcPts val="600"/>
+              </a:spcAft>
+              <a:buSzPct val="100000"/>
+              <a:buChar char="•"/>
+            </a:pPr>
+            <a:r>
+              <a:rPr lang="en-US" sz="930" dirty="0">
+                <a:solidFill>
+                  <a:srgbClr val="333333"/>
+                </a:solidFill>
+                <a:latin typeface="Meiryo" pitchFamily="34" charset="0"/>
+                <a:ea typeface="Meiryo" pitchFamily="34" charset="-122"/>
+                <a:cs typeface="Meiryo" pitchFamily="34" charset="-120"/>
+              </a:rPr>
+              <a:t>重点ロール適合を課し、単一スキルでの数値混入を防止</a:t>
+            </a:r>
+            <a:endParaRPr lang="en-US" sz="930" dirty="0"/>
+          </a:p>
+          <a:p>
+            <a:pPr marL="177800" indent="-177800">
+              <a:lnSpc>
+                <a:spcPct val="100000"/>
+              </a:lnSpc>
+              <a:spcAft>
+                <a:spcPts val="600"/>
+              </a:spcAft>
+              <a:buSzPct val="100000"/>
+              <a:buChar char="•"/>
+            </a:pPr>
+            <a:r>
+              <a:rPr lang="en-US" sz="930" dirty="0">
+                <a:solidFill>
+                  <a:srgbClr val="333333"/>
+                </a:solidFill>
+                <a:latin typeface="Meiryo" pitchFamily="34" charset="0"/>
+                <a:ea typeface="Meiryo" pitchFamily="34" charset="-122"/>
+                <a:cs typeface="Meiryo" pitchFamily="34" charset="-120"/>
+              </a:rPr>
+              <a:t>KPIをPL（工数削減・残業）に接続し成果まで追跡</a:t>
+            </a:r>
+            <a:endParaRPr lang="en-US" sz="930" dirty="0"/>
+          </a:p>
+        </p:txBody>
+      </p:sp>
+      <p:sp>
+        <p:nvSpPr>
+          <p:cNvPr id="30" name="Shape 28"/>
+          <p:cNvSpPr/>
+          <p:nvPr/>
+        </p:nvSpPr>
+        <p:spPr>
+          <a:xfrm>
+            <a:off x="274320" y="5760720"/>
+            <a:ext cx="11640312" cy="658368"/>
+          </a:xfrm>
+          <a:prstGeom prst="rect">
+            <a:avLst/>
+          </a:prstGeom>
+          <a:solidFill>
+            <a:srgbClr val="EAF6EE"/>
+          </a:solidFill>
+          <a:ln w="9525">
+            <a:solidFill>
+              <a:srgbClr val="369E51"/>
+            </a:solidFill>
+            <a:prstDash val="solid"/>
+          </a:ln>
+        </p:spPr>
+      </p:sp>
+      <p:sp>
+        <p:nvSpPr>
+          <p:cNvPr id="31" name="Shape 29"/>
+          <p:cNvSpPr/>
+          <p:nvPr/>
+        </p:nvSpPr>
+        <p:spPr>
+          <a:xfrm>
+            <a:off x="384048" y="5879592"/>
+            <a:ext cx="1371600" cy="310896"/>
+          </a:xfrm>
+          <a:prstGeom prst="roundRect">
+            <a:avLst>
+              <a:gd name="adj" fmla="val 14706"/>
+            </a:avLst>
+          </a:prstGeom>
+          <a:solidFill>
+            <a:srgbClr val="369E51"/>
+          </a:solidFill>
+          <a:ln/>
+        </p:spPr>
+      </p:sp>
+      <p:sp>
+        <p:nvSpPr>
+          <p:cNvPr id="32" name="Text 30"/>
+          <p:cNvSpPr txBox="1"/>
+          <p:nvPr/>
+        </p:nvSpPr>
+        <p:spPr>
+          <a:xfrm>
+            <a:off x="384048" y="5879592"/>
+            <a:ext cx="1371600" cy="310896"/>
+          </a:xfrm>
+          <a:prstGeom prst="rect">
+            <a:avLst/>
+          </a:prstGeom>
+          <a:noFill/>
+          <a:ln/>
+        </p:spPr>
+        <p:txBody>
+          <a:bodyPr wrap="square" lIns="0" tIns="0" rIns="0" bIns="0" rtlCol="0" anchor="ctr"/>
+          <a:lstStyle/>
+          <a:p>
+            <a:pPr algn="ctr" indent="0" marL="0">
+              <a:buNone/>
+            </a:pPr>
+            <a:r>
+              <a:rPr lang="en-US" sz="1100" b="1" dirty="0">
+                <a:solidFill>
+                  <a:srgbClr val="FFFFFF"/>
+                </a:solidFill>
+                <a:latin typeface="Meiryo" pitchFamily="34" charset="0"/>
+                <a:ea typeface="Meiryo" pitchFamily="34" charset="-122"/>
+                <a:cs typeface="Meiryo" pitchFamily="34" charset="-120"/>
+              </a:rPr>
+              <a:t>外部ベンチ</a:t>
+            </a:r>
+            <a:endParaRPr lang="en-US" sz="1100" dirty="0"/>
+          </a:p>
+        </p:txBody>
+      </p:sp>
+      <p:sp>
+        <p:nvSpPr>
+          <p:cNvPr id="33" name="Text 31"/>
+          <p:cNvSpPr txBox="1"/>
+          <p:nvPr/>
+        </p:nvSpPr>
+        <p:spPr>
+          <a:xfrm>
+            <a:off x="1874520" y="5760720"/>
+            <a:ext cx="9966960" cy="658368"/>
+          </a:xfrm>
+          <a:prstGeom prst="rect">
+            <a:avLst/>
+          </a:prstGeom>
+          <a:noFill/>
+          <a:ln/>
+        </p:spPr>
+        <p:txBody>
+          <a:bodyPr wrap="square" lIns="0" tIns="0" rIns="0" bIns="0" rtlCol="0" anchor="ctr"/>
+          <a:lstStyle/>
+          <a:p>
+            <a:pPr indent="0" marL="0">
+              <a:lnSpc>
+                <a:spcPct val="98000"/>
+              </a:lnSpc>
+              <a:buNone/>
+            </a:pPr>
+            <a:r>
+              <a:rPr lang="en-US" sz="930" dirty="0">
+                <a:solidFill>
+                  <a:srgbClr val="333333"/>
+                </a:solidFill>
+                <a:latin typeface="Meiryo" pitchFamily="34" charset="0"/>
+                <a:ea typeface="Meiryo" pitchFamily="34" charset="-122"/>
+                <a:cs typeface="Meiryo" pitchFamily="34" charset="-120"/>
+              </a:rPr>
+              <a:t>花王 AI Academy 1万人修了／キリン DX道場5,100名・AI業務代替率10%／ユニ・チャーム 昇進要件化／味の素 個人目標連動。当社の「約30%育成」は先進企業の全社型育成と水準が整合</a:t>
+            </a:r>
+            <a:endParaRPr lang="en-US" sz="930" dirty="0"/>
+          </a:p>
+        </p:txBody>
+      </p:sp>
+      <p:sp>
+        <p:nvSpPr>
+          <p:cNvPr id="34" name="Text 32"/>
+          <p:cNvSpPr txBox="1"/>
+          <p:nvPr/>
+        </p:nvSpPr>
+        <p:spPr>
+          <a:xfrm>
+            <a:off x="11841480" y="6510528"/>
+            <a:ext cx="274320" cy="274320"/>
+          </a:xfrm>
+          <a:prstGeom prst="rect">
+            <a:avLst/>
+          </a:prstGeom>
+          <a:noFill/>
+          <a:ln/>
+        </p:spPr>
+        <p:txBody>
+          <a:bodyPr wrap="square" lIns="0" tIns="0" rIns="0" bIns="0" rtlCol="0" anchor="ctr"/>
+          <a:lstStyle/>
+          <a:p>
+            <a:pPr algn="r" indent="0" marL="0">
+              <a:buNone/>
+            </a:pPr>
+            <a:r>
+              <a:rPr lang="en-US" sz="1100" dirty="0">
+                <a:solidFill>
+                  <a:srgbClr val="7A7F7C"/>
+                </a:solidFill>
+                <a:latin typeface="Meiryo" pitchFamily="34" charset="0"/>
+                <a:ea typeface="Meiryo" pitchFamily="34" charset="-122"/>
+                <a:cs typeface="Meiryo" pitchFamily="34" charset="-120"/>
+              </a:rPr>
+              <a:t>9</a:t>
             </a:r>
             <a:endParaRPr lang="en-US" sz="1100" dirty="0"/>
           </a:p>

--- a/スキルチェック_1000名フィルタリング条件.pptx
+++ b/スキルチェック_1000名フィルタリング条件.pptx
@@ -1357,7 +1357,7 @@
         <p:spPr>
           <a:xfrm>
             <a:off x="274320" y="2011680"/>
-            <a:ext cx="6720840" cy="365760"/>
+            <a:ext cx="11640312" cy="365760"/>
           </a:xfrm>
           <a:prstGeom prst="rect">
             <a:avLst/>
@@ -1377,7 +1377,7 @@
         <p:spPr>
           <a:xfrm>
             <a:off x="365760" y="2011680"/>
-            <a:ext cx="6537960" cy="365760"/>
+            <a:ext cx="11457432" cy="365760"/>
           </a:xfrm>
           <a:prstGeom prst="rect">
             <a:avLst/>
@@ -1401,7 +1401,7 @@
                 <a:ea typeface="Meiryo" pitchFamily="34" charset="-122"/>
                 <a:cs typeface="Meiryo" pitchFamily="34" charset="-120"/>
               </a:rPr>
-              <a:t>絞り込みファネル（回答者 N＝3,395名）</a:t>
+              <a:t>絞り込みファネル：上から条件を重ねて「デジタル活用人材」を特定（回答者 N＝3,395名）</a:t>
             </a:r>
             <a:endParaRPr lang="en-US" sz="1250" dirty="0"/>
           </a:p>
@@ -1415,14 +1415,14 @@
         </p:nvSpPr>
         <p:spPr>
           <a:xfrm>
-            <a:off x="457200" y="2377440"/>
-            <a:ext cx="4206240" cy="530352"/>
-          </a:xfrm>
-          <a:prstGeom prst="rect">
-            <a:avLst/>
-          </a:prstGeom>
-          <a:solidFill>
-            <a:srgbClr val="BFE3CC"/>
+            <a:off x="320040" y="2542032"/>
+            <a:ext cx="310896" cy="310896"/>
+          </a:xfrm>
+          <a:prstGeom prst="ellipse">
+            <a:avLst/>
+          </a:prstGeom>
+          <a:solidFill>
+            <a:srgbClr val="369E51"/>
           </a:solidFill>
           <a:ln/>
         </p:spPr>
@@ -1435,8 +1435,47 @@
         </p:nvSpPr>
         <p:spPr>
           <a:xfrm>
-            <a:off x="585216" y="2404872"/>
-            <a:ext cx="3950208" cy="301752"/>
+            <a:off x="320040" y="2542032"/>
+            <a:ext cx="310896" cy="310896"/>
+          </a:xfrm>
+          <a:prstGeom prst="rect">
+            <a:avLst/>
+          </a:prstGeom>
+          <a:noFill/>
+          <a:ln/>
+        </p:spPr>
+        <p:txBody>
+          <a:bodyPr wrap="square" lIns="0" tIns="0" rIns="0" bIns="0" rtlCol="0" anchor="ctr"/>
+          <a:lstStyle/>
+          <a:p>
+            <a:pPr algn="ctr" indent="0" marL="0">
+              <a:buNone/>
+            </a:pPr>
+            <a:r>
+              <a:rPr lang="en-US" sz="1300" b="1" dirty="0">
+                <a:solidFill>
+                  <a:srgbClr val="FFFFFF"/>
+                </a:solidFill>
+                <a:latin typeface="Meiryo" pitchFamily="34" charset="0"/>
+                <a:ea typeface="Meiryo" pitchFamily="34" charset="-122"/>
+                <a:cs typeface="Meiryo" pitchFamily="34" charset="-120"/>
+              </a:rPr>
+              <a:t>① </a:t>
+            </a:r>
+            <a:endParaRPr lang="en-US" sz="1300" dirty="0"/>
+          </a:p>
+        </p:txBody>
+      </p:sp>
+      <p:sp>
+        <p:nvSpPr>
+          <p:cNvPr id="15" name="Text 13"/>
+          <p:cNvSpPr txBox="1"/>
+          <p:nvPr/>
+        </p:nvSpPr>
+        <p:spPr>
+          <a:xfrm>
+            <a:off x="731520" y="2478024"/>
+            <a:ext cx="3749040" cy="274320"/>
           </a:xfrm>
           <a:prstGeom prst="rect">
             <a:avLst/>
@@ -1452,7 +1491,7 @@
               <a:buNone/>
             </a:pPr>
             <a:r>
-              <a:rPr lang="en-US" sz="1050" b="1" dirty="0">
+              <a:rPr lang="en-US" sz="1150" b="1" dirty="0">
                 <a:solidFill>
                   <a:srgbClr val="333333"/>
                 </a:solidFill>
@@ -1460,22 +1499,22 @@
                 <a:ea typeface="Meiryo" pitchFamily="34" charset="-122"/>
                 <a:cs typeface="Meiryo" pitchFamily="34" charset="-120"/>
               </a:rPr>
-              <a:t>① 全回答者</a:t>
-            </a:r>
-            <a:endParaRPr lang="en-US" sz="1050" dirty="0"/>
-          </a:p>
-        </p:txBody>
-      </p:sp>
-      <p:sp>
-        <p:nvSpPr>
-          <p:cNvPr id="15" name="Text 13"/>
-          <p:cNvSpPr txBox="1"/>
-          <p:nvPr/>
-        </p:nvSpPr>
-        <p:spPr>
-          <a:xfrm>
-            <a:off x="585216" y="2679192"/>
-            <a:ext cx="3950208" cy="219456"/>
+              <a:t>全回答者</a:t>
+            </a:r>
+            <a:endParaRPr lang="en-US" sz="1150" dirty="0"/>
+          </a:p>
+        </p:txBody>
+      </p:sp>
+      <p:sp>
+        <p:nvSpPr>
+          <p:cNvPr id="16" name="Text 14"/>
+          <p:cNvSpPr txBox="1"/>
+          <p:nvPr/>
+        </p:nvSpPr>
+        <p:spPr>
+          <a:xfrm>
+            <a:off x="731520" y="2724912"/>
+            <a:ext cx="3840480" cy="219456"/>
           </a:xfrm>
           <a:prstGeom prst="rect">
             <a:avLst/>
@@ -1491,7 +1530,66 @@
               <a:buNone/>
             </a:pPr>
             <a:r>
-              <a:rPr lang="en-US" sz="850" dirty="0">
+              <a:rPr lang="en-US" sz="900" dirty="0">
+                <a:solidFill>
+                  <a:srgbClr val="7A7F7C"/>
+                </a:solidFill>
+                <a:latin typeface="Meiryo" pitchFamily="34" charset="0"/>
+                <a:ea typeface="Meiryo" pitchFamily="34" charset="-122"/>
+                <a:cs typeface="Meiryo" pitchFamily="34" charset="-120"/>
+              </a:rPr>
+              <a:t>スキルチェック回答者全員</a:t>
+            </a:r>
+            <a:endParaRPr lang="en-US" sz="900" dirty="0"/>
+          </a:p>
+        </p:txBody>
+      </p:sp>
+      <p:sp>
+        <p:nvSpPr>
+          <p:cNvPr id="17" name="Shape 15"/>
+          <p:cNvSpPr/>
+          <p:nvPr/>
+        </p:nvSpPr>
+        <p:spPr>
+          <a:xfrm>
+            <a:off x="4846320" y="2450592"/>
+            <a:ext cx="7040880" cy="493776"/>
+          </a:xfrm>
+          <a:prstGeom prst="rect">
+            <a:avLst/>
+          </a:prstGeom>
+          <a:solidFill>
+            <a:srgbClr val="C9E8D4"/>
+          </a:solidFill>
+          <a:ln/>
+        </p:spPr>
+      </p:sp>
+      <p:sp>
+        <p:nvSpPr>
+          <p:cNvPr id="18" name="Text 16"/>
+          <p:cNvSpPr txBox="1"/>
+          <p:nvPr/>
+        </p:nvSpPr>
+        <p:spPr>
+          <a:xfrm>
+            <a:off x="4846320" y="2450592"/>
+            <a:ext cx="7040880" cy="493776"/>
+          </a:xfrm>
+          <a:prstGeom prst="rect">
+            <a:avLst/>
+          </a:prstGeom>
+          <a:noFill/>
+          <a:ln/>
+        </p:spPr>
+        <p:txBody>
+          <a:bodyPr wrap="square" lIns="0" tIns="0" rIns="0" bIns="0" rtlCol="0" anchor="ctr"/>
+          <a:lstStyle/>
+          <a:p>
+            <a:pPr algn="ctr" indent="0" marL="0">
+              <a:buNone/>
+            </a:pPr>
+            <a:r>
+              <a:rPr lang="en-US" sz="1500" b="1" dirty="0">
                 <a:solidFill>
                   <a:srgbClr val="333333"/>
                 </a:solidFill>
@@ -1499,41 +1597,1051 @@
                 <a:ea typeface="Meiryo" pitchFamily="34" charset="-122"/>
                 <a:cs typeface="Meiryo" pitchFamily="34" charset="-120"/>
               </a:rPr>
-              <a:t>スキルチェック回答者全員</a:t>
-            </a:r>
-            <a:endParaRPr lang="en-US" sz="850" dirty="0"/>
-          </a:p>
-        </p:txBody>
-      </p:sp>
-      <p:sp>
-        <p:nvSpPr>
-          <p:cNvPr id="16" name="Text 14"/>
-          <p:cNvSpPr txBox="1"/>
-          <p:nvPr/>
-        </p:nvSpPr>
-        <p:spPr>
-          <a:xfrm>
-            <a:off x="5074920" y="2377440"/>
-            <a:ext cx="1828800" cy="530352"/>
-          </a:xfrm>
-          <a:prstGeom prst="rect">
-            <a:avLst/>
-          </a:prstGeom>
-          <a:noFill/>
-          <a:ln/>
-        </p:spPr>
-        <p:txBody>
-          <a:bodyPr wrap="square" lIns="0" tIns="0" rIns="0" bIns="0" rtlCol="0" anchor="ctr"/>
-          <a:lstStyle/>
-          <a:p>
-            <a:pPr algn="l" indent="0" marL="0">
+              <a:t>3,395名</a:t>
+            </a:r>
+            <a:pPr algn="ctr" indent="0" marL="0">
+              <a:buNone/>
+            </a:pPr>
+            <a:r>
+              <a:rPr lang="en-US" sz="1100" dirty="0">
+                <a:solidFill>
+                  <a:srgbClr val="333333"/>
+                </a:solidFill>
+                <a:latin typeface="Meiryo" pitchFamily="34" charset="0"/>
+                <a:ea typeface="Meiryo" pitchFamily="34" charset="-122"/>
+                <a:cs typeface="Meiryo" pitchFamily="34" charset="-120"/>
+              </a:rPr>
+              <a:t>  100%</a:t>
+            </a:r>
+            <a:endParaRPr lang="en-US" sz="1500" dirty="0"/>
+          </a:p>
+        </p:txBody>
+      </p:sp>
+      <p:sp>
+        <p:nvSpPr>
+          <p:cNvPr id="19" name="Text 17"/>
+          <p:cNvSpPr txBox="1"/>
+          <p:nvPr/>
+        </p:nvSpPr>
+        <p:spPr>
+          <a:xfrm>
+            <a:off x="6537960" y="2930652"/>
+            <a:ext cx="3657600" cy="201168"/>
+          </a:xfrm>
+          <a:prstGeom prst="rect">
+            <a:avLst/>
+          </a:prstGeom>
+          <a:noFill/>
+          <a:ln/>
+        </p:spPr>
+        <p:txBody>
+          <a:bodyPr wrap="square" lIns="0" tIns="0" rIns="0" bIns="0" rtlCol="0" anchor="ctr"/>
+          <a:lstStyle/>
+          <a:p>
+            <a:pPr algn="ctr" indent="0" marL="0">
+              <a:buNone/>
+            </a:pPr>
+            <a:r>
+              <a:rPr lang="en-US" sz="900" dirty="0">
+                <a:solidFill>
+                  <a:srgbClr val="7A7F7C"/>
+                </a:solidFill>
+                <a:latin typeface="Meiryo" pitchFamily="34" charset="0"/>
+                <a:ea typeface="Meiryo" pitchFamily="34" charset="-122"/>
+                <a:cs typeface="Meiryo" pitchFamily="34" charset="-120"/>
+              </a:rPr>
+              <a:t>▼  −1,181名 を除外</a:t>
+            </a:r>
+            <a:endParaRPr lang="en-US" sz="900" dirty="0"/>
+          </a:p>
+        </p:txBody>
+      </p:sp>
+      <p:sp>
+        <p:nvSpPr>
+          <p:cNvPr id="20" name="Shape 18"/>
+          <p:cNvSpPr/>
+          <p:nvPr/>
+        </p:nvSpPr>
+        <p:spPr>
+          <a:xfrm>
+            <a:off x="320040" y="3236976"/>
+            <a:ext cx="310896" cy="310896"/>
+          </a:xfrm>
+          <a:prstGeom prst="ellipse">
+            <a:avLst/>
+          </a:prstGeom>
+          <a:solidFill>
+            <a:srgbClr val="369E51"/>
+          </a:solidFill>
+          <a:ln/>
+        </p:spPr>
+      </p:sp>
+      <p:sp>
+        <p:nvSpPr>
+          <p:cNvPr id="21" name="Text 19"/>
+          <p:cNvSpPr txBox="1"/>
+          <p:nvPr/>
+        </p:nvSpPr>
+        <p:spPr>
+          <a:xfrm>
+            <a:off x="320040" y="3236976"/>
+            <a:ext cx="310896" cy="310896"/>
+          </a:xfrm>
+          <a:prstGeom prst="rect">
+            <a:avLst/>
+          </a:prstGeom>
+          <a:noFill/>
+          <a:ln/>
+        </p:spPr>
+        <p:txBody>
+          <a:bodyPr wrap="square" lIns="0" tIns="0" rIns="0" bIns="0" rtlCol="0" anchor="ctr"/>
+          <a:lstStyle/>
+          <a:p>
+            <a:pPr algn="ctr" indent="0" marL="0">
+              <a:buNone/>
+            </a:pPr>
+            <a:r>
+              <a:rPr lang="en-US" sz="1300" b="1" dirty="0">
+                <a:solidFill>
+                  <a:srgbClr val="FFFFFF"/>
+                </a:solidFill>
+                <a:latin typeface="Meiryo" pitchFamily="34" charset="0"/>
+                <a:ea typeface="Meiryo" pitchFamily="34" charset="-122"/>
+                <a:cs typeface="Meiryo" pitchFamily="34" charset="-120"/>
+              </a:rPr>
+              <a:t>② </a:t>
+            </a:r>
+            <a:endParaRPr lang="en-US" sz="1300" dirty="0"/>
+          </a:p>
+        </p:txBody>
+      </p:sp>
+      <p:sp>
+        <p:nvSpPr>
+          <p:cNvPr id="22" name="Text 20"/>
+          <p:cNvSpPr txBox="1"/>
+          <p:nvPr/>
+        </p:nvSpPr>
+        <p:spPr>
+          <a:xfrm>
+            <a:off x="731520" y="3172968"/>
+            <a:ext cx="3749040" cy="274320"/>
+          </a:xfrm>
+          <a:prstGeom prst="rect">
+            <a:avLst/>
+          </a:prstGeom>
+          <a:noFill/>
+          <a:ln/>
+        </p:spPr>
+        <p:txBody>
+          <a:bodyPr wrap="square" lIns="0" tIns="0" rIns="0" bIns="0" rtlCol="0" anchor="ctr"/>
+          <a:lstStyle/>
+          <a:p>
+            <a:pPr indent="0" marL="0">
+              <a:buNone/>
+            </a:pPr>
+            <a:r>
+              <a:rPr lang="en-US" sz="1150" b="1" dirty="0">
+                <a:solidFill>
+                  <a:srgbClr val="333333"/>
+                </a:solidFill>
+                <a:latin typeface="Meiryo" pitchFamily="34" charset="0"/>
+                <a:ea typeface="Meiryo" pitchFamily="34" charset="-122"/>
+                <a:cs typeface="Meiryo" pitchFamily="34" charset="-120"/>
+              </a:rPr>
+              <a:t>デジタルの基礎がある</a:t>
+            </a:r>
+            <a:endParaRPr lang="en-US" sz="1150" dirty="0"/>
+          </a:p>
+        </p:txBody>
+      </p:sp>
+      <p:sp>
+        <p:nvSpPr>
+          <p:cNvPr id="23" name="Text 21"/>
+          <p:cNvSpPr txBox="1"/>
+          <p:nvPr/>
+        </p:nvSpPr>
+        <p:spPr>
+          <a:xfrm>
+            <a:off x="731520" y="3419856"/>
+            <a:ext cx="3840480" cy="219456"/>
+          </a:xfrm>
+          <a:prstGeom prst="rect">
+            <a:avLst/>
+          </a:prstGeom>
+          <a:noFill/>
+          <a:ln/>
+        </p:spPr>
+        <p:txBody>
+          <a:bodyPr wrap="square" lIns="0" tIns="0" rIns="0" bIns="0" rtlCol="0" anchor="ctr"/>
+          <a:lstStyle/>
+          <a:p>
+            <a:pPr indent="0" marL="0">
+              <a:buNone/>
+            </a:pPr>
+            <a:r>
+              <a:rPr lang="en-US" sz="900" dirty="0">
+                <a:solidFill>
+                  <a:srgbClr val="7A7F7C"/>
+                </a:solidFill>
+                <a:latin typeface="Meiryo" pitchFamily="34" charset="0"/>
+                <a:ea typeface="Meiryo" pitchFamily="34" charset="-122"/>
+                <a:cs typeface="Meiryo" pitchFamily="34" charset="-120"/>
+              </a:rPr>
+              <a:t>基礎スキルの過半数（P2以上 ×8個）</a:t>
+            </a:r>
+            <a:endParaRPr lang="en-US" sz="900" dirty="0"/>
+          </a:p>
+        </p:txBody>
+      </p:sp>
+      <p:sp>
+        <p:nvSpPr>
+          <p:cNvPr id="24" name="Shape 22"/>
+          <p:cNvSpPr/>
+          <p:nvPr/>
+        </p:nvSpPr>
+        <p:spPr>
+          <a:xfrm>
+            <a:off x="5657443" y="3145536"/>
+            <a:ext cx="5418635" cy="493776"/>
+          </a:xfrm>
+          <a:prstGeom prst="rect">
+            <a:avLst/>
+          </a:prstGeom>
+          <a:solidFill>
+            <a:srgbClr val="9FD7B6"/>
+          </a:solidFill>
+          <a:ln/>
+        </p:spPr>
+      </p:sp>
+      <p:sp>
+        <p:nvSpPr>
+          <p:cNvPr id="25" name="Text 23"/>
+          <p:cNvSpPr txBox="1"/>
+          <p:nvPr/>
+        </p:nvSpPr>
+        <p:spPr>
+          <a:xfrm>
+            <a:off x="5657443" y="3145536"/>
+            <a:ext cx="5418635" cy="493776"/>
+          </a:xfrm>
+          <a:prstGeom prst="rect">
+            <a:avLst/>
+          </a:prstGeom>
+          <a:noFill/>
+          <a:ln/>
+        </p:spPr>
+        <p:txBody>
+          <a:bodyPr wrap="square" lIns="0" tIns="0" rIns="0" bIns="0" rtlCol="0" anchor="ctr"/>
+          <a:lstStyle/>
+          <a:p>
+            <a:pPr algn="ctr" indent="0" marL="0">
+              <a:buNone/>
+            </a:pPr>
+            <a:r>
+              <a:rPr lang="en-US" sz="1500" b="1" dirty="0">
+                <a:solidFill>
+                  <a:srgbClr val="333333"/>
+                </a:solidFill>
+                <a:latin typeface="Meiryo" pitchFamily="34" charset="0"/>
+                <a:ea typeface="Meiryo" pitchFamily="34" charset="-122"/>
+                <a:cs typeface="Meiryo" pitchFamily="34" charset="-120"/>
+              </a:rPr>
+              <a:t>2,214名</a:t>
+            </a:r>
+            <a:pPr algn="ctr" indent="0" marL="0">
+              <a:buNone/>
+            </a:pPr>
+            <a:r>
+              <a:rPr lang="en-US" sz="1100" dirty="0">
+                <a:solidFill>
+                  <a:srgbClr val="333333"/>
+                </a:solidFill>
+                <a:latin typeface="Meiryo" pitchFamily="34" charset="0"/>
+                <a:ea typeface="Meiryo" pitchFamily="34" charset="-122"/>
+                <a:cs typeface="Meiryo" pitchFamily="34" charset="-120"/>
+              </a:rPr>
+              <a:t>  65%</a:t>
+            </a:r>
+            <a:endParaRPr lang="en-US" sz="1500" dirty="0"/>
+          </a:p>
+        </p:txBody>
+      </p:sp>
+      <p:sp>
+        <p:nvSpPr>
+          <p:cNvPr id="26" name="Text 24"/>
+          <p:cNvSpPr txBox="1"/>
+          <p:nvPr/>
+        </p:nvSpPr>
+        <p:spPr>
+          <a:xfrm>
+            <a:off x="6537960" y="3625596"/>
+            <a:ext cx="3657600" cy="201168"/>
+          </a:xfrm>
+          <a:prstGeom prst="rect">
+            <a:avLst/>
+          </a:prstGeom>
+          <a:noFill/>
+          <a:ln/>
+        </p:spPr>
+        <p:txBody>
+          <a:bodyPr wrap="square" lIns="0" tIns="0" rIns="0" bIns="0" rtlCol="0" anchor="ctr"/>
+          <a:lstStyle/>
+          <a:p>
+            <a:pPr algn="ctr" indent="0" marL="0">
+              <a:buNone/>
+            </a:pPr>
+            <a:r>
+              <a:rPr lang="en-US" sz="900" dirty="0">
+                <a:solidFill>
+                  <a:srgbClr val="7A7F7C"/>
+                </a:solidFill>
+                <a:latin typeface="Meiryo" pitchFamily="34" charset="0"/>
+                <a:ea typeface="Meiryo" pitchFamily="34" charset="-122"/>
+                <a:cs typeface="Meiryo" pitchFamily="34" charset="-120"/>
+              </a:rPr>
+              <a:t>▼  −525名 を除外</a:t>
+            </a:r>
+            <a:endParaRPr lang="en-US" sz="900" dirty="0"/>
+          </a:p>
+        </p:txBody>
+      </p:sp>
+      <p:sp>
+        <p:nvSpPr>
+          <p:cNvPr id="27" name="Shape 25"/>
+          <p:cNvSpPr/>
+          <p:nvPr/>
+        </p:nvSpPr>
+        <p:spPr>
+          <a:xfrm>
+            <a:off x="320040" y="3931920"/>
+            <a:ext cx="310896" cy="310896"/>
+          </a:xfrm>
+          <a:prstGeom prst="ellipse">
+            <a:avLst/>
+          </a:prstGeom>
+          <a:solidFill>
+            <a:srgbClr val="369E51"/>
+          </a:solidFill>
+          <a:ln/>
+        </p:spPr>
+      </p:sp>
+      <p:sp>
+        <p:nvSpPr>
+          <p:cNvPr id="28" name="Text 26"/>
+          <p:cNvSpPr txBox="1"/>
+          <p:nvPr/>
+        </p:nvSpPr>
+        <p:spPr>
+          <a:xfrm>
+            <a:off x="320040" y="3931920"/>
+            <a:ext cx="310896" cy="310896"/>
+          </a:xfrm>
+          <a:prstGeom prst="rect">
+            <a:avLst/>
+          </a:prstGeom>
+          <a:noFill/>
+          <a:ln/>
+        </p:spPr>
+        <p:txBody>
+          <a:bodyPr wrap="square" lIns="0" tIns="0" rIns="0" bIns="0" rtlCol="0" anchor="ctr"/>
+          <a:lstStyle/>
+          <a:p>
+            <a:pPr algn="ctr" indent="0" marL="0">
+              <a:buNone/>
+            </a:pPr>
+            <a:r>
+              <a:rPr lang="en-US" sz="1300" b="1" dirty="0">
+                <a:solidFill>
+                  <a:srgbClr val="FFFFFF"/>
+                </a:solidFill>
+                <a:latin typeface="Meiryo" pitchFamily="34" charset="0"/>
+                <a:ea typeface="Meiryo" pitchFamily="34" charset="-122"/>
+                <a:cs typeface="Meiryo" pitchFamily="34" charset="-120"/>
+              </a:rPr>
+              <a:t>③ </a:t>
+            </a:r>
+            <a:endParaRPr lang="en-US" sz="1300" dirty="0"/>
+          </a:p>
+        </p:txBody>
+      </p:sp>
+      <p:sp>
+        <p:nvSpPr>
+          <p:cNvPr id="29" name="Text 27"/>
+          <p:cNvSpPr txBox="1"/>
+          <p:nvPr/>
+        </p:nvSpPr>
+        <p:spPr>
+          <a:xfrm>
+            <a:off x="731520" y="3867912"/>
+            <a:ext cx="3749040" cy="274320"/>
+          </a:xfrm>
+          <a:prstGeom prst="rect">
+            <a:avLst/>
+          </a:prstGeom>
+          <a:noFill/>
+          <a:ln/>
+        </p:spPr>
+        <p:txBody>
+          <a:bodyPr wrap="square" lIns="0" tIns="0" rIns="0" bIns="0" rtlCol="0" anchor="ctr"/>
+          <a:lstStyle/>
+          <a:p>
+            <a:pPr indent="0" marL="0">
+              <a:buNone/>
+            </a:pPr>
+            <a:r>
+              <a:rPr lang="en-US" sz="1150" b="1" dirty="0">
+                <a:solidFill>
+                  <a:srgbClr val="333333"/>
+                </a:solidFill>
+                <a:latin typeface="Meiryo" pitchFamily="34" charset="0"/>
+                <a:ea typeface="Meiryo" pitchFamily="34" charset="-122"/>
+                <a:cs typeface="Meiryo" pitchFamily="34" charset="-120"/>
+              </a:rPr>
+              <a:t>専門に踏み出している</a:t>
+            </a:r>
+            <a:endParaRPr lang="en-US" sz="1150" dirty="0"/>
+          </a:p>
+        </p:txBody>
+      </p:sp>
+      <p:sp>
+        <p:nvSpPr>
+          <p:cNvPr id="30" name="Text 28"/>
+          <p:cNvSpPr txBox="1"/>
+          <p:nvPr/>
+        </p:nvSpPr>
+        <p:spPr>
+          <a:xfrm>
+            <a:off x="731520" y="4114800"/>
+            <a:ext cx="3840480" cy="219456"/>
+          </a:xfrm>
+          <a:prstGeom prst="rect">
+            <a:avLst/>
+          </a:prstGeom>
+          <a:noFill/>
+          <a:ln/>
+        </p:spPr>
+        <p:txBody>
+          <a:bodyPr wrap="square" lIns="0" tIns="0" rIns="0" bIns="0" rtlCol="0" anchor="ctr"/>
+          <a:lstStyle/>
+          <a:p>
+            <a:pPr indent="0" marL="0">
+              <a:buNone/>
+            </a:pPr>
+            <a:r>
+              <a:rPr lang="en-US" sz="900" dirty="0">
+                <a:solidFill>
+                  <a:srgbClr val="7A7F7C"/>
+                </a:solidFill>
+                <a:latin typeface="Meiryo" pitchFamily="34" charset="0"/>
+                <a:ea typeface="Meiryo" pitchFamily="34" charset="-122"/>
+                <a:cs typeface="Meiryo" pitchFamily="34" charset="-120"/>
+              </a:rPr>
+              <a:t>＋ 専門スキル P2以上 ×1個</a:t>
+            </a:r>
+            <a:endParaRPr lang="en-US" sz="900" dirty="0"/>
+          </a:p>
+        </p:txBody>
+      </p:sp>
+      <p:sp>
+        <p:nvSpPr>
+          <p:cNvPr id="31" name="Shape 29"/>
+          <p:cNvSpPr/>
+          <p:nvPr/>
+        </p:nvSpPr>
+        <p:spPr>
+          <a:xfrm>
+            <a:off x="6018018" y="3840480"/>
+            <a:ext cx="4697484" cy="493776"/>
+          </a:xfrm>
+          <a:prstGeom prst="rect">
+            <a:avLst/>
+          </a:prstGeom>
+          <a:solidFill>
+            <a:srgbClr val="6FC48F"/>
+          </a:solidFill>
+          <a:ln/>
+        </p:spPr>
+      </p:sp>
+      <p:sp>
+        <p:nvSpPr>
+          <p:cNvPr id="32" name="Text 30"/>
+          <p:cNvSpPr txBox="1"/>
+          <p:nvPr/>
+        </p:nvSpPr>
+        <p:spPr>
+          <a:xfrm>
+            <a:off x="6018018" y="3840480"/>
+            <a:ext cx="4697484" cy="493776"/>
+          </a:xfrm>
+          <a:prstGeom prst="rect">
+            <a:avLst/>
+          </a:prstGeom>
+          <a:noFill/>
+          <a:ln/>
+        </p:spPr>
+        <p:txBody>
+          <a:bodyPr wrap="square" lIns="0" tIns="0" rIns="0" bIns="0" rtlCol="0" anchor="ctr"/>
+          <a:lstStyle/>
+          <a:p>
+            <a:pPr algn="ctr" indent="0" marL="0">
+              <a:buNone/>
+            </a:pPr>
+            <a:r>
+              <a:rPr lang="en-US" sz="1500" b="1" dirty="0">
+                <a:solidFill>
+                  <a:srgbClr val="FFFFFF"/>
+                </a:solidFill>
+                <a:latin typeface="Meiryo" pitchFamily="34" charset="0"/>
+                <a:ea typeface="Meiryo" pitchFamily="34" charset="-122"/>
+                <a:cs typeface="Meiryo" pitchFamily="34" charset="-120"/>
+              </a:rPr>
+              <a:t>1,689名</a:t>
+            </a:r>
+            <a:pPr algn="ctr" indent="0" marL="0">
+              <a:buNone/>
+            </a:pPr>
+            <a:r>
+              <a:rPr lang="en-US" sz="1100" dirty="0">
+                <a:solidFill>
+                  <a:srgbClr val="FFFFFF"/>
+                </a:solidFill>
+                <a:latin typeface="Meiryo" pitchFamily="34" charset="0"/>
+                <a:ea typeface="Meiryo" pitchFamily="34" charset="-122"/>
+                <a:cs typeface="Meiryo" pitchFamily="34" charset="-120"/>
+              </a:rPr>
+              <a:t>  50%</a:t>
+            </a:r>
+            <a:endParaRPr lang="en-US" sz="1500" dirty="0"/>
+          </a:p>
+        </p:txBody>
+      </p:sp>
+      <p:sp>
+        <p:nvSpPr>
+          <p:cNvPr id="33" name="Text 31"/>
+          <p:cNvSpPr txBox="1"/>
+          <p:nvPr/>
+        </p:nvSpPr>
+        <p:spPr>
+          <a:xfrm>
+            <a:off x="6537960" y="4320540"/>
+            <a:ext cx="3657600" cy="201168"/>
+          </a:xfrm>
+          <a:prstGeom prst="rect">
+            <a:avLst/>
+          </a:prstGeom>
+          <a:noFill/>
+          <a:ln/>
+        </p:spPr>
+        <p:txBody>
+          <a:bodyPr wrap="square" lIns="0" tIns="0" rIns="0" bIns="0" rtlCol="0" anchor="ctr"/>
+          <a:lstStyle/>
+          <a:p>
+            <a:pPr algn="ctr" indent="0" marL="0">
+              <a:buNone/>
+            </a:pPr>
+            <a:r>
+              <a:rPr lang="en-US" sz="900" dirty="0">
+                <a:solidFill>
+                  <a:srgbClr val="7A7F7C"/>
+                </a:solidFill>
+                <a:latin typeface="Meiryo" pitchFamily="34" charset="0"/>
+                <a:ea typeface="Meiryo" pitchFamily="34" charset="-122"/>
+                <a:cs typeface="Meiryo" pitchFamily="34" charset="-120"/>
+              </a:rPr>
+              <a:t>▼  −408名 を除外</a:t>
+            </a:r>
+            <a:endParaRPr lang="en-US" sz="900" dirty="0"/>
+          </a:p>
+        </p:txBody>
+      </p:sp>
+      <p:sp>
+        <p:nvSpPr>
+          <p:cNvPr id="34" name="Shape 32"/>
+          <p:cNvSpPr/>
+          <p:nvPr/>
+        </p:nvSpPr>
+        <p:spPr>
+          <a:xfrm>
+            <a:off x="320040" y="4626864"/>
+            <a:ext cx="310896" cy="310896"/>
+          </a:xfrm>
+          <a:prstGeom prst="ellipse">
+            <a:avLst/>
+          </a:prstGeom>
+          <a:solidFill>
+            <a:srgbClr val="369E51"/>
+          </a:solidFill>
+          <a:ln/>
+        </p:spPr>
+      </p:sp>
+      <p:sp>
+        <p:nvSpPr>
+          <p:cNvPr id="35" name="Text 33"/>
+          <p:cNvSpPr txBox="1"/>
+          <p:nvPr/>
+        </p:nvSpPr>
+        <p:spPr>
+          <a:xfrm>
+            <a:off x="320040" y="4626864"/>
+            <a:ext cx="310896" cy="310896"/>
+          </a:xfrm>
+          <a:prstGeom prst="rect">
+            <a:avLst/>
+          </a:prstGeom>
+          <a:noFill/>
+          <a:ln/>
+        </p:spPr>
+        <p:txBody>
+          <a:bodyPr wrap="square" lIns="0" tIns="0" rIns="0" bIns="0" rtlCol="0" anchor="ctr"/>
+          <a:lstStyle/>
+          <a:p>
+            <a:pPr algn="ctr" indent="0" marL="0">
+              <a:buNone/>
+            </a:pPr>
+            <a:r>
+              <a:rPr lang="en-US" sz="1300" b="1" dirty="0">
+                <a:solidFill>
+                  <a:srgbClr val="FFFFFF"/>
+                </a:solidFill>
+                <a:latin typeface="Meiryo" pitchFamily="34" charset="0"/>
+                <a:ea typeface="Meiryo" pitchFamily="34" charset="-122"/>
+                <a:cs typeface="Meiryo" pitchFamily="34" charset="-120"/>
+              </a:rPr>
+              <a:t>④ </a:t>
+            </a:r>
+            <a:endParaRPr lang="en-US" sz="1300" dirty="0"/>
+          </a:p>
+        </p:txBody>
+      </p:sp>
+      <p:sp>
+        <p:nvSpPr>
+          <p:cNvPr id="36" name="Text 34"/>
+          <p:cNvSpPr txBox="1"/>
+          <p:nvPr/>
+        </p:nvSpPr>
+        <p:spPr>
+          <a:xfrm>
+            <a:off x="731520" y="4562856"/>
+            <a:ext cx="3749040" cy="274320"/>
+          </a:xfrm>
+          <a:prstGeom prst="rect">
+            <a:avLst/>
+          </a:prstGeom>
+          <a:noFill/>
+          <a:ln/>
+        </p:spPr>
+        <p:txBody>
+          <a:bodyPr wrap="square" lIns="0" tIns="0" rIns="0" bIns="0" rtlCol="0" anchor="ctr"/>
+          <a:lstStyle/>
+          <a:p>
+            <a:pPr indent="0" marL="0">
+              <a:buNone/>
+            </a:pPr>
+            <a:r>
+              <a:rPr lang="en-US" sz="1150" b="1" dirty="0">
+                <a:solidFill>
+                  <a:srgbClr val="333333"/>
+                </a:solidFill>
+                <a:latin typeface="Meiryo" pitchFamily="34" charset="0"/>
+                <a:ea typeface="Meiryo" pitchFamily="34" charset="-122"/>
+                <a:cs typeface="Meiryo" pitchFamily="34" charset="-120"/>
+              </a:rPr>
+              <a:t>専門に複数の強みがある</a:t>
+            </a:r>
+            <a:endParaRPr lang="en-US" sz="1150" dirty="0"/>
+          </a:p>
+        </p:txBody>
+      </p:sp>
+      <p:sp>
+        <p:nvSpPr>
+          <p:cNvPr id="37" name="Text 35"/>
+          <p:cNvSpPr txBox="1"/>
+          <p:nvPr/>
+        </p:nvSpPr>
+        <p:spPr>
+          <a:xfrm>
+            <a:off x="731520" y="4809744"/>
+            <a:ext cx="3840480" cy="219456"/>
+          </a:xfrm>
+          <a:prstGeom prst="rect">
+            <a:avLst/>
+          </a:prstGeom>
+          <a:noFill/>
+          <a:ln/>
+        </p:spPr>
+        <p:txBody>
+          <a:bodyPr wrap="square" lIns="0" tIns="0" rIns="0" bIns="0" rtlCol="0" anchor="ctr"/>
+          <a:lstStyle/>
+          <a:p>
+            <a:pPr indent="0" marL="0">
+              <a:buNone/>
+            </a:pPr>
+            <a:r>
+              <a:rPr lang="en-US" sz="900" dirty="0">
+                <a:solidFill>
+                  <a:srgbClr val="7A7F7C"/>
+                </a:solidFill>
+                <a:latin typeface="Meiryo" pitchFamily="34" charset="0"/>
+                <a:ea typeface="Meiryo" pitchFamily="34" charset="-122"/>
+                <a:cs typeface="Meiryo" pitchFamily="34" charset="-120"/>
+              </a:rPr>
+              <a:t>＋ 専門スキル P2以上 ×3個</a:t>
+            </a:r>
+            <a:endParaRPr lang="en-US" sz="900" dirty="0"/>
+          </a:p>
+        </p:txBody>
+      </p:sp>
+      <p:sp>
+        <p:nvSpPr>
+          <p:cNvPr id="38" name="Shape 36"/>
+          <p:cNvSpPr/>
+          <p:nvPr/>
+        </p:nvSpPr>
+        <p:spPr>
+          <a:xfrm>
+            <a:off x="6298236" y="4535424"/>
+            <a:ext cx="4137047" cy="493776"/>
+          </a:xfrm>
+          <a:prstGeom prst="rect">
+            <a:avLst/>
+          </a:prstGeom>
+          <a:solidFill>
+            <a:srgbClr val="4EB06F"/>
+          </a:solidFill>
+          <a:ln/>
+        </p:spPr>
+      </p:sp>
+      <p:sp>
+        <p:nvSpPr>
+          <p:cNvPr id="39" name="Text 37"/>
+          <p:cNvSpPr txBox="1"/>
+          <p:nvPr/>
+        </p:nvSpPr>
+        <p:spPr>
+          <a:xfrm>
+            <a:off x="6298236" y="4535424"/>
+            <a:ext cx="4137047" cy="493776"/>
+          </a:xfrm>
+          <a:prstGeom prst="rect">
+            <a:avLst/>
+          </a:prstGeom>
+          <a:noFill/>
+          <a:ln/>
+        </p:spPr>
+        <p:txBody>
+          <a:bodyPr wrap="square" lIns="0" tIns="0" rIns="0" bIns="0" rtlCol="0" anchor="ctr"/>
+          <a:lstStyle/>
+          <a:p>
+            <a:pPr algn="ctr" indent="0" marL="0">
+              <a:buNone/>
+            </a:pPr>
+            <a:r>
+              <a:rPr lang="en-US" sz="1500" b="1" dirty="0">
+                <a:solidFill>
+                  <a:srgbClr val="FFFFFF"/>
+                </a:solidFill>
+                <a:latin typeface="Meiryo" pitchFamily="34" charset="0"/>
+                <a:ea typeface="Meiryo" pitchFamily="34" charset="-122"/>
+                <a:cs typeface="Meiryo" pitchFamily="34" charset="-120"/>
+              </a:rPr>
+              <a:t>1,281名</a:t>
+            </a:r>
+            <a:pPr algn="ctr" indent="0" marL="0">
+              <a:buNone/>
+            </a:pPr>
+            <a:r>
+              <a:rPr lang="en-US" sz="1100" dirty="0">
+                <a:solidFill>
+                  <a:srgbClr val="FFFFFF"/>
+                </a:solidFill>
+                <a:latin typeface="Meiryo" pitchFamily="34" charset="0"/>
+                <a:ea typeface="Meiryo" pitchFamily="34" charset="-122"/>
+                <a:cs typeface="Meiryo" pitchFamily="34" charset="-120"/>
+              </a:rPr>
+              <a:t>  38%</a:t>
+            </a:r>
+            <a:endParaRPr lang="en-US" sz="1500" dirty="0"/>
+          </a:p>
+        </p:txBody>
+      </p:sp>
+      <p:sp>
+        <p:nvSpPr>
+          <p:cNvPr id="40" name="Text 38"/>
+          <p:cNvSpPr txBox="1"/>
+          <p:nvPr/>
+        </p:nvSpPr>
+        <p:spPr>
+          <a:xfrm>
+            <a:off x="6537960" y="5015484"/>
+            <a:ext cx="3657600" cy="201168"/>
+          </a:xfrm>
+          <a:prstGeom prst="rect">
+            <a:avLst/>
+          </a:prstGeom>
+          <a:noFill/>
+          <a:ln/>
+        </p:spPr>
+        <p:txBody>
+          <a:bodyPr wrap="square" lIns="0" tIns="0" rIns="0" bIns="0" rtlCol="0" anchor="ctr"/>
+          <a:lstStyle/>
+          <a:p>
+            <a:pPr algn="ctr" indent="0" marL="0">
+              <a:buNone/>
+            </a:pPr>
+            <a:r>
+              <a:rPr lang="en-US" sz="900" dirty="0">
+                <a:solidFill>
+                  <a:srgbClr val="7A7F7C"/>
+                </a:solidFill>
+                <a:latin typeface="Meiryo" pitchFamily="34" charset="0"/>
+                <a:ea typeface="Meiryo" pitchFamily="34" charset="-122"/>
+                <a:cs typeface="Meiryo" pitchFamily="34" charset="-120"/>
+              </a:rPr>
+              <a:t>▼  −91名 を除外</a:t>
+            </a:r>
+            <a:endParaRPr lang="en-US" sz="900" dirty="0"/>
+          </a:p>
+        </p:txBody>
+      </p:sp>
+      <p:sp>
+        <p:nvSpPr>
+          <p:cNvPr id="41" name="Shape 39"/>
+          <p:cNvSpPr/>
+          <p:nvPr/>
+        </p:nvSpPr>
+        <p:spPr>
+          <a:xfrm>
+            <a:off x="320040" y="5321808"/>
+            <a:ext cx="310896" cy="310896"/>
+          </a:xfrm>
+          <a:prstGeom prst="ellipse">
+            <a:avLst/>
+          </a:prstGeom>
+          <a:solidFill>
+            <a:srgbClr val="369E51"/>
+          </a:solidFill>
+          <a:ln/>
+        </p:spPr>
+      </p:sp>
+      <p:sp>
+        <p:nvSpPr>
+          <p:cNvPr id="42" name="Text 40"/>
+          <p:cNvSpPr txBox="1"/>
+          <p:nvPr/>
+        </p:nvSpPr>
+        <p:spPr>
+          <a:xfrm>
+            <a:off x="320040" y="5321808"/>
+            <a:ext cx="310896" cy="310896"/>
+          </a:xfrm>
+          <a:prstGeom prst="rect">
+            <a:avLst/>
+          </a:prstGeom>
+          <a:noFill/>
+          <a:ln/>
+        </p:spPr>
+        <p:txBody>
+          <a:bodyPr wrap="square" lIns="0" tIns="0" rIns="0" bIns="0" rtlCol="0" anchor="ctr"/>
+          <a:lstStyle/>
+          <a:p>
+            <a:pPr algn="ctr" indent="0" marL="0">
+              <a:buNone/>
+            </a:pPr>
+            <a:r>
+              <a:rPr lang="en-US" sz="1300" b="1" dirty="0">
+                <a:solidFill>
+                  <a:srgbClr val="FFFFFF"/>
+                </a:solidFill>
+                <a:latin typeface="Meiryo" pitchFamily="34" charset="0"/>
+                <a:ea typeface="Meiryo" pitchFamily="34" charset="-122"/>
+                <a:cs typeface="Meiryo" pitchFamily="34" charset="-120"/>
+              </a:rPr>
+              <a:t>⑤ </a:t>
+            </a:r>
+            <a:endParaRPr lang="en-US" sz="1300" dirty="0"/>
+          </a:p>
+        </p:txBody>
+      </p:sp>
+      <p:sp>
+        <p:nvSpPr>
+          <p:cNvPr id="43" name="Text 41"/>
+          <p:cNvSpPr txBox="1"/>
+          <p:nvPr/>
+        </p:nvSpPr>
+        <p:spPr>
+          <a:xfrm>
+            <a:off x="731520" y="5257800"/>
+            <a:ext cx="3749040" cy="274320"/>
+          </a:xfrm>
+          <a:prstGeom prst="rect">
+            <a:avLst/>
+          </a:prstGeom>
+          <a:noFill/>
+          <a:ln/>
+        </p:spPr>
+        <p:txBody>
+          <a:bodyPr wrap="square" lIns="0" tIns="0" rIns="0" bIns="0" rtlCol="0" anchor="ctr"/>
+          <a:lstStyle/>
+          <a:p>
+            <a:pPr indent="0" marL="0">
+              <a:buNone/>
+            </a:pPr>
+            <a:r>
+              <a:rPr lang="en-US" sz="1150" b="1" dirty="0">
+                <a:solidFill>
+                  <a:srgbClr val="333333"/>
+                </a:solidFill>
+                <a:latin typeface="Meiryo" pitchFamily="34" charset="0"/>
+                <a:ea typeface="Meiryo" pitchFamily="34" charset="-122"/>
+                <a:cs typeface="Meiryo" pitchFamily="34" charset="-120"/>
+              </a:rPr>
+              <a:t>重点4ロールに向かう中核</a:t>
+            </a:r>
+            <a:endParaRPr lang="en-US" sz="1150" dirty="0"/>
+          </a:p>
+        </p:txBody>
+      </p:sp>
+      <p:sp>
+        <p:nvSpPr>
+          <p:cNvPr id="44" name="Text 42"/>
+          <p:cNvSpPr txBox="1"/>
+          <p:nvPr/>
+        </p:nvSpPr>
+        <p:spPr>
+          <a:xfrm>
+            <a:off x="731520" y="5504688"/>
+            <a:ext cx="3840480" cy="219456"/>
+          </a:xfrm>
+          <a:prstGeom prst="rect">
+            <a:avLst/>
+          </a:prstGeom>
+          <a:noFill/>
+          <a:ln/>
+        </p:spPr>
+        <p:txBody>
+          <a:bodyPr wrap="square" lIns="0" tIns="0" rIns="0" bIns="0" rtlCol="0" anchor="ctr"/>
+          <a:lstStyle/>
+          <a:p>
+            <a:pPr indent="0" marL="0">
+              <a:buNone/>
+            </a:pPr>
+            <a:r>
+              <a:rPr lang="en-US" sz="900" dirty="0">
+                <a:solidFill>
+                  <a:srgbClr val="7A7F7C"/>
+                </a:solidFill>
+                <a:latin typeface="Meiryo" pitchFamily="34" charset="0"/>
+                <a:ea typeface="Meiryo" pitchFamily="34" charset="-122"/>
+                <a:cs typeface="Meiryo" pitchFamily="34" charset="-120"/>
+              </a:rPr>
+              <a:t>＋ 重点4ロールのいずれかに適合</a:t>
+            </a:r>
+            <a:endParaRPr lang="en-US" sz="900" dirty="0"/>
+          </a:p>
+        </p:txBody>
+      </p:sp>
+      <p:sp>
+        <p:nvSpPr>
+          <p:cNvPr id="45" name="Shape 43"/>
+          <p:cNvSpPr/>
+          <p:nvPr/>
+        </p:nvSpPr>
+        <p:spPr>
+          <a:xfrm>
+            <a:off x="6360736" y="5230368"/>
+            <a:ext cx="4012048" cy="493776"/>
+          </a:xfrm>
+          <a:prstGeom prst="rect">
+            <a:avLst/>
+          </a:prstGeom>
+          <a:solidFill>
+            <a:srgbClr val="369E51"/>
+          </a:solidFill>
+          <a:ln/>
+        </p:spPr>
+      </p:sp>
+      <p:sp>
+        <p:nvSpPr>
+          <p:cNvPr id="46" name="Text 44"/>
+          <p:cNvSpPr txBox="1"/>
+          <p:nvPr/>
+        </p:nvSpPr>
+        <p:spPr>
+          <a:xfrm>
+            <a:off x="6360736" y="5230368"/>
+            <a:ext cx="4012048" cy="493776"/>
+          </a:xfrm>
+          <a:prstGeom prst="rect">
+            <a:avLst/>
+          </a:prstGeom>
+          <a:noFill/>
+          <a:ln/>
+        </p:spPr>
+        <p:txBody>
+          <a:bodyPr wrap="square" lIns="0" tIns="0" rIns="0" bIns="0" rtlCol="0" anchor="ctr"/>
+          <a:lstStyle/>
+          <a:p>
+            <a:pPr algn="ctr" indent="0" marL="0">
+              <a:buNone/>
+            </a:pPr>
+            <a:r>
+              <a:rPr lang="en-US" sz="1500" b="1" dirty="0">
+                <a:solidFill>
+                  <a:srgbClr val="FFFFFF"/>
+                </a:solidFill>
+                <a:latin typeface="Meiryo" pitchFamily="34" charset="0"/>
+                <a:ea typeface="Meiryo" pitchFamily="34" charset="-122"/>
+                <a:cs typeface="Meiryo" pitchFamily="34" charset="-120"/>
+              </a:rPr>
+              <a:t>1,190名</a:t>
+            </a:r>
+            <a:pPr algn="ctr" indent="0" marL="0">
+              <a:buNone/>
+            </a:pPr>
+            <a:r>
+              <a:rPr lang="en-US" sz="1100" dirty="0">
+                <a:solidFill>
+                  <a:srgbClr val="FFFFFF"/>
+                </a:solidFill>
+                <a:latin typeface="Meiryo" pitchFamily="34" charset="0"/>
+                <a:ea typeface="Meiryo" pitchFamily="34" charset="-122"/>
+                <a:cs typeface="Meiryo" pitchFamily="34" charset="-120"/>
+              </a:rPr>
+              <a:t>  35%</a:t>
+            </a:r>
+            <a:endParaRPr lang="en-US" sz="1500" dirty="0"/>
+          </a:p>
+        </p:txBody>
+      </p:sp>
+      <p:sp>
+        <p:nvSpPr>
+          <p:cNvPr id="47" name="Text 45"/>
+          <p:cNvSpPr txBox="1"/>
+          <p:nvPr/>
+        </p:nvSpPr>
+        <p:spPr>
+          <a:xfrm>
+            <a:off x="10482512" y="5202936"/>
+            <a:ext cx="1664208" cy="548640"/>
+          </a:xfrm>
+          <a:prstGeom prst="rect">
+            <a:avLst/>
+          </a:prstGeom>
+          <a:noFill/>
+          <a:ln/>
+        </p:spPr>
+        <p:txBody>
+          <a:bodyPr wrap="square" lIns="0" tIns="0" rIns="0" bIns="0" rtlCol="0" anchor="ctr"/>
+          <a:lstStyle/>
+          <a:p>
+            <a:pPr indent="0" marL="0">
               <a:lnSpc>
                 <a:spcPct val="90000"/>
               </a:lnSpc>
               <a:buNone/>
             </a:pPr>
             <a:r>
-              <a:rPr lang="en-US" sz="1400" b="1" dirty="0">
+              <a:rPr lang="en-US" sz="900" b="1" i="1" dirty="0">
                 <a:solidFill>
                   <a:srgbClr val="276B3C"/>
                 </a:solidFill>
@@ -1541,16 +2649,19 @@
                 <a:ea typeface="Meiryo" pitchFamily="34" charset="-122"/>
                 <a:cs typeface="Meiryo" pitchFamily="34" charset="-120"/>
               </a:rPr>
-              <a:t>3,395名</a:t>
-            </a:r>
-            <a:pPr algn="l" indent="0" marL="0">
+              <a:t>＝ デジタル活用人材</a:t>
+            </a:r>
+            <a:endParaRPr lang="en-US" sz="900" dirty="0"/>
+          </a:p>
+          <a:p>
+            <a:pPr indent="0" marL="0">
               <a:lnSpc>
                 <a:spcPct val="90000"/>
               </a:lnSpc>
               <a:buNone/>
             </a:pPr>
             <a:r>
-              <a:rPr lang="en-US" sz="1050" dirty="0">
+              <a:rPr lang="en-US" sz="900" b="1" i="1" dirty="0">
                 <a:solidFill>
                   <a:srgbClr val="276B3C"/>
                 </a:solidFill>
@@ -1558,42 +2669,108 @@
                 <a:ea typeface="Meiryo" pitchFamily="34" charset="-122"/>
                 <a:cs typeface="Meiryo" pitchFamily="34" charset="-120"/>
               </a:rPr>
-              <a:t>  100%</a:t>
-            </a:r>
-            <a:endParaRPr lang="en-US" sz="1400" dirty="0"/>
-          </a:p>
-        </p:txBody>
-      </p:sp>
-      <p:sp>
-        <p:nvSpPr>
-          <p:cNvPr id="17" name="Shape 15"/>
+              <a:t>計画1,000名超</a:t>
+            </a:r>
+            <a:endParaRPr lang="en-US" sz="900" dirty="0"/>
+          </a:p>
+        </p:txBody>
+      </p:sp>
+      <p:sp>
+        <p:nvSpPr>
+          <p:cNvPr id="48" name="Shape 46"/>
           <p:cNvSpPr/>
           <p:nvPr/>
         </p:nvSpPr>
         <p:spPr>
           <a:xfrm>
-            <a:off x="457200" y="3008376"/>
-            <a:ext cx="3591695" cy="530352"/>
-          </a:xfrm>
-          <a:prstGeom prst="rect">
-            <a:avLst/>
-          </a:prstGeom>
-          <a:solidFill>
-            <a:srgbClr val="9FD7B6"/>
-          </a:solidFill>
-          <a:ln/>
-        </p:spPr>
-      </p:sp>
-      <p:sp>
-        <p:nvSpPr>
-          <p:cNvPr id="18" name="Text 16"/>
-          <p:cNvSpPr txBox="1"/>
-          <p:nvPr/>
-        </p:nvSpPr>
-        <p:spPr>
-          <a:xfrm>
-            <a:off x="585216" y="3035808"/>
-            <a:ext cx="3335663" cy="301752"/>
+            <a:off x="274320" y="5943600"/>
+            <a:ext cx="7223760" cy="493776"/>
+          </a:xfrm>
+          <a:prstGeom prst="rect">
+            <a:avLst/>
+          </a:prstGeom>
+          <a:solidFill>
+            <a:srgbClr val="EAF6EE"/>
+          </a:solidFill>
+          <a:ln w="9525">
+            <a:solidFill>
+              <a:srgbClr val="369E51"/>
+            </a:solidFill>
+            <a:prstDash val="solid"/>
+          </a:ln>
+        </p:spPr>
+      </p:sp>
+      <p:sp>
+        <p:nvSpPr>
+          <p:cNvPr id="49" name="Shape 47"/>
+          <p:cNvSpPr/>
+          <p:nvPr/>
+        </p:nvSpPr>
+        <p:spPr>
+          <a:xfrm>
+            <a:off x="384048" y="6035040"/>
+            <a:ext cx="914400" cy="310896"/>
+          </a:xfrm>
+          <a:prstGeom prst="roundRect">
+            <a:avLst>
+              <a:gd name="adj" fmla="val 14706"/>
+            </a:avLst>
+          </a:prstGeom>
+          <a:solidFill>
+            <a:srgbClr val="369E51"/>
+          </a:solidFill>
+          <a:ln/>
+        </p:spPr>
+      </p:sp>
+      <p:sp>
+        <p:nvSpPr>
+          <p:cNvPr id="50" name="Text 48"/>
+          <p:cNvSpPr txBox="1"/>
+          <p:nvPr/>
+        </p:nvSpPr>
+        <p:spPr>
+          <a:xfrm>
+            <a:off x="384048" y="6035040"/>
+            <a:ext cx="914400" cy="310896"/>
+          </a:xfrm>
+          <a:prstGeom prst="rect">
+            <a:avLst/>
+          </a:prstGeom>
+          <a:noFill/>
+          <a:ln/>
+        </p:spPr>
+        <p:txBody>
+          <a:bodyPr wrap="square" lIns="0" tIns="0" rIns="0" bIns="0" rtlCol="0" anchor="ctr"/>
+          <a:lstStyle/>
+          <a:p>
+            <a:pPr algn="ctr" indent="0" marL="0">
+              <a:buNone/>
+            </a:pPr>
+            <a:r>
+              <a:rPr lang="en-US" sz="1100" b="1" dirty="0">
+                <a:solidFill>
+                  <a:srgbClr val="FFFFFF"/>
+                </a:solidFill>
+                <a:latin typeface="Meiryo" pitchFamily="34" charset="0"/>
+                <a:ea typeface="Meiryo" pitchFamily="34" charset="-122"/>
+                <a:cs typeface="Meiryo" pitchFamily="34" charset="-120"/>
+              </a:rPr>
+              <a:t>読み方</a:t>
+            </a:r>
+            <a:endParaRPr lang="en-US" sz="1100" dirty="0"/>
+          </a:p>
+        </p:txBody>
+      </p:sp>
+      <p:sp>
+        <p:nvSpPr>
+          <p:cNvPr id="51" name="Text 49"/>
+          <p:cNvSpPr txBox="1"/>
+          <p:nvPr/>
+        </p:nvSpPr>
+        <p:spPr>
+          <a:xfrm>
+            <a:off x="1371600" y="5943600"/>
+            <a:ext cx="6035040" cy="493776"/>
           </a:xfrm>
           <a:prstGeom prst="rect">
             <a:avLst/>
@@ -1606,10 +2783,13 @@
           <a:lstStyle/>
           <a:p>
             <a:pPr indent="0" marL="0">
-              <a:buNone/>
-            </a:pPr>
-            <a:r>
-              <a:rPr lang="en-US" sz="1050" b="1" dirty="0">
+              <a:lnSpc>
+                <a:spcPct val="95000"/>
+              </a:lnSpc>
+              <a:buNone/>
+            </a:pPr>
+            <a:r>
+              <a:rPr lang="en-US" sz="900" dirty="0">
                 <a:solidFill>
                   <a:srgbClr val="333333"/>
                 </a:solidFill>
@@ -1617,676 +2797,22 @@
                 <a:ea typeface="Meiryo" pitchFamily="34" charset="-122"/>
                 <a:cs typeface="Meiryo" pitchFamily="34" charset="-120"/>
               </a:rPr>
-              <a:t>② 土台：基礎スキル P2以上 ×8個以上</a:t>
-            </a:r>
-            <a:endParaRPr lang="en-US" sz="1050" dirty="0"/>
-          </a:p>
-        </p:txBody>
-      </p:sp>
-      <p:sp>
-        <p:nvSpPr>
-          <p:cNvPr id="19" name="Text 17"/>
-          <p:cNvSpPr txBox="1"/>
-          <p:nvPr/>
-        </p:nvSpPr>
-        <p:spPr>
-          <a:xfrm>
-            <a:off x="585216" y="3310128"/>
-            <a:ext cx="3335663" cy="219456"/>
-          </a:xfrm>
-          <a:prstGeom prst="rect">
-            <a:avLst/>
-          </a:prstGeom>
-          <a:noFill/>
-          <a:ln/>
-        </p:spPr>
-        <p:txBody>
-          <a:bodyPr wrap="square" lIns="0" tIns="0" rIns="0" bIns="0" rtlCol="0" anchor="ctr"/>
-          <a:lstStyle/>
-          <a:p>
-            <a:pPr indent="0" marL="0">
-              <a:buNone/>
-            </a:pPr>
-            <a:r>
-              <a:rPr lang="en-US" sz="850" dirty="0">
-                <a:solidFill>
-                  <a:srgbClr val="333333"/>
-                </a:solidFill>
-                <a:latin typeface="Meiryo" pitchFamily="34" charset="0"/>
-                <a:ea typeface="Meiryo" pitchFamily="34" charset="-122"/>
-                <a:cs typeface="Meiryo" pitchFamily="34" charset="-120"/>
-              </a:rPr>
-              <a:t>デジタル活用の基礎が自走レベル</a:t>
-            </a:r>
-            <a:endParaRPr lang="en-US" sz="850" dirty="0"/>
-          </a:p>
-        </p:txBody>
-      </p:sp>
-      <p:sp>
-        <p:nvSpPr>
-          <p:cNvPr id="20" name="Text 18"/>
-          <p:cNvSpPr txBox="1"/>
-          <p:nvPr/>
-        </p:nvSpPr>
-        <p:spPr>
-          <a:xfrm>
-            <a:off x="5074920" y="3008376"/>
-            <a:ext cx="1828800" cy="530352"/>
-          </a:xfrm>
-          <a:prstGeom prst="rect">
-            <a:avLst/>
-          </a:prstGeom>
-          <a:noFill/>
-          <a:ln/>
-        </p:spPr>
-        <p:txBody>
-          <a:bodyPr wrap="square" lIns="0" tIns="0" rIns="0" bIns="0" rtlCol="0" anchor="ctr"/>
-          <a:lstStyle/>
-          <a:p>
-            <a:pPr algn="l" indent="0" marL="0">
-              <a:lnSpc>
-                <a:spcPct val="90000"/>
-              </a:lnSpc>
-              <a:buNone/>
-            </a:pPr>
-            <a:r>
-              <a:rPr lang="en-US" sz="1400" b="1" dirty="0">
-                <a:solidFill>
-                  <a:srgbClr val="276B3C"/>
-                </a:solidFill>
-                <a:latin typeface="Meiryo" pitchFamily="34" charset="0"/>
-                <a:ea typeface="Meiryo" pitchFamily="34" charset="-122"/>
-                <a:cs typeface="Meiryo" pitchFamily="34" charset="-120"/>
-              </a:rPr>
-              <a:t>2,214名</a:t>
-            </a:r>
-            <a:pPr algn="l" indent="0" marL="0">
-              <a:lnSpc>
-                <a:spcPct val="90000"/>
-              </a:lnSpc>
-              <a:buNone/>
-            </a:pPr>
-            <a:r>
-              <a:rPr lang="en-US" sz="1050" dirty="0">
-                <a:solidFill>
-                  <a:srgbClr val="276B3C"/>
-                </a:solidFill>
-                <a:latin typeface="Meiryo" pitchFamily="34" charset="0"/>
-                <a:ea typeface="Meiryo" pitchFamily="34" charset="-122"/>
-                <a:cs typeface="Meiryo" pitchFamily="34" charset="-120"/>
-              </a:rPr>
-              <a:t>  65.2%</a:t>
-            </a:r>
-            <a:endParaRPr lang="en-US" sz="1400" dirty="0"/>
-          </a:p>
-        </p:txBody>
-      </p:sp>
-      <p:sp>
-        <p:nvSpPr>
-          <p:cNvPr id="21" name="Shape 19"/>
+              <a:t>全員から「基礎→専門→役割」の条件を順に重ね、4条件すべてを満たす1,190名（35%）が中核。研修受講数でなくスキル保有で測定</a:t>
+            </a:r>
+            <a:endParaRPr lang="en-US" sz="900" dirty="0"/>
+          </a:p>
+        </p:txBody>
+      </p:sp>
+      <p:sp>
+        <p:nvSpPr>
+          <p:cNvPr id="52" name="Shape 50"/>
           <p:cNvSpPr/>
           <p:nvPr/>
         </p:nvSpPr>
         <p:spPr>
           <a:xfrm>
-            <a:off x="457200" y="3639312"/>
-            <a:ext cx="3318507" cy="530352"/>
-          </a:xfrm>
-          <a:prstGeom prst="rect">
-            <a:avLst/>
-          </a:prstGeom>
-          <a:solidFill>
-            <a:srgbClr val="6FC48F"/>
-          </a:solidFill>
-          <a:ln/>
-        </p:spPr>
-      </p:sp>
-      <p:sp>
-        <p:nvSpPr>
-          <p:cNvPr id="22" name="Text 20"/>
-          <p:cNvSpPr txBox="1"/>
-          <p:nvPr/>
-        </p:nvSpPr>
-        <p:spPr>
-          <a:xfrm>
-            <a:off x="585216" y="3666744"/>
-            <a:ext cx="3062475" cy="301752"/>
-          </a:xfrm>
-          <a:prstGeom prst="rect">
-            <a:avLst/>
-          </a:prstGeom>
-          <a:noFill/>
-          <a:ln/>
-        </p:spPr>
-        <p:txBody>
-          <a:bodyPr wrap="square" lIns="0" tIns="0" rIns="0" bIns="0" rtlCol="0" anchor="ctr"/>
-          <a:lstStyle/>
-          <a:p>
-            <a:pPr indent="0" marL="0">
-              <a:buNone/>
-            </a:pPr>
-            <a:r>
-              <a:rPr lang="en-US" sz="1050" b="1" dirty="0">
-                <a:solidFill>
-                  <a:srgbClr val="FFFFFF"/>
-                </a:solidFill>
-                <a:latin typeface="Meiryo" pitchFamily="34" charset="0"/>
-                <a:ea typeface="Meiryo" pitchFamily="34" charset="-122"/>
-                <a:cs typeface="Meiryo" pitchFamily="34" charset="-120"/>
-              </a:rPr>
-              <a:t>③ 専門着手：専門スキル P2以上 ×1個以上</a:t>
-            </a:r>
-            <a:endParaRPr lang="en-US" sz="1050" dirty="0"/>
-          </a:p>
-        </p:txBody>
-      </p:sp>
-      <p:sp>
-        <p:nvSpPr>
-          <p:cNvPr id="23" name="Text 21"/>
-          <p:cNvSpPr txBox="1"/>
-          <p:nvPr/>
-        </p:nvSpPr>
-        <p:spPr>
-          <a:xfrm>
-            <a:off x="585216" y="3941064"/>
-            <a:ext cx="3062475" cy="219456"/>
-          </a:xfrm>
-          <a:prstGeom prst="rect">
-            <a:avLst/>
-          </a:prstGeom>
-          <a:noFill/>
-          <a:ln/>
-        </p:spPr>
-        <p:txBody>
-          <a:bodyPr wrap="square" lIns="0" tIns="0" rIns="0" bIns="0" rtlCol="0" anchor="ctr"/>
-          <a:lstStyle/>
-          <a:p>
-            <a:pPr indent="0" marL="0">
-              <a:buNone/>
-            </a:pPr>
-            <a:r>
-              <a:rPr lang="en-US" sz="850" dirty="0">
-                <a:solidFill>
-                  <a:srgbClr val="FFFFFF"/>
-                </a:solidFill>
-                <a:latin typeface="Meiryo" pitchFamily="34" charset="0"/>
-                <a:ea typeface="Meiryo" pitchFamily="34" charset="-122"/>
-                <a:cs typeface="Meiryo" pitchFamily="34" charset="-120"/>
-              </a:rPr>
-              <a:t>いずれかの専門領域に実践経験あり</a:t>
-            </a:r>
-            <a:endParaRPr lang="en-US" sz="850" dirty="0"/>
-          </a:p>
-        </p:txBody>
-      </p:sp>
-      <p:sp>
-        <p:nvSpPr>
-          <p:cNvPr id="24" name="Text 22"/>
-          <p:cNvSpPr txBox="1"/>
-          <p:nvPr/>
-        </p:nvSpPr>
-        <p:spPr>
-          <a:xfrm>
-            <a:off x="5074920" y="3639312"/>
-            <a:ext cx="1828800" cy="530352"/>
-          </a:xfrm>
-          <a:prstGeom prst="rect">
-            <a:avLst/>
-          </a:prstGeom>
-          <a:noFill/>
-          <a:ln/>
-        </p:spPr>
-        <p:txBody>
-          <a:bodyPr wrap="square" lIns="0" tIns="0" rIns="0" bIns="0" rtlCol="0" anchor="ctr"/>
-          <a:lstStyle/>
-          <a:p>
-            <a:pPr algn="l" indent="0" marL="0">
-              <a:lnSpc>
-                <a:spcPct val="90000"/>
-              </a:lnSpc>
-              <a:buNone/>
-            </a:pPr>
-            <a:r>
-              <a:rPr lang="en-US" sz="1400" b="1" dirty="0">
-                <a:solidFill>
-                  <a:srgbClr val="276B3C"/>
-                </a:solidFill>
-                <a:latin typeface="Meiryo" pitchFamily="34" charset="0"/>
-                <a:ea typeface="Meiryo" pitchFamily="34" charset="-122"/>
-                <a:cs typeface="Meiryo" pitchFamily="34" charset="-120"/>
-              </a:rPr>
-              <a:t>1,689名</a:t>
-            </a:r>
-            <a:pPr algn="l" indent="0" marL="0">
-              <a:lnSpc>
-                <a:spcPct val="90000"/>
-              </a:lnSpc>
-              <a:buNone/>
-            </a:pPr>
-            <a:r>
-              <a:rPr lang="en-US" sz="1050" dirty="0">
-                <a:solidFill>
-                  <a:srgbClr val="276B3C"/>
-                </a:solidFill>
-                <a:latin typeface="Meiryo" pitchFamily="34" charset="0"/>
-                <a:ea typeface="Meiryo" pitchFamily="34" charset="-122"/>
-                <a:cs typeface="Meiryo" pitchFamily="34" charset="-120"/>
-              </a:rPr>
-              <a:t>  49.7%</a:t>
-            </a:r>
-            <a:endParaRPr lang="en-US" sz="1400" dirty="0"/>
-          </a:p>
-        </p:txBody>
-      </p:sp>
-      <p:sp>
-        <p:nvSpPr>
-          <p:cNvPr id="25" name="Shape 23"/>
-          <p:cNvSpPr/>
-          <p:nvPr/>
-        </p:nvSpPr>
-        <p:spPr>
-          <a:xfrm>
-            <a:off x="457200" y="4270248"/>
-            <a:ext cx="3106200" cy="530352"/>
-          </a:xfrm>
-          <a:prstGeom prst="rect">
-            <a:avLst/>
-          </a:prstGeom>
-          <a:solidFill>
-            <a:srgbClr val="4EB06F"/>
-          </a:solidFill>
-          <a:ln/>
-        </p:spPr>
-      </p:sp>
-      <p:sp>
-        <p:nvSpPr>
-          <p:cNvPr id="26" name="Text 24"/>
-          <p:cNvSpPr txBox="1"/>
-          <p:nvPr/>
-        </p:nvSpPr>
-        <p:spPr>
-          <a:xfrm>
-            <a:off x="585216" y="4297680"/>
-            <a:ext cx="2850168" cy="301752"/>
-          </a:xfrm>
-          <a:prstGeom prst="rect">
-            <a:avLst/>
-          </a:prstGeom>
-          <a:noFill/>
-          <a:ln/>
-        </p:spPr>
-        <p:txBody>
-          <a:bodyPr wrap="square" lIns="0" tIns="0" rIns="0" bIns="0" rtlCol="0" anchor="ctr"/>
-          <a:lstStyle/>
-          <a:p>
-            <a:pPr indent="0" marL="0">
-              <a:buNone/>
-            </a:pPr>
-            <a:r>
-              <a:rPr lang="en-US" sz="1050" b="1" dirty="0">
-                <a:solidFill>
-                  <a:srgbClr val="FFFFFF"/>
-                </a:solidFill>
-                <a:latin typeface="Meiryo" pitchFamily="34" charset="0"/>
-                <a:ea typeface="Meiryo" pitchFamily="34" charset="-122"/>
-                <a:cs typeface="Meiryo" pitchFamily="34" charset="-120"/>
-              </a:rPr>
-              <a:t>④ 専門の幅：専門スキル P2以上 ×3個以上</a:t>
-            </a:r>
-            <a:endParaRPr lang="en-US" sz="1050" dirty="0"/>
-          </a:p>
-        </p:txBody>
-      </p:sp>
-      <p:sp>
-        <p:nvSpPr>
-          <p:cNvPr id="27" name="Text 25"/>
-          <p:cNvSpPr txBox="1"/>
-          <p:nvPr/>
-        </p:nvSpPr>
-        <p:spPr>
-          <a:xfrm>
-            <a:off x="585216" y="4572000"/>
-            <a:ext cx="2850168" cy="219456"/>
-          </a:xfrm>
-          <a:prstGeom prst="rect">
-            <a:avLst/>
-          </a:prstGeom>
-          <a:noFill/>
-          <a:ln/>
-        </p:spPr>
-        <p:txBody>
-          <a:bodyPr wrap="square" lIns="0" tIns="0" rIns="0" bIns="0" rtlCol="0" anchor="ctr"/>
-          <a:lstStyle/>
-          <a:p>
-            <a:pPr indent="0" marL="0">
-              <a:buNone/>
-            </a:pPr>
-            <a:r>
-              <a:rPr lang="en-US" sz="850" dirty="0">
-                <a:solidFill>
-                  <a:srgbClr val="FFFFFF"/>
-                </a:solidFill>
-                <a:latin typeface="Meiryo" pitchFamily="34" charset="0"/>
-                <a:ea typeface="Meiryo" pitchFamily="34" charset="-122"/>
-                <a:cs typeface="Meiryo" pitchFamily="34" charset="-120"/>
-              </a:rPr>
-              <a:t>幅のある実践経験を保有</a:t>
-            </a:r>
-            <a:endParaRPr lang="en-US" sz="850" dirty="0"/>
-          </a:p>
-        </p:txBody>
-      </p:sp>
-      <p:sp>
-        <p:nvSpPr>
-          <p:cNvPr id="28" name="Text 26"/>
-          <p:cNvSpPr txBox="1"/>
-          <p:nvPr/>
-        </p:nvSpPr>
-        <p:spPr>
-          <a:xfrm>
-            <a:off x="5074920" y="4270248"/>
-            <a:ext cx="1828800" cy="530352"/>
-          </a:xfrm>
-          <a:prstGeom prst="rect">
-            <a:avLst/>
-          </a:prstGeom>
-          <a:noFill/>
-          <a:ln/>
-        </p:spPr>
-        <p:txBody>
-          <a:bodyPr wrap="square" lIns="0" tIns="0" rIns="0" bIns="0" rtlCol="0" anchor="ctr"/>
-          <a:lstStyle/>
-          <a:p>
-            <a:pPr algn="l" indent="0" marL="0">
-              <a:lnSpc>
-                <a:spcPct val="90000"/>
-              </a:lnSpc>
-              <a:buNone/>
-            </a:pPr>
-            <a:r>
-              <a:rPr lang="en-US" sz="1400" b="1" dirty="0">
-                <a:solidFill>
-                  <a:srgbClr val="276B3C"/>
-                </a:solidFill>
-                <a:latin typeface="Meiryo" pitchFamily="34" charset="0"/>
-                <a:ea typeface="Meiryo" pitchFamily="34" charset="-122"/>
-                <a:cs typeface="Meiryo" pitchFamily="34" charset="-120"/>
-              </a:rPr>
-              <a:t>1,281名</a:t>
-            </a:r>
-            <a:pPr algn="l" indent="0" marL="0">
-              <a:lnSpc>
-                <a:spcPct val="90000"/>
-              </a:lnSpc>
-              <a:buNone/>
-            </a:pPr>
-            <a:r>
-              <a:rPr lang="en-US" sz="1050" dirty="0">
-                <a:solidFill>
-                  <a:srgbClr val="276B3C"/>
-                </a:solidFill>
-                <a:latin typeface="Meiryo" pitchFamily="34" charset="0"/>
-                <a:ea typeface="Meiryo" pitchFamily="34" charset="-122"/>
-                <a:cs typeface="Meiryo" pitchFamily="34" charset="-120"/>
-              </a:rPr>
-              <a:t>  37.7%</a:t>
-            </a:r>
-            <a:endParaRPr lang="en-US" sz="1400" dirty="0"/>
-          </a:p>
-        </p:txBody>
-      </p:sp>
-      <p:sp>
-        <p:nvSpPr>
-          <p:cNvPr id="29" name="Shape 27"/>
-          <p:cNvSpPr/>
-          <p:nvPr/>
-        </p:nvSpPr>
-        <p:spPr>
-          <a:xfrm>
-            <a:off x="457200" y="4901184"/>
-            <a:ext cx="3058847" cy="530352"/>
-          </a:xfrm>
-          <a:prstGeom prst="rect">
-            <a:avLst/>
-          </a:prstGeom>
-          <a:solidFill>
-            <a:srgbClr val="369E51"/>
-          </a:solidFill>
-          <a:ln/>
-        </p:spPr>
-      </p:sp>
-      <p:sp>
-        <p:nvSpPr>
-          <p:cNvPr id="30" name="Text 28"/>
-          <p:cNvSpPr txBox="1"/>
-          <p:nvPr/>
-        </p:nvSpPr>
-        <p:spPr>
-          <a:xfrm>
-            <a:off x="585216" y="4928616"/>
-            <a:ext cx="2802815" cy="301752"/>
-          </a:xfrm>
-          <a:prstGeom prst="rect">
-            <a:avLst/>
-          </a:prstGeom>
-          <a:noFill/>
-          <a:ln/>
-        </p:spPr>
-        <p:txBody>
-          <a:bodyPr wrap="square" lIns="0" tIns="0" rIns="0" bIns="0" rtlCol="0" anchor="ctr"/>
-          <a:lstStyle/>
-          <a:p>
-            <a:pPr indent="0" marL="0">
-              <a:buNone/>
-            </a:pPr>
-            <a:r>
-              <a:rPr lang="en-US" sz="1050" b="1" dirty="0">
-                <a:solidFill>
-                  <a:srgbClr val="FFFFFF"/>
-                </a:solidFill>
-                <a:latin typeface="Meiryo" pitchFamily="34" charset="0"/>
-                <a:ea typeface="Meiryo" pitchFamily="34" charset="-122"/>
-                <a:cs typeface="Meiryo" pitchFamily="34" charset="-120"/>
-              </a:rPr>
-              <a:t>⑤ 中核：重点4ロールのいずれかに適合</a:t>
-            </a:r>
-            <a:endParaRPr lang="en-US" sz="1050" dirty="0"/>
-          </a:p>
-        </p:txBody>
-      </p:sp>
-      <p:sp>
-        <p:nvSpPr>
-          <p:cNvPr id="31" name="Text 29"/>
-          <p:cNvSpPr txBox="1"/>
-          <p:nvPr/>
-        </p:nvSpPr>
-        <p:spPr>
-          <a:xfrm>
-            <a:off x="585216" y="5202936"/>
-            <a:ext cx="2802815" cy="219456"/>
-          </a:xfrm>
-          <a:prstGeom prst="rect">
-            <a:avLst/>
-          </a:prstGeom>
-          <a:noFill/>
-          <a:ln/>
-        </p:spPr>
-        <p:txBody>
-          <a:bodyPr wrap="square" lIns="0" tIns="0" rIns="0" bIns="0" rtlCol="0" anchor="ctr"/>
-          <a:lstStyle/>
-          <a:p>
-            <a:pPr indent="0" marL="0">
-              <a:buNone/>
-            </a:pPr>
-            <a:r>
-              <a:rPr lang="en-US" sz="850" dirty="0">
-                <a:solidFill>
-                  <a:srgbClr val="FFFFFF"/>
-                </a:solidFill>
-                <a:latin typeface="Meiryo" pitchFamily="34" charset="0"/>
-                <a:ea typeface="Meiryo" pitchFamily="34" charset="-122"/>
-                <a:cs typeface="Meiryo" pitchFamily="34" charset="-120"/>
-              </a:rPr>
-              <a:t>デジタル活用人材＝育成の中核母集団</a:t>
-            </a:r>
-            <a:endParaRPr lang="en-US" sz="850" dirty="0"/>
-          </a:p>
-        </p:txBody>
-      </p:sp>
-      <p:sp>
-        <p:nvSpPr>
-          <p:cNvPr id="32" name="Text 30"/>
-          <p:cNvSpPr txBox="1"/>
-          <p:nvPr/>
-        </p:nvSpPr>
-        <p:spPr>
-          <a:xfrm>
-            <a:off x="5074920" y="4901184"/>
-            <a:ext cx="1828800" cy="530352"/>
-          </a:xfrm>
-          <a:prstGeom prst="rect">
-            <a:avLst/>
-          </a:prstGeom>
-          <a:noFill/>
-          <a:ln/>
-        </p:spPr>
-        <p:txBody>
-          <a:bodyPr wrap="square" lIns="0" tIns="0" rIns="0" bIns="0" rtlCol="0" anchor="ctr"/>
-          <a:lstStyle/>
-          <a:p>
-            <a:pPr algn="l" indent="0" marL="0">
-              <a:lnSpc>
-                <a:spcPct val="90000"/>
-              </a:lnSpc>
-              <a:buNone/>
-            </a:pPr>
-            <a:r>
-              <a:rPr lang="en-US" sz="1400" b="1" dirty="0">
-                <a:solidFill>
-                  <a:srgbClr val="276B3C"/>
-                </a:solidFill>
-                <a:latin typeface="Meiryo" pitchFamily="34" charset="0"/>
-                <a:ea typeface="Meiryo" pitchFamily="34" charset="-122"/>
-                <a:cs typeface="Meiryo" pitchFamily="34" charset="-120"/>
-              </a:rPr>
-              <a:t>1,190名</a:t>
-            </a:r>
-            <a:pPr algn="l" indent="0" marL="0">
-              <a:lnSpc>
-                <a:spcPct val="90000"/>
-              </a:lnSpc>
-              <a:buNone/>
-            </a:pPr>
-            <a:r>
-              <a:rPr lang="en-US" sz="1050" dirty="0">
-                <a:solidFill>
-                  <a:srgbClr val="276B3C"/>
-                </a:solidFill>
-                <a:latin typeface="Meiryo" pitchFamily="34" charset="0"/>
-                <a:ea typeface="Meiryo" pitchFamily="34" charset="-122"/>
-                <a:cs typeface="Meiryo" pitchFamily="34" charset="-120"/>
-              </a:rPr>
-              <a:t>  35.1%</a:t>
-            </a:r>
-            <a:pPr algn="l" indent="0" marL="0">
-              <a:lnSpc>
-                <a:spcPct val="90000"/>
-              </a:lnSpc>
-              <a:buNone/>
-            </a:pPr>
-            <a:endParaRPr lang="en-US" sz="1400" dirty="0"/>
-          </a:p>
-          <a:p>
-            <a:pPr algn="l" indent="0" marL="0">
-              <a:lnSpc>
-                <a:spcPct val="90000"/>
-              </a:lnSpc>
-              <a:buNone/>
-            </a:pPr>
-            <a:r>
-              <a:rPr lang="en-US" sz="900" b="1" i="1" dirty="0">
-                <a:solidFill>
-                  <a:srgbClr val="276B3C"/>
-                </a:solidFill>
-                <a:latin typeface="Meiryo" pitchFamily="34" charset="0"/>
-                <a:ea typeface="Meiryo" pitchFamily="34" charset="-122"/>
-                <a:cs typeface="Meiryo" pitchFamily="34" charset="-120"/>
-              </a:rPr>
-              <a:t>計画1,000名を上回る</a:t>
-            </a:r>
-            <a:endParaRPr lang="en-US" sz="1400" dirty="0"/>
-          </a:p>
-        </p:txBody>
-      </p:sp>
-      <p:sp>
-        <p:nvSpPr>
-          <p:cNvPr id="33" name="Shape 31"/>
-          <p:cNvSpPr/>
-          <p:nvPr/>
-        </p:nvSpPr>
-        <p:spPr>
-          <a:xfrm>
-            <a:off x="7269480" y="2011680"/>
-            <a:ext cx="4645152" cy="365760"/>
-          </a:xfrm>
-          <a:prstGeom prst="rect">
-            <a:avLst/>
-          </a:prstGeom>
-          <a:solidFill>
-            <a:srgbClr val="369E51"/>
-          </a:solidFill>
-          <a:ln/>
-        </p:spPr>
-      </p:sp>
-      <p:sp>
-        <p:nvSpPr>
-          <p:cNvPr id="34" name="Text 32"/>
-          <p:cNvSpPr txBox="1"/>
-          <p:nvPr/>
-        </p:nvSpPr>
-        <p:spPr>
-          <a:xfrm>
-            <a:off x="7360920" y="2011680"/>
-            <a:ext cx="4462272" cy="365760"/>
-          </a:xfrm>
-          <a:prstGeom prst="rect">
-            <a:avLst/>
-          </a:prstGeom>
-          <a:noFill/>
-          <a:ln/>
-        </p:spPr>
-        <p:txBody>
-          <a:bodyPr wrap="square" lIns="0" tIns="0" rIns="0" bIns="0" rtlCol="0" anchor="ctr"/>
-          <a:lstStyle/>
-          <a:p>
-            <a:pPr indent="0" marL="0">
-              <a:buNone/>
-            </a:pPr>
-            <a:r>
-              <a:rPr lang="en-US" sz="1250" b="1" dirty="0">
-                <a:solidFill>
-                  <a:srgbClr val="FFFFFF"/>
-                </a:solidFill>
-                <a:latin typeface="Meiryo" pitchFamily="34" charset="0"/>
-                <a:ea typeface="Meiryo" pitchFamily="34" charset="-122"/>
-                <a:cs typeface="Meiryo" pitchFamily="34" charset="-120"/>
-              </a:rPr>
-              <a:t>フィルタ定義（4条件のAND）</a:t>
-            </a:r>
-            <a:endParaRPr lang="en-US" sz="1250" dirty="0"/>
-          </a:p>
-        </p:txBody>
-      </p:sp>
-      <p:sp>
-        <p:nvSpPr>
-          <p:cNvPr id="35" name="Shape 33"/>
-          <p:cNvSpPr/>
-          <p:nvPr/>
-        </p:nvSpPr>
-        <p:spPr>
-          <a:xfrm>
-            <a:off x="7269480" y="2377440"/>
-            <a:ext cx="4645152" cy="1901952"/>
+            <a:off x="7635240" y="5943600"/>
+            <a:ext cx="4279392" cy="493776"/>
           </a:xfrm>
           <a:prstGeom prst="rect">
             <a:avLst/>
@@ -2304,75 +2830,14 @@
       </p:sp>
       <p:sp>
         <p:nvSpPr>
-          <p:cNvPr id="36" name="Shape 34"/>
-          <p:cNvSpPr/>
-          <p:nvPr/>
-        </p:nvSpPr>
-        <p:spPr>
-          <a:xfrm>
-            <a:off x="7424928" y="2487168"/>
-            <a:ext cx="822960" cy="310896"/>
-          </a:xfrm>
-          <a:prstGeom prst="roundRect">
-            <a:avLst>
-              <a:gd name="adj" fmla="val 11765"/>
-            </a:avLst>
-          </a:prstGeom>
-          <a:solidFill>
-            <a:srgbClr val="369E51"/>
-          </a:solidFill>
-          <a:ln/>
-        </p:spPr>
-      </p:sp>
-      <p:sp>
-        <p:nvSpPr>
-          <p:cNvPr id="37" name="Text 35"/>
-          <p:cNvSpPr txBox="1"/>
-          <p:nvPr/>
-        </p:nvSpPr>
-        <p:spPr>
-          <a:xfrm>
-            <a:off x="7424928" y="2487168"/>
-            <a:ext cx="822960" cy="310896"/>
-          </a:xfrm>
-          <a:prstGeom prst="rect">
-            <a:avLst/>
-          </a:prstGeom>
-          <a:noFill/>
-          <a:ln/>
-        </p:spPr>
-        <p:txBody>
-          <a:bodyPr wrap="square" lIns="0" tIns="0" rIns="0" bIns="0" rtlCol="0" anchor="ctr"/>
-          <a:lstStyle/>
-          <a:p>
-            <a:pPr algn="ctr" indent="0" marL="0">
-              <a:buNone/>
-            </a:pPr>
-            <a:r>
-              <a:rPr lang="en-US" sz="1050" b="1" dirty="0">
-                <a:solidFill>
-                  <a:srgbClr val="FFFFFF"/>
-                </a:solidFill>
-                <a:latin typeface="Meiryo" pitchFamily="34" charset="0"/>
-                <a:ea typeface="Meiryo" pitchFamily="34" charset="-122"/>
-                <a:cs typeface="Meiryo" pitchFamily="34" charset="-120"/>
-              </a:rPr>
-              <a:t>① 基礎</a:t>
-            </a:r>
-            <a:endParaRPr lang="en-US" sz="1050" dirty="0"/>
-          </a:p>
-        </p:txBody>
-      </p:sp>
-      <p:sp>
-        <p:nvSpPr>
-          <p:cNvPr id="38" name="Text 36"/>
-          <p:cNvSpPr txBox="1"/>
-          <p:nvPr/>
-        </p:nvSpPr>
-        <p:spPr>
-          <a:xfrm>
-            <a:off x="8339328" y="2459736"/>
-            <a:ext cx="3456432" cy="402336"/>
+          <p:cNvPr id="53" name="Text 51"/>
+          <p:cNvSpPr txBox="1"/>
+          <p:nvPr/>
+        </p:nvSpPr>
+        <p:spPr>
+          <a:xfrm>
+            <a:off x="7754112" y="5943600"/>
+            <a:ext cx="4069080" cy="493776"/>
           </a:xfrm>
           <a:prstGeom prst="rect">
             <a:avLst/>
@@ -2391,102 +2856,16 @@
               <a:buNone/>
             </a:pPr>
             <a:r>
-              <a:rPr lang="en-US" sz="980" dirty="0">
-                <a:solidFill>
-                  <a:srgbClr val="333333"/>
-                </a:solidFill>
-                <a:latin typeface="Meiryo" pitchFamily="34" charset="0"/>
-                <a:ea typeface="Meiryo" pitchFamily="34" charset="-122"/>
-                <a:cs typeface="Meiryo" pitchFamily="34" charset="-120"/>
-              </a:rPr>
-              <a:t>基礎15スキル中、P2（基本的な実践経験あり）以上を 8個以上</a:t>
-            </a:r>
-            <a:endParaRPr lang="en-US" sz="980" dirty="0"/>
-          </a:p>
-        </p:txBody>
-      </p:sp>
-      <p:sp>
-        <p:nvSpPr>
-          <p:cNvPr id="39" name="Shape 37"/>
-          <p:cNvSpPr/>
-          <p:nvPr/>
-        </p:nvSpPr>
-        <p:spPr>
-          <a:xfrm>
-            <a:off x="7424928" y="2926080"/>
-            <a:ext cx="822960" cy="310896"/>
-          </a:xfrm>
-          <a:prstGeom prst="roundRect">
-            <a:avLst>
-              <a:gd name="adj" fmla="val 11765"/>
-            </a:avLst>
-          </a:prstGeom>
-          <a:solidFill>
-            <a:srgbClr val="369E51"/>
-          </a:solidFill>
-          <a:ln/>
-        </p:spPr>
-      </p:sp>
-      <p:sp>
-        <p:nvSpPr>
-          <p:cNvPr id="40" name="Text 38"/>
-          <p:cNvSpPr txBox="1"/>
-          <p:nvPr/>
-        </p:nvSpPr>
-        <p:spPr>
-          <a:xfrm>
-            <a:off x="7424928" y="2926080"/>
-            <a:ext cx="822960" cy="310896"/>
-          </a:xfrm>
-          <a:prstGeom prst="rect">
-            <a:avLst/>
-          </a:prstGeom>
-          <a:noFill/>
-          <a:ln/>
-        </p:spPr>
-        <p:txBody>
-          <a:bodyPr wrap="square" lIns="0" tIns="0" rIns="0" bIns="0" rtlCol="0" anchor="ctr"/>
-          <a:lstStyle/>
-          <a:p>
-            <a:pPr algn="ctr" indent="0" marL="0">
-              <a:buNone/>
-            </a:pPr>
-            <a:r>
-              <a:rPr lang="en-US" sz="1050" b="1" dirty="0">
-                <a:solidFill>
-                  <a:srgbClr val="FFFFFF"/>
-                </a:solidFill>
-                <a:latin typeface="Meiryo" pitchFamily="34" charset="0"/>
-                <a:ea typeface="Meiryo" pitchFamily="34" charset="-122"/>
-                <a:cs typeface="Meiryo" pitchFamily="34" charset="-120"/>
-              </a:rPr>
-              <a:t>② 専門</a:t>
-            </a:r>
-            <a:endParaRPr lang="en-US" sz="1050" dirty="0"/>
-          </a:p>
-        </p:txBody>
-      </p:sp>
-      <p:sp>
-        <p:nvSpPr>
-          <p:cNvPr id="41" name="Text 39"/>
-          <p:cNvSpPr txBox="1"/>
-          <p:nvPr/>
-        </p:nvSpPr>
-        <p:spPr>
-          <a:xfrm>
-            <a:off x="8339328" y="2898648"/>
-            <a:ext cx="3456432" cy="402336"/>
-          </a:xfrm>
-          <a:prstGeom prst="rect">
-            <a:avLst/>
-          </a:prstGeom>
-          <a:noFill/>
-          <a:ln/>
-        </p:spPr>
-        <p:txBody>
-          <a:bodyPr wrap="square" lIns="0" tIns="0" rIns="0" bIns="0" rtlCol="0" anchor="ctr"/>
-          <a:lstStyle/>
-          <a:p>
+              <a:rPr lang="en-US" sz="900" b="1" dirty="0">
+                <a:solidFill>
+                  <a:srgbClr val="276B3C"/>
+                </a:solidFill>
+                <a:latin typeface="Meiryo" pitchFamily="34" charset="0"/>
+                <a:ea typeface="Meiryo" pitchFamily="34" charset="-122"/>
+                <a:cs typeface="Meiryo" pitchFamily="34" charset="-120"/>
+              </a:rPr>
+              <a:t>感度（④の幅）：</a:t>
+            </a:r>
             <a:pPr indent="0" marL="0">
               <a:lnSpc>
                 <a:spcPct val="95000"/>
@@ -2494,7 +2873,7 @@
               <a:buNone/>
             </a:pPr>
             <a:r>
-              <a:rPr lang="en-US" sz="980" dirty="0">
+              <a:rPr lang="en-US" sz="900" dirty="0">
                 <a:solidFill>
                   <a:srgbClr val="333333"/>
                 </a:solidFill>
@@ -2502,94 +2881,8 @@
                 <a:ea typeface="Meiryo" pitchFamily="34" charset="-122"/>
                 <a:cs typeface="Meiryo" pitchFamily="34" charset="-120"/>
               </a:rPr>
-              <a:t>専門42スキル中、P2以上を 1個以上（専門に着手）</a:t>
-            </a:r>
-            <a:endParaRPr lang="en-US" sz="980" dirty="0"/>
-          </a:p>
-        </p:txBody>
-      </p:sp>
-      <p:sp>
-        <p:nvSpPr>
-          <p:cNvPr id="42" name="Shape 40"/>
-          <p:cNvSpPr/>
-          <p:nvPr/>
-        </p:nvSpPr>
-        <p:spPr>
-          <a:xfrm>
-            <a:off x="7424928" y="3364992"/>
-            <a:ext cx="822960" cy="310896"/>
-          </a:xfrm>
-          <a:prstGeom prst="roundRect">
-            <a:avLst>
-              <a:gd name="adj" fmla="val 11765"/>
-            </a:avLst>
-          </a:prstGeom>
-          <a:solidFill>
-            <a:srgbClr val="369E51"/>
-          </a:solidFill>
-          <a:ln/>
-        </p:spPr>
-      </p:sp>
-      <p:sp>
-        <p:nvSpPr>
-          <p:cNvPr id="43" name="Text 41"/>
-          <p:cNvSpPr txBox="1"/>
-          <p:nvPr/>
-        </p:nvSpPr>
-        <p:spPr>
-          <a:xfrm>
-            <a:off x="7424928" y="3364992"/>
-            <a:ext cx="822960" cy="310896"/>
-          </a:xfrm>
-          <a:prstGeom prst="rect">
-            <a:avLst/>
-          </a:prstGeom>
-          <a:noFill/>
-          <a:ln/>
-        </p:spPr>
-        <p:txBody>
-          <a:bodyPr wrap="square" lIns="0" tIns="0" rIns="0" bIns="0" rtlCol="0" anchor="ctr"/>
-          <a:lstStyle/>
-          <a:p>
-            <a:pPr algn="ctr" indent="0" marL="0">
-              <a:buNone/>
-            </a:pPr>
-            <a:r>
-              <a:rPr lang="en-US" sz="1050" b="1" dirty="0">
-                <a:solidFill>
-                  <a:srgbClr val="FFFFFF"/>
-                </a:solidFill>
-                <a:latin typeface="Meiryo" pitchFamily="34" charset="0"/>
-                <a:ea typeface="Meiryo" pitchFamily="34" charset="-122"/>
-                <a:cs typeface="Meiryo" pitchFamily="34" charset="-120"/>
-              </a:rPr>
-              <a:t>③ 幅</a:t>
-            </a:r>
-            <a:endParaRPr lang="en-US" sz="1050" dirty="0"/>
-          </a:p>
-        </p:txBody>
-      </p:sp>
-      <p:sp>
-        <p:nvSpPr>
-          <p:cNvPr id="44" name="Text 42"/>
-          <p:cNvSpPr txBox="1"/>
-          <p:nvPr/>
-        </p:nvSpPr>
-        <p:spPr>
-          <a:xfrm>
-            <a:off x="8339328" y="3337560"/>
-            <a:ext cx="3456432" cy="402336"/>
-          </a:xfrm>
-          <a:prstGeom prst="rect">
-            <a:avLst/>
-          </a:prstGeom>
-          <a:noFill/>
-          <a:ln/>
-        </p:spPr>
-        <p:txBody>
-          <a:bodyPr wrap="square" lIns="0" tIns="0" rIns="0" bIns="0" rtlCol="0" anchor="ctr"/>
-          <a:lstStyle/>
-          <a:p>
+              <a:t>×2個→1,257／</a:t>
+            </a:r>
             <a:pPr indent="0" marL="0">
               <a:lnSpc>
                 <a:spcPct val="95000"/>
@@ -2597,7 +2890,7 @@
               <a:buNone/>
             </a:pPr>
             <a:r>
-              <a:rPr lang="en-US" sz="980" dirty="0">
+              <a:rPr lang="en-US" sz="900" b="1" dirty="0">
                 <a:solidFill>
                   <a:srgbClr val="333333"/>
                 </a:solidFill>
@@ -2605,94 +2898,8 @@
                 <a:ea typeface="Meiryo" pitchFamily="34" charset="-122"/>
                 <a:cs typeface="Meiryo" pitchFamily="34" charset="-120"/>
               </a:rPr>
-              <a:t>専門42スキル中、P2以上を 3個以上（複数領域で実践）</a:t>
-            </a:r>
-            <a:endParaRPr lang="en-US" sz="980" dirty="0"/>
-          </a:p>
-        </p:txBody>
-      </p:sp>
-      <p:sp>
-        <p:nvSpPr>
-          <p:cNvPr id="45" name="Shape 43"/>
-          <p:cNvSpPr/>
-          <p:nvPr/>
-        </p:nvSpPr>
-        <p:spPr>
-          <a:xfrm>
-            <a:off x="7424928" y="3803904"/>
-            <a:ext cx="822960" cy="310896"/>
-          </a:xfrm>
-          <a:prstGeom prst="roundRect">
-            <a:avLst>
-              <a:gd name="adj" fmla="val 11765"/>
-            </a:avLst>
-          </a:prstGeom>
-          <a:solidFill>
-            <a:srgbClr val="369E51"/>
-          </a:solidFill>
-          <a:ln/>
-        </p:spPr>
-      </p:sp>
-      <p:sp>
-        <p:nvSpPr>
-          <p:cNvPr id="46" name="Text 44"/>
-          <p:cNvSpPr txBox="1"/>
-          <p:nvPr/>
-        </p:nvSpPr>
-        <p:spPr>
-          <a:xfrm>
-            <a:off x="7424928" y="3803904"/>
-            <a:ext cx="822960" cy="310896"/>
-          </a:xfrm>
-          <a:prstGeom prst="rect">
-            <a:avLst/>
-          </a:prstGeom>
-          <a:noFill/>
-          <a:ln/>
-        </p:spPr>
-        <p:txBody>
-          <a:bodyPr wrap="square" lIns="0" tIns="0" rIns="0" bIns="0" rtlCol="0" anchor="ctr"/>
-          <a:lstStyle/>
-          <a:p>
-            <a:pPr algn="ctr" indent="0" marL="0">
-              <a:buNone/>
-            </a:pPr>
-            <a:r>
-              <a:rPr lang="en-US" sz="1050" b="1" dirty="0">
-                <a:solidFill>
-                  <a:srgbClr val="FFFFFF"/>
-                </a:solidFill>
-                <a:latin typeface="Meiryo" pitchFamily="34" charset="0"/>
-                <a:ea typeface="Meiryo" pitchFamily="34" charset="-122"/>
-                <a:cs typeface="Meiryo" pitchFamily="34" charset="-120"/>
-              </a:rPr>
-              <a:t>④ 役割</a:t>
-            </a:r>
-            <a:endParaRPr lang="en-US" sz="1050" dirty="0"/>
-          </a:p>
-        </p:txBody>
-      </p:sp>
-      <p:sp>
-        <p:nvSpPr>
-          <p:cNvPr id="47" name="Text 45"/>
-          <p:cNvSpPr txBox="1"/>
-          <p:nvPr/>
-        </p:nvSpPr>
-        <p:spPr>
-          <a:xfrm>
-            <a:off x="8339328" y="3776472"/>
-            <a:ext cx="3456432" cy="402336"/>
-          </a:xfrm>
-          <a:prstGeom prst="rect">
-            <a:avLst/>
-          </a:prstGeom>
-          <a:noFill/>
-          <a:ln/>
-        </p:spPr>
-        <p:txBody>
-          <a:bodyPr wrap="square" lIns="0" tIns="0" rIns="0" bIns="0" rtlCol="0" anchor="ctr"/>
-          <a:lstStyle/>
-          <a:p>
+              <a:t>×3個→1,190（推奨）</a:t>
+            </a:r>
             <a:pPr indent="0" marL="0">
               <a:lnSpc>
                 <a:spcPct val="95000"/>
@@ -2700,7 +2907,7 @@
               <a:buNone/>
             </a:pPr>
             <a:r>
-              <a:rPr lang="en-US" sz="980" dirty="0">
+              <a:rPr lang="en-US" sz="900" dirty="0">
                 <a:solidFill>
                   <a:srgbClr val="333333"/>
                 </a:solidFill>
@@ -2708,757 +2915,15 @@
                 <a:ea typeface="Meiryo" pitchFamily="34" charset="-122"/>
                 <a:cs typeface="Meiryo" pitchFamily="34" charset="-120"/>
               </a:rPr>
-              <a:t>重点4ロールのいずれかに適合（シグネチャ 2個以上）</a:t>
-            </a:r>
-            <a:endParaRPr lang="en-US" sz="980" dirty="0"/>
-          </a:p>
-        </p:txBody>
-      </p:sp>
-      <p:sp>
-        <p:nvSpPr>
-          <p:cNvPr id="48" name="Shape 46"/>
-          <p:cNvSpPr/>
-          <p:nvPr/>
-        </p:nvSpPr>
-        <p:spPr>
-          <a:xfrm>
-            <a:off x="7269480" y="4407408"/>
-            <a:ext cx="4645152" cy="365760"/>
-          </a:xfrm>
-          <a:prstGeom prst="rect">
-            <a:avLst/>
-          </a:prstGeom>
-          <a:solidFill>
-            <a:srgbClr val="369E51"/>
-          </a:solidFill>
-          <a:ln/>
-        </p:spPr>
-      </p:sp>
-      <p:sp>
-        <p:nvSpPr>
-          <p:cNvPr id="49" name="Text 47"/>
-          <p:cNvSpPr txBox="1"/>
-          <p:nvPr/>
-        </p:nvSpPr>
-        <p:spPr>
-          <a:xfrm>
-            <a:off x="7360920" y="4407408"/>
-            <a:ext cx="4462272" cy="365760"/>
-          </a:xfrm>
-          <a:prstGeom prst="rect">
-            <a:avLst/>
-          </a:prstGeom>
-          <a:noFill/>
-          <a:ln/>
-        </p:spPr>
-        <p:txBody>
-          <a:bodyPr wrap="square" lIns="0" tIns="0" rIns="0" bIns="0" rtlCol="0" anchor="ctr"/>
-          <a:lstStyle/>
-          <a:p>
-            <a:pPr indent="0" marL="0">
-              <a:buNone/>
-            </a:pPr>
-            <a:r>
-              <a:rPr lang="en-US" sz="1250" b="1" dirty="0">
-                <a:solidFill>
-                  <a:srgbClr val="FFFFFF"/>
-                </a:solidFill>
-                <a:latin typeface="Meiryo" pitchFamily="34" charset="0"/>
-                <a:ea typeface="Meiryo" pitchFamily="34" charset="-122"/>
-                <a:cs typeface="Meiryo" pitchFamily="34" charset="-120"/>
-              </a:rPr>
-              <a:t>着地の感度（ロール条件ONのまま③を可変）</a:t>
-            </a:r>
-            <a:endParaRPr lang="en-US" sz="1250" dirty="0"/>
-          </a:p>
-        </p:txBody>
-      </p:sp>
-      <p:sp>
-        <p:nvSpPr>
-          <p:cNvPr id="50" name="Shape 48"/>
-          <p:cNvSpPr/>
-          <p:nvPr/>
-        </p:nvSpPr>
-        <p:spPr>
-          <a:xfrm>
-            <a:off x="7269480" y="4773168"/>
-            <a:ext cx="4645152" cy="1627632"/>
-          </a:xfrm>
-          <a:prstGeom prst="rect">
-            <a:avLst/>
-          </a:prstGeom>
-          <a:solidFill>
-            <a:srgbClr val="FFFFFF"/>
-          </a:solidFill>
-          <a:ln w="9525">
-            <a:solidFill>
-              <a:srgbClr val="D7DBD9"/>
-            </a:solidFill>
-            <a:prstDash val="solid"/>
-          </a:ln>
-        </p:spPr>
-      </p:sp>
-      <p:sp>
-        <p:nvSpPr>
-          <p:cNvPr id="51" name="Text 49"/>
-          <p:cNvSpPr txBox="1"/>
-          <p:nvPr/>
-        </p:nvSpPr>
-        <p:spPr>
-          <a:xfrm>
-            <a:off x="7424928" y="4864608"/>
-            <a:ext cx="2651760" cy="265176"/>
-          </a:xfrm>
-          <a:prstGeom prst="rect">
-            <a:avLst/>
-          </a:prstGeom>
-          <a:noFill/>
-          <a:ln/>
-        </p:spPr>
-        <p:txBody>
-          <a:bodyPr wrap="square" lIns="0" tIns="0" rIns="0" bIns="0" rtlCol="0" anchor="ctr"/>
-          <a:lstStyle/>
-          <a:p>
-            <a:pPr indent="0" marL="0">
-              <a:buNone/>
-            </a:pPr>
-            <a:r>
-              <a:rPr lang="en-US" sz="950" b="1" dirty="0">
-                <a:solidFill>
-                  <a:srgbClr val="58595B"/>
-                </a:solidFill>
-                <a:latin typeface="Meiryo" pitchFamily="34" charset="0"/>
-                <a:ea typeface="Meiryo" pitchFamily="34" charset="-122"/>
-                <a:cs typeface="Meiryo" pitchFamily="34" charset="-120"/>
-              </a:rPr>
-              <a:t>③の閾値（専門P2以上の個数）</a:t>
-            </a:r>
-            <a:endParaRPr lang="en-US" sz="950" dirty="0"/>
-          </a:p>
-        </p:txBody>
-      </p:sp>
-      <p:sp>
-        <p:nvSpPr>
-          <p:cNvPr id="52" name="Text 50"/>
-          <p:cNvSpPr txBox="1"/>
-          <p:nvPr/>
-        </p:nvSpPr>
-        <p:spPr>
-          <a:xfrm>
-            <a:off x="10058400" y="4864608"/>
-            <a:ext cx="1005840" cy="265176"/>
-          </a:xfrm>
-          <a:prstGeom prst="rect">
-            <a:avLst/>
-          </a:prstGeom>
-          <a:noFill/>
-          <a:ln/>
-        </p:spPr>
-        <p:txBody>
-          <a:bodyPr wrap="square" lIns="0" tIns="0" rIns="0" bIns="0" rtlCol="0" anchor="ctr"/>
-          <a:lstStyle/>
-          <a:p>
-            <a:pPr algn="r" indent="0" marL="0">
-              <a:buNone/>
-            </a:pPr>
-            <a:r>
-              <a:rPr lang="en-US" sz="950" b="1" dirty="0">
-                <a:solidFill>
-                  <a:srgbClr val="58595B"/>
-                </a:solidFill>
-                <a:latin typeface="Meiryo" pitchFamily="34" charset="0"/>
-                <a:ea typeface="Meiryo" pitchFamily="34" charset="-122"/>
-                <a:cs typeface="Meiryo" pitchFamily="34" charset="-120"/>
-              </a:rPr>
-              <a:t>着地人数</a:t>
-            </a:r>
-            <a:endParaRPr lang="en-US" sz="950" dirty="0"/>
-          </a:p>
-        </p:txBody>
-      </p:sp>
-      <p:sp>
-        <p:nvSpPr>
-          <p:cNvPr id="53" name="Text 51"/>
-          <p:cNvSpPr txBox="1"/>
-          <p:nvPr/>
-        </p:nvSpPr>
-        <p:spPr>
-          <a:xfrm>
-            <a:off x="11064240" y="4864608"/>
-            <a:ext cx="731520" cy="265176"/>
-          </a:xfrm>
-          <a:prstGeom prst="rect">
-            <a:avLst/>
-          </a:prstGeom>
-          <a:noFill/>
-          <a:ln/>
-        </p:spPr>
-        <p:txBody>
-          <a:bodyPr wrap="square" lIns="0" tIns="0" rIns="0" bIns="0" rtlCol="0" anchor="ctr"/>
-          <a:lstStyle/>
-          <a:p>
-            <a:pPr algn="r" indent="0" marL="0">
-              <a:buNone/>
-            </a:pPr>
-            <a:r>
-              <a:rPr lang="en-US" sz="950" b="1" dirty="0">
-                <a:solidFill>
-                  <a:srgbClr val="58595B"/>
-                </a:solidFill>
-                <a:latin typeface="Meiryo" pitchFamily="34" charset="0"/>
-                <a:ea typeface="Meiryo" pitchFamily="34" charset="-122"/>
-                <a:cs typeface="Meiryo" pitchFamily="34" charset="-120"/>
-              </a:rPr>
-              <a:t>全体比</a:t>
-            </a:r>
-            <a:endParaRPr lang="en-US" sz="950" dirty="0"/>
+              <a:t>／×4個→1,084名</a:t>
+            </a:r>
+            <a:endParaRPr lang="en-US" sz="900" dirty="0"/>
           </a:p>
         </p:txBody>
       </p:sp>
       <p:sp>
         <p:nvSpPr>
           <p:cNvPr id="54" name="Text 52"/>
-          <p:cNvSpPr txBox="1"/>
-          <p:nvPr/>
-        </p:nvSpPr>
-        <p:spPr>
-          <a:xfrm>
-            <a:off x="7424928" y="5166360"/>
-            <a:ext cx="2651760" cy="265176"/>
-          </a:xfrm>
-          <a:prstGeom prst="rect">
-            <a:avLst/>
-          </a:prstGeom>
-          <a:noFill/>
-          <a:ln/>
-        </p:spPr>
-        <p:txBody>
-          <a:bodyPr wrap="square" lIns="0" tIns="0" rIns="0" bIns="0" rtlCol="0" anchor="ctr"/>
-          <a:lstStyle/>
-          <a:p>
-            <a:pPr indent="0" marL="0">
-              <a:buNone/>
-            </a:pPr>
-            <a:r>
-              <a:rPr lang="en-US" sz="950" dirty="0">
-                <a:solidFill>
-                  <a:srgbClr val="333333"/>
-                </a:solidFill>
-                <a:latin typeface="Meiryo" pitchFamily="34" charset="0"/>
-                <a:ea typeface="Meiryo" pitchFamily="34" charset="-122"/>
-                <a:cs typeface="Meiryo" pitchFamily="34" charset="-120"/>
-              </a:rPr>
-              <a:t>×2個以上（緩め）</a:t>
-            </a:r>
-            <a:endParaRPr lang="en-US" sz="950" dirty="0"/>
-          </a:p>
-        </p:txBody>
-      </p:sp>
-      <p:sp>
-        <p:nvSpPr>
-          <p:cNvPr id="55" name="Text 53"/>
-          <p:cNvSpPr txBox="1"/>
-          <p:nvPr/>
-        </p:nvSpPr>
-        <p:spPr>
-          <a:xfrm>
-            <a:off x="10058400" y="5166360"/>
-            <a:ext cx="1005840" cy="265176"/>
-          </a:xfrm>
-          <a:prstGeom prst="rect">
-            <a:avLst/>
-          </a:prstGeom>
-          <a:noFill/>
-          <a:ln/>
-        </p:spPr>
-        <p:txBody>
-          <a:bodyPr wrap="square" lIns="0" tIns="0" rIns="0" bIns="0" rtlCol="0" anchor="ctr"/>
-          <a:lstStyle/>
-          <a:p>
-            <a:pPr algn="r" indent="0" marL="0">
-              <a:buNone/>
-            </a:pPr>
-            <a:r>
-              <a:rPr lang="en-US" sz="950" dirty="0">
-                <a:solidFill>
-                  <a:srgbClr val="333333"/>
-                </a:solidFill>
-                <a:latin typeface="Meiryo" pitchFamily="34" charset="0"/>
-                <a:ea typeface="Meiryo" pitchFamily="34" charset="-122"/>
-                <a:cs typeface="Meiryo" pitchFamily="34" charset="-120"/>
-              </a:rPr>
-              <a:t>1,257名</a:t>
-            </a:r>
-            <a:endParaRPr lang="en-US" sz="950" dirty="0"/>
-          </a:p>
-        </p:txBody>
-      </p:sp>
-      <p:sp>
-        <p:nvSpPr>
-          <p:cNvPr id="56" name="Text 54"/>
-          <p:cNvSpPr txBox="1"/>
-          <p:nvPr/>
-        </p:nvSpPr>
-        <p:spPr>
-          <a:xfrm>
-            <a:off x="11064240" y="5166360"/>
-            <a:ext cx="731520" cy="265176"/>
-          </a:xfrm>
-          <a:prstGeom prst="rect">
-            <a:avLst/>
-          </a:prstGeom>
-          <a:noFill/>
-          <a:ln/>
-        </p:spPr>
-        <p:txBody>
-          <a:bodyPr wrap="square" lIns="0" tIns="0" rIns="0" bIns="0" rtlCol="0" anchor="ctr"/>
-          <a:lstStyle/>
-          <a:p>
-            <a:pPr algn="r" indent="0" marL="0">
-              <a:buNone/>
-            </a:pPr>
-            <a:r>
-              <a:rPr lang="en-US" sz="950" dirty="0">
-                <a:solidFill>
-                  <a:srgbClr val="333333"/>
-                </a:solidFill>
-                <a:latin typeface="Meiryo" pitchFamily="34" charset="0"/>
-                <a:ea typeface="Meiryo" pitchFamily="34" charset="-122"/>
-                <a:cs typeface="Meiryo" pitchFamily="34" charset="-120"/>
-              </a:rPr>
-              <a:t>37.0%</a:t>
-            </a:r>
-            <a:endParaRPr lang="en-US" sz="950" dirty="0"/>
-          </a:p>
-        </p:txBody>
-      </p:sp>
-      <p:sp>
-        <p:nvSpPr>
-          <p:cNvPr id="57" name="Shape 55"/>
-          <p:cNvSpPr/>
-          <p:nvPr/>
-        </p:nvSpPr>
-        <p:spPr>
-          <a:xfrm>
-            <a:off x="7360920" y="5449824"/>
-            <a:ext cx="4462272" cy="265176"/>
-          </a:xfrm>
-          <a:prstGeom prst="rect">
-            <a:avLst/>
-          </a:prstGeom>
-          <a:solidFill>
-            <a:srgbClr val="EAF6EE"/>
-          </a:solidFill>
-          <a:ln/>
-        </p:spPr>
-      </p:sp>
-      <p:sp>
-        <p:nvSpPr>
-          <p:cNvPr id="58" name="Text 56"/>
-          <p:cNvSpPr txBox="1"/>
-          <p:nvPr/>
-        </p:nvSpPr>
-        <p:spPr>
-          <a:xfrm>
-            <a:off x="7424928" y="5468112"/>
-            <a:ext cx="2651760" cy="265176"/>
-          </a:xfrm>
-          <a:prstGeom prst="rect">
-            <a:avLst/>
-          </a:prstGeom>
-          <a:noFill/>
-          <a:ln/>
-        </p:spPr>
-        <p:txBody>
-          <a:bodyPr wrap="square" lIns="0" tIns="0" rIns="0" bIns="0" rtlCol="0" anchor="ctr"/>
-          <a:lstStyle/>
-          <a:p>
-            <a:pPr indent="0" marL="0">
-              <a:buNone/>
-            </a:pPr>
-            <a:r>
-              <a:rPr lang="en-US" sz="950" b="1" dirty="0">
-                <a:solidFill>
-                  <a:srgbClr val="276B3C"/>
-                </a:solidFill>
-                <a:latin typeface="Meiryo" pitchFamily="34" charset="0"/>
-                <a:ea typeface="Meiryo" pitchFamily="34" charset="-122"/>
-                <a:cs typeface="Meiryo" pitchFamily="34" charset="-120"/>
-              </a:rPr>
-              <a:t>×3個以上（推奨）</a:t>
-            </a:r>
-            <a:endParaRPr lang="en-US" sz="950" dirty="0"/>
-          </a:p>
-        </p:txBody>
-      </p:sp>
-      <p:sp>
-        <p:nvSpPr>
-          <p:cNvPr id="59" name="Text 57"/>
-          <p:cNvSpPr txBox="1"/>
-          <p:nvPr/>
-        </p:nvSpPr>
-        <p:spPr>
-          <a:xfrm>
-            <a:off x="10058400" y="5468112"/>
-            <a:ext cx="1005840" cy="265176"/>
-          </a:xfrm>
-          <a:prstGeom prst="rect">
-            <a:avLst/>
-          </a:prstGeom>
-          <a:noFill/>
-          <a:ln/>
-        </p:spPr>
-        <p:txBody>
-          <a:bodyPr wrap="square" lIns="0" tIns="0" rIns="0" bIns="0" rtlCol="0" anchor="ctr"/>
-          <a:lstStyle/>
-          <a:p>
-            <a:pPr algn="r" indent="0" marL="0">
-              <a:buNone/>
-            </a:pPr>
-            <a:r>
-              <a:rPr lang="en-US" sz="950" b="1" dirty="0">
-                <a:solidFill>
-                  <a:srgbClr val="276B3C"/>
-                </a:solidFill>
-                <a:latin typeface="Meiryo" pitchFamily="34" charset="0"/>
-                <a:ea typeface="Meiryo" pitchFamily="34" charset="-122"/>
-                <a:cs typeface="Meiryo" pitchFamily="34" charset="-120"/>
-              </a:rPr>
-              <a:t>1,190名</a:t>
-            </a:r>
-            <a:endParaRPr lang="en-US" sz="950" dirty="0"/>
-          </a:p>
-        </p:txBody>
-      </p:sp>
-      <p:sp>
-        <p:nvSpPr>
-          <p:cNvPr id="60" name="Text 58"/>
-          <p:cNvSpPr txBox="1"/>
-          <p:nvPr/>
-        </p:nvSpPr>
-        <p:spPr>
-          <a:xfrm>
-            <a:off x="11064240" y="5468112"/>
-            <a:ext cx="731520" cy="265176"/>
-          </a:xfrm>
-          <a:prstGeom prst="rect">
-            <a:avLst/>
-          </a:prstGeom>
-          <a:noFill/>
-          <a:ln/>
-        </p:spPr>
-        <p:txBody>
-          <a:bodyPr wrap="square" lIns="0" tIns="0" rIns="0" bIns="0" rtlCol="0" anchor="ctr"/>
-          <a:lstStyle/>
-          <a:p>
-            <a:pPr algn="r" indent="0" marL="0">
-              <a:buNone/>
-            </a:pPr>
-            <a:r>
-              <a:rPr lang="en-US" sz="950" b="1" dirty="0">
-                <a:solidFill>
-                  <a:srgbClr val="276B3C"/>
-                </a:solidFill>
-                <a:latin typeface="Meiryo" pitchFamily="34" charset="0"/>
-                <a:ea typeface="Meiryo" pitchFamily="34" charset="-122"/>
-                <a:cs typeface="Meiryo" pitchFamily="34" charset="-120"/>
-              </a:rPr>
-              <a:t>35.1%</a:t>
-            </a:r>
-            <a:endParaRPr lang="en-US" sz="950" dirty="0"/>
-          </a:p>
-        </p:txBody>
-      </p:sp>
-      <p:sp>
-        <p:nvSpPr>
-          <p:cNvPr id="61" name="Text 59"/>
-          <p:cNvSpPr txBox="1"/>
-          <p:nvPr/>
-        </p:nvSpPr>
-        <p:spPr>
-          <a:xfrm>
-            <a:off x="7424928" y="5769864"/>
-            <a:ext cx="2651760" cy="265176"/>
-          </a:xfrm>
-          <a:prstGeom prst="rect">
-            <a:avLst/>
-          </a:prstGeom>
-          <a:noFill/>
-          <a:ln/>
-        </p:spPr>
-        <p:txBody>
-          <a:bodyPr wrap="square" lIns="0" tIns="0" rIns="0" bIns="0" rtlCol="0" anchor="ctr"/>
-          <a:lstStyle/>
-          <a:p>
-            <a:pPr indent="0" marL="0">
-              <a:buNone/>
-            </a:pPr>
-            <a:r>
-              <a:rPr lang="en-US" sz="950" dirty="0">
-                <a:solidFill>
-                  <a:srgbClr val="333333"/>
-                </a:solidFill>
-                <a:latin typeface="Meiryo" pitchFamily="34" charset="0"/>
-                <a:ea typeface="Meiryo" pitchFamily="34" charset="-122"/>
-                <a:cs typeface="Meiryo" pitchFamily="34" charset="-120"/>
-              </a:rPr>
-              <a:t>×4個以上（厳しめ）</a:t>
-            </a:r>
-            <a:endParaRPr lang="en-US" sz="950" dirty="0"/>
-          </a:p>
-        </p:txBody>
-      </p:sp>
-      <p:sp>
-        <p:nvSpPr>
-          <p:cNvPr id="62" name="Text 60"/>
-          <p:cNvSpPr txBox="1"/>
-          <p:nvPr/>
-        </p:nvSpPr>
-        <p:spPr>
-          <a:xfrm>
-            <a:off x="10058400" y="5769864"/>
-            <a:ext cx="1005840" cy="265176"/>
-          </a:xfrm>
-          <a:prstGeom prst="rect">
-            <a:avLst/>
-          </a:prstGeom>
-          <a:noFill/>
-          <a:ln/>
-        </p:spPr>
-        <p:txBody>
-          <a:bodyPr wrap="square" lIns="0" tIns="0" rIns="0" bIns="0" rtlCol="0" anchor="ctr"/>
-          <a:lstStyle/>
-          <a:p>
-            <a:pPr algn="r" indent="0" marL="0">
-              <a:buNone/>
-            </a:pPr>
-            <a:r>
-              <a:rPr lang="en-US" sz="950" dirty="0">
-                <a:solidFill>
-                  <a:srgbClr val="333333"/>
-                </a:solidFill>
-                <a:latin typeface="Meiryo" pitchFamily="34" charset="0"/>
-                <a:ea typeface="Meiryo" pitchFamily="34" charset="-122"/>
-                <a:cs typeface="Meiryo" pitchFamily="34" charset="-120"/>
-              </a:rPr>
-              <a:t>1,084名</a:t>
-            </a:r>
-            <a:endParaRPr lang="en-US" sz="950" dirty="0"/>
-          </a:p>
-        </p:txBody>
-      </p:sp>
-      <p:sp>
-        <p:nvSpPr>
-          <p:cNvPr id="63" name="Text 61"/>
-          <p:cNvSpPr txBox="1"/>
-          <p:nvPr/>
-        </p:nvSpPr>
-        <p:spPr>
-          <a:xfrm>
-            <a:off x="11064240" y="5769864"/>
-            <a:ext cx="731520" cy="265176"/>
-          </a:xfrm>
-          <a:prstGeom prst="rect">
-            <a:avLst/>
-          </a:prstGeom>
-          <a:noFill/>
-          <a:ln/>
-        </p:spPr>
-        <p:txBody>
-          <a:bodyPr wrap="square" lIns="0" tIns="0" rIns="0" bIns="0" rtlCol="0" anchor="ctr"/>
-          <a:lstStyle/>
-          <a:p>
-            <a:pPr algn="r" indent="0" marL="0">
-              <a:buNone/>
-            </a:pPr>
-            <a:r>
-              <a:rPr lang="en-US" sz="950" dirty="0">
-                <a:solidFill>
-                  <a:srgbClr val="333333"/>
-                </a:solidFill>
-                <a:latin typeface="Meiryo" pitchFamily="34" charset="0"/>
-                <a:ea typeface="Meiryo" pitchFamily="34" charset="-122"/>
-                <a:cs typeface="Meiryo" pitchFamily="34" charset="-120"/>
-              </a:rPr>
-              <a:t>31.9%</a:t>
-            </a:r>
-            <a:endParaRPr lang="en-US" sz="950" dirty="0"/>
-          </a:p>
-        </p:txBody>
-      </p:sp>
-      <p:sp>
-        <p:nvSpPr>
-          <p:cNvPr id="64" name="Text 62"/>
-          <p:cNvSpPr txBox="1"/>
-          <p:nvPr/>
-        </p:nvSpPr>
-        <p:spPr>
-          <a:xfrm>
-            <a:off x="7424928" y="6053328"/>
-            <a:ext cx="4389120" cy="310896"/>
-          </a:xfrm>
-          <a:prstGeom prst="rect">
-            <a:avLst/>
-          </a:prstGeom>
-          <a:noFill/>
-          <a:ln/>
-        </p:spPr>
-        <p:txBody>
-          <a:bodyPr wrap="square" lIns="0" tIns="0" rIns="0" bIns="0" rtlCol="0" anchor="ctr"/>
-          <a:lstStyle/>
-          <a:p>
-            <a:pPr indent="0" marL="0">
-              <a:lnSpc>
-                <a:spcPct val="95000"/>
-              </a:lnSpc>
-              <a:buNone/>
-            </a:pPr>
-            <a:r>
-              <a:rPr lang="en-US" sz="860" i="1" dirty="0">
-                <a:solidFill>
-                  <a:srgbClr val="7A7F7C"/>
-                </a:solidFill>
-                <a:latin typeface="Meiryo" pitchFamily="34" charset="0"/>
-                <a:ea typeface="Meiryo" pitchFamily="34" charset="-122"/>
-                <a:cs typeface="Meiryo" pitchFamily="34" charset="-120"/>
-              </a:rPr>
-              <a:t>推奨③×3個で1,190名＝計画1,000名を約19%上回り、過度に緩めず1,000〜1,500名の幅に収まる</a:t>
-            </a:r>
-            <a:endParaRPr lang="en-US" sz="860" dirty="0"/>
-          </a:p>
-        </p:txBody>
-      </p:sp>
-      <p:sp>
-        <p:nvSpPr>
-          <p:cNvPr id="65" name="Shape 63"/>
-          <p:cNvSpPr/>
-          <p:nvPr/>
-        </p:nvSpPr>
-        <p:spPr>
-          <a:xfrm>
-            <a:off x="274320" y="5852160"/>
-            <a:ext cx="6720840" cy="548640"/>
-          </a:xfrm>
-          <a:prstGeom prst="rect">
-            <a:avLst/>
-          </a:prstGeom>
-          <a:solidFill>
-            <a:srgbClr val="EAF6EE"/>
-          </a:solidFill>
-          <a:ln w="9525">
-            <a:solidFill>
-              <a:srgbClr val="369E51"/>
-            </a:solidFill>
-            <a:prstDash val="solid"/>
-          </a:ln>
-        </p:spPr>
-      </p:sp>
-      <p:sp>
-        <p:nvSpPr>
-          <p:cNvPr id="66" name="Shape 64"/>
-          <p:cNvSpPr/>
-          <p:nvPr/>
-        </p:nvSpPr>
-        <p:spPr>
-          <a:xfrm>
-            <a:off x="384048" y="5971032"/>
-            <a:ext cx="914400" cy="310896"/>
-          </a:xfrm>
-          <a:prstGeom prst="roundRect">
-            <a:avLst>
-              <a:gd name="adj" fmla="val 14706"/>
-            </a:avLst>
-          </a:prstGeom>
-          <a:solidFill>
-            <a:srgbClr val="369E51"/>
-          </a:solidFill>
-          <a:ln/>
-        </p:spPr>
-      </p:sp>
-      <p:sp>
-        <p:nvSpPr>
-          <p:cNvPr id="67" name="Text 65"/>
-          <p:cNvSpPr txBox="1"/>
-          <p:nvPr/>
-        </p:nvSpPr>
-        <p:spPr>
-          <a:xfrm>
-            <a:off x="384048" y="5971032"/>
-            <a:ext cx="914400" cy="310896"/>
-          </a:xfrm>
-          <a:prstGeom prst="rect">
-            <a:avLst/>
-          </a:prstGeom>
-          <a:noFill/>
-          <a:ln/>
-        </p:spPr>
-        <p:txBody>
-          <a:bodyPr wrap="square" lIns="0" tIns="0" rIns="0" bIns="0" rtlCol="0" anchor="ctr"/>
-          <a:lstStyle/>
-          <a:p>
-            <a:pPr algn="ctr" indent="0" marL="0">
-              <a:buNone/>
-            </a:pPr>
-            <a:r>
-              <a:rPr lang="en-US" sz="1100" b="1" dirty="0">
-                <a:solidFill>
-                  <a:srgbClr val="FFFFFF"/>
-                </a:solidFill>
-                <a:latin typeface="Meiryo" pitchFamily="34" charset="0"/>
-                <a:ea typeface="Meiryo" pitchFamily="34" charset="-122"/>
-                <a:cs typeface="Meiryo" pitchFamily="34" charset="-120"/>
-              </a:rPr>
-              <a:t>示唆</a:t>
-            </a:r>
-            <a:endParaRPr lang="en-US" sz="1100" dirty="0"/>
-          </a:p>
-        </p:txBody>
-      </p:sp>
-      <p:sp>
-        <p:nvSpPr>
-          <p:cNvPr id="68" name="Text 66"/>
-          <p:cNvSpPr txBox="1"/>
-          <p:nvPr/>
-        </p:nvSpPr>
-        <p:spPr>
-          <a:xfrm>
-            <a:off x="1371600" y="5852160"/>
-            <a:ext cx="5532120" cy="548640"/>
-          </a:xfrm>
-          <a:prstGeom prst="rect">
-            <a:avLst/>
-          </a:prstGeom>
-          <a:noFill/>
-          <a:ln/>
-        </p:spPr>
-        <p:txBody>
-          <a:bodyPr wrap="square" lIns="0" tIns="0" rIns="0" bIns="0" rtlCol="0" anchor="ctr"/>
-          <a:lstStyle/>
-          <a:p>
-            <a:pPr indent="0" marL="0">
-              <a:lnSpc>
-                <a:spcPct val="98000"/>
-              </a:lnSpc>
-              <a:buNone/>
-            </a:pPr>
-            <a:r>
-              <a:rPr lang="en-US" sz="900" dirty="0">
-                <a:solidFill>
-                  <a:srgbClr val="333333"/>
-                </a:solidFill>
-                <a:latin typeface="Meiryo" pitchFamily="34" charset="0"/>
-                <a:ea typeface="Meiryo" pitchFamily="34" charset="-122"/>
-                <a:cs typeface="Meiryo" pitchFamily="34" charset="-120"/>
-              </a:rPr>
-              <a:t>自己評価のため単一スキルでなく「基礎の土台×専門の幅」の複合条件で過大評価を抑制。絶対基準（P2×個数）のため次回チェックでも同一条件で母集団を再現でき、増減を進捗として追える</a:t>
-            </a:r>
-            <a:endParaRPr lang="en-US" sz="900" dirty="0"/>
-          </a:p>
-        </p:txBody>
-      </p:sp>
-      <p:sp>
-        <p:nvSpPr>
-          <p:cNvPr id="69" name="Text 67"/>
           <p:cNvSpPr txBox="1"/>
           <p:nvPr/>
         </p:nvSpPr>
